--- a/outputs/manual-20260527-current-review/presentations/ruti-current-results-scientific-review-v2/output/rUTI_Current_Results_VF_Focused_Review_2026-05-27.pptx
+++ b/outputs/manual-20260527-current-review/presentations/ruti-current-results-scientific-review-v2/output/rUTI_Current_Results_VF_Focused_Review_2026-05-27.pptx
@@ -2,34 +2,34 @@
 <file path=ppt/presentation.xml><?xml version="1.0" encoding="utf-8"?>
 <p:presentation xmlns:p="http://schemas.openxmlformats.org/presentationml/2006/main">
   <p:sldMasterIdLst>
-    <p:sldMasterId xmlns:r="http://schemas.openxmlformats.org/officeDocument/2006/relationships" id="2147483648" r:id="R79a2053fccb24a47"/>
+    <p:sldMasterId xmlns:r="http://schemas.openxmlformats.org/officeDocument/2006/relationships" id="2147483648" r:id="R096d31d507d7479a"/>
   </p:sldMasterIdLst>
   <p:notesMasterIdLst>
-    <p:notesMasterId xmlns:r="http://schemas.openxmlformats.org/officeDocument/2006/relationships" r:id="R59db73e82b4d41a3"/>
+    <p:notesMasterId xmlns:r="http://schemas.openxmlformats.org/officeDocument/2006/relationships" r:id="Re193e927f9c7424b"/>
   </p:notesMasterIdLst>
   <p:sldIdLst>
-    <p:sldId xmlns:r="http://schemas.openxmlformats.org/officeDocument/2006/relationships" id="256" r:id="Rca868f79c9cc471d"/>
-    <p:sldId xmlns:r="http://schemas.openxmlformats.org/officeDocument/2006/relationships" id="257" r:id="R042841a8506e4f41"/>
-    <p:sldId xmlns:r="http://schemas.openxmlformats.org/officeDocument/2006/relationships" id="258" r:id="Re5269786aef743dd"/>
-    <p:sldId xmlns:r="http://schemas.openxmlformats.org/officeDocument/2006/relationships" id="259" r:id="Rdd0a292f49924851"/>
-    <p:sldId xmlns:r="http://schemas.openxmlformats.org/officeDocument/2006/relationships" id="260" r:id="R21a45ec12a8a4909"/>
-    <p:sldId xmlns:r="http://schemas.openxmlformats.org/officeDocument/2006/relationships" id="261" r:id="R044627e28a2d43d2"/>
-    <p:sldId xmlns:r="http://schemas.openxmlformats.org/officeDocument/2006/relationships" id="262" r:id="Radac9870ba4e4c03"/>
-    <p:sldId xmlns:r="http://schemas.openxmlformats.org/officeDocument/2006/relationships" id="263" r:id="Rb27e8f3f88ab4f4f"/>
-    <p:sldId xmlns:r="http://schemas.openxmlformats.org/officeDocument/2006/relationships" id="264" r:id="Rd424141cec6f4373"/>
-    <p:sldId xmlns:r="http://schemas.openxmlformats.org/officeDocument/2006/relationships" id="265" r:id="Ra690ff62fdae418b"/>
-    <p:sldId xmlns:r="http://schemas.openxmlformats.org/officeDocument/2006/relationships" id="266" r:id="R6caba10a1ee54b2b"/>
-    <p:sldId xmlns:r="http://schemas.openxmlformats.org/officeDocument/2006/relationships" id="267" r:id="Rc67ada9c5aa348a3"/>
-    <p:sldId xmlns:r="http://schemas.openxmlformats.org/officeDocument/2006/relationships" id="268" r:id="R9029b006006a4560"/>
-    <p:sldId xmlns:r="http://schemas.openxmlformats.org/officeDocument/2006/relationships" id="269" r:id="R28fe10364ac04c3d"/>
-    <p:sldId xmlns:r="http://schemas.openxmlformats.org/officeDocument/2006/relationships" id="270" r:id="R29003732fc8e45c9"/>
-    <p:sldId xmlns:r="http://schemas.openxmlformats.org/officeDocument/2006/relationships" id="271" r:id="Ref47dde2ec704535"/>
-    <p:sldId xmlns:r="http://schemas.openxmlformats.org/officeDocument/2006/relationships" id="272" r:id="R44a728b0213e4db8"/>
-    <p:sldId xmlns:r="http://schemas.openxmlformats.org/officeDocument/2006/relationships" id="273" r:id="R81dd8614944945af"/>
-    <p:sldId xmlns:r="http://schemas.openxmlformats.org/officeDocument/2006/relationships" id="274" r:id="R2d23fc65a880411b"/>
-    <p:sldId xmlns:r="http://schemas.openxmlformats.org/officeDocument/2006/relationships" id="275" r:id="R254b819542a34ea8"/>
-    <p:sldId xmlns:r="http://schemas.openxmlformats.org/officeDocument/2006/relationships" id="276" r:id="R0c5f6023d7b94e7c"/>
-    <p:sldId xmlns:r="http://schemas.openxmlformats.org/officeDocument/2006/relationships" id="277" r:id="Rf0fed490dab14b8f"/>
+    <p:sldId xmlns:r="http://schemas.openxmlformats.org/officeDocument/2006/relationships" id="256" r:id="R8fb401f3ec994bee"/>
+    <p:sldId xmlns:r="http://schemas.openxmlformats.org/officeDocument/2006/relationships" id="257" r:id="R859f21004de74ef0"/>
+    <p:sldId xmlns:r="http://schemas.openxmlformats.org/officeDocument/2006/relationships" id="258" r:id="R5aeb066d0e064ee4"/>
+    <p:sldId xmlns:r="http://schemas.openxmlformats.org/officeDocument/2006/relationships" id="259" r:id="Rcd7c78f4e72d4c28"/>
+    <p:sldId xmlns:r="http://schemas.openxmlformats.org/officeDocument/2006/relationships" id="260" r:id="R9a86e0c8e7da4437"/>
+    <p:sldId xmlns:r="http://schemas.openxmlformats.org/officeDocument/2006/relationships" id="261" r:id="R818853803e1d4c47"/>
+    <p:sldId xmlns:r="http://schemas.openxmlformats.org/officeDocument/2006/relationships" id="262" r:id="Rb0bd47c1eebf4e5d"/>
+    <p:sldId xmlns:r="http://schemas.openxmlformats.org/officeDocument/2006/relationships" id="263" r:id="R779d3e67f15140c4"/>
+    <p:sldId xmlns:r="http://schemas.openxmlformats.org/officeDocument/2006/relationships" id="264" r:id="R72c3ab868f394cd5"/>
+    <p:sldId xmlns:r="http://schemas.openxmlformats.org/officeDocument/2006/relationships" id="265" r:id="Rf00e89d6e5d24af8"/>
+    <p:sldId xmlns:r="http://schemas.openxmlformats.org/officeDocument/2006/relationships" id="266" r:id="R51e67446ee95421c"/>
+    <p:sldId xmlns:r="http://schemas.openxmlformats.org/officeDocument/2006/relationships" id="267" r:id="R84166fd737da4538"/>
+    <p:sldId xmlns:r="http://schemas.openxmlformats.org/officeDocument/2006/relationships" id="268" r:id="R76125b865a4e4a05"/>
+    <p:sldId xmlns:r="http://schemas.openxmlformats.org/officeDocument/2006/relationships" id="269" r:id="R1f26b52e63f54757"/>
+    <p:sldId xmlns:r="http://schemas.openxmlformats.org/officeDocument/2006/relationships" id="270" r:id="R4a8946e118914978"/>
+    <p:sldId xmlns:r="http://schemas.openxmlformats.org/officeDocument/2006/relationships" id="271" r:id="Rea89ebc2be904ef1"/>
+    <p:sldId xmlns:r="http://schemas.openxmlformats.org/officeDocument/2006/relationships" id="272" r:id="R408e94036a9f48e3"/>
+    <p:sldId xmlns:r="http://schemas.openxmlformats.org/officeDocument/2006/relationships" id="273" r:id="Rb44a8ed1826a4bf9"/>
+    <p:sldId xmlns:r="http://schemas.openxmlformats.org/officeDocument/2006/relationships" id="274" r:id="R8c859b3b45ee478e"/>
+    <p:sldId xmlns:r="http://schemas.openxmlformats.org/officeDocument/2006/relationships" id="275" r:id="R79b23b9a34b34001"/>
+    <p:sldId xmlns:r="http://schemas.openxmlformats.org/officeDocument/2006/relationships" id="276" r:id="Ra3054fa3d21046d0"/>
+    <p:sldId xmlns:r="http://schemas.openxmlformats.org/officeDocument/2006/relationships" id="277" r:id="R5f19e40bf35b4c66"/>
   </p:sldIdLst>
   <p:sldSz cx="12192000" cy="6858000"/>
   <p:notesSz cx="6858000" cy="9144000"/>
@@ -273,7 +273,7 @@
 </p:notesMaster>
 </file>
 
-<file path=ppt/notesMasters/theme/theme2.xml><?xml version="1.0" encoding="utf-8"?>
+<file path=ppt/notesMasters/theme/theme3.xml><?xml version="1.0" encoding="utf-8"?>
 <a:theme xmlns:a="http://schemas.openxmlformats.org/drawingml/2006/main" name="ChatGPT">
   <a:themeElements>
     <a:clrScheme name="ChatGPT">
@@ -510,7 +510,26 @@
         <p:txBody>
           <a:bodyPr xmlns:a="http://schemas.openxmlformats.org/drawingml/2006/main"/>
           <a:lstStyle xmlns:a="http://schemas.openxmlformats.org/drawingml/2006/main"/>
-          <a:p xmlns:a="http://schemas.openxmlformats.org/drawingml/2006/main"/>
+          <a:p xmlns:a="http://schemas.openxmlformats.org/drawingml/2006/main">
+            <a:r>
+              <a:t>Release source: /Users/Aamir/Desktop/rUTIs/results/pipeline/longcycler_release_claim_registry.json</a:t>
+            </a:r>
+          </a:p>
+          <a:p xmlns:a="http://schemas.openxmlformats.org/drawingml/2006/main">
+            <a:r>
+              <a:t>Scope: selected QC-passing Longcycler assemblies only.</a:t>
+            </a:r>
+          </a:p>
+          <a:p xmlns:a="http://schemas.openxmlformats.org/drawingml/2006/main">
+            <a:r>
+              <a:t>Clinical phenotype: versioned operational UTI phenotype.</a:t>
+            </a:r>
+          </a:p>
+          <a:p xmlns:a="http://schemas.openxmlformats.org/drawingml/2006/main">
+            <a:r>
+              <a:t>Analytical anchors: 532 episodes; 893 direct pairs; 371 adjacent pairs; RQ01-RQ10.</a:t>
+            </a:r>
+          </a:p>
         </p:txBody>
       </p:sp>
       <p:sp>
@@ -576,7 +595,26 @@
         <p:txBody>
           <a:bodyPr xmlns:a="http://schemas.openxmlformats.org/drawingml/2006/main"/>
           <a:lstStyle xmlns:a="http://schemas.openxmlformats.org/drawingml/2006/main"/>
-          <a:p xmlns:a="http://schemas.openxmlformats.org/drawingml/2006/main"/>
+          <a:p xmlns:a="http://schemas.openxmlformats.org/drawingml/2006/main">
+            <a:r>
+              <a:t>Release source: /Users/Aamir/Desktop/rUTIs/results/pipeline/longcycler_release_claim_registry.json</a:t>
+            </a:r>
+          </a:p>
+          <a:p xmlns:a="http://schemas.openxmlformats.org/drawingml/2006/main">
+            <a:r>
+              <a:t>Scope: selected QC-passing Longcycler assemblies only.</a:t>
+            </a:r>
+          </a:p>
+          <a:p xmlns:a="http://schemas.openxmlformats.org/drawingml/2006/main">
+            <a:r>
+              <a:t>Clinical phenotype: versioned operational UTI phenotype.</a:t>
+            </a:r>
+          </a:p>
+          <a:p xmlns:a="http://schemas.openxmlformats.org/drawingml/2006/main">
+            <a:r>
+              <a:t>Analytical anchors: 532 episodes; 893 direct pairs; 371 adjacent pairs; RQ01-RQ10.</a:t>
+            </a:r>
+          </a:p>
         </p:txBody>
       </p:sp>
       <p:sp>
@@ -642,7 +680,26 @@
         <p:txBody>
           <a:bodyPr xmlns:a="http://schemas.openxmlformats.org/drawingml/2006/main"/>
           <a:lstStyle xmlns:a="http://schemas.openxmlformats.org/drawingml/2006/main"/>
-          <a:p xmlns:a="http://schemas.openxmlformats.org/drawingml/2006/main"/>
+          <a:p xmlns:a="http://schemas.openxmlformats.org/drawingml/2006/main">
+            <a:r>
+              <a:t>Release source: /Users/Aamir/Desktop/rUTIs/results/pipeline/longcycler_release_claim_registry.json</a:t>
+            </a:r>
+          </a:p>
+          <a:p xmlns:a="http://schemas.openxmlformats.org/drawingml/2006/main">
+            <a:r>
+              <a:t>Scope: selected QC-passing Longcycler assemblies only.</a:t>
+            </a:r>
+          </a:p>
+          <a:p xmlns:a="http://schemas.openxmlformats.org/drawingml/2006/main">
+            <a:r>
+              <a:t>Clinical phenotype: versioned operational UTI phenotype.</a:t>
+            </a:r>
+          </a:p>
+          <a:p xmlns:a="http://schemas.openxmlformats.org/drawingml/2006/main">
+            <a:r>
+              <a:t>Analytical anchors: 532 episodes; 893 direct pairs; 371 adjacent pairs; RQ01-RQ10.</a:t>
+            </a:r>
+          </a:p>
         </p:txBody>
       </p:sp>
       <p:sp>
@@ -708,7 +765,26 @@
         <p:txBody>
           <a:bodyPr xmlns:a="http://schemas.openxmlformats.org/drawingml/2006/main"/>
           <a:lstStyle xmlns:a="http://schemas.openxmlformats.org/drawingml/2006/main"/>
-          <a:p xmlns:a="http://schemas.openxmlformats.org/drawingml/2006/main"/>
+          <a:p xmlns:a="http://schemas.openxmlformats.org/drawingml/2006/main">
+            <a:r>
+              <a:t>Release source: /Users/Aamir/Desktop/rUTIs/results/pipeline/longcycler_release_claim_registry.json</a:t>
+            </a:r>
+          </a:p>
+          <a:p xmlns:a="http://schemas.openxmlformats.org/drawingml/2006/main">
+            <a:r>
+              <a:t>Scope: selected QC-passing Longcycler assemblies only.</a:t>
+            </a:r>
+          </a:p>
+          <a:p xmlns:a="http://schemas.openxmlformats.org/drawingml/2006/main">
+            <a:r>
+              <a:t>Clinical phenotype: versioned operational UTI phenotype.</a:t>
+            </a:r>
+          </a:p>
+          <a:p xmlns:a="http://schemas.openxmlformats.org/drawingml/2006/main">
+            <a:r>
+              <a:t>Analytical anchors: 532 episodes; 893 direct pairs; 371 adjacent pairs; RQ01-RQ10.</a:t>
+            </a:r>
+          </a:p>
         </p:txBody>
       </p:sp>
       <p:sp>
@@ -774,7 +850,26 @@
         <p:txBody>
           <a:bodyPr xmlns:a="http://schemas.openxmlformats.org/drawingml/2006/main"/>
           <a:lstStyle xmlns:a="http://schemas.openxmlformats.org/drawingml/2006/main"/>
-          <a:p xmlns:a="http://schemas.openxmlformats.org/drawingml/2006/main"/>
+          <a:p xmlns:a="http://schemas.openxmlformats.org/drawingml/2006/main">
+            <a:r>
+              <a:t>Release source: /Users/Aamir/Desktop/rUTIs/results/pipeline/longcycler_release_claim_registry.json</a:t>
+            </a:r>
+          </a:p>
+          <a:p xmlns:a="http://schemas.openxmlformats.org/drawingml/2006/main">
+            <a:r>
+              <a:t>Scope: selected QC-passing Longcycler assemblies only.</a:t>
+            </a:r>
+          </a:p>
+          <a:p xmlns:a="http://schemas.openxmlformats.org/drawingml/2006/main">
+            <a:r>
+              <a:t>Clinical phenotype: versioned operational UTI phenotype.</a:t>
+            </a:r>
+          </a:p>
+          <a:p xmlns:a="http://schemas.openxmlformats.org/drawingml/2006/main">
+            <a:r>
+              <a:t>Analytical anchors: 532 episodes; 893 direct pairs; 371 adjacent pairs; RQ01-RQ10.</a:t>
+            </a:r>
+          </a:p>
         </p:txBody>
       </p:sp>
       <p:sp>
@@ -840,7 +935,26 @@
         <p:txBody>
           <a:bodyPr xmlns:a="http://schemas.openxmlformats.org/drawingml/2006/main"/>
           <a:lstStyle xmlns:a="http://schemas.openxmlformats.org/drawingml/2006/main"/>
-          <a:p xmlns:a="http://schemas.openxmlformats.org/drawingml/2006/main"/>
+          <a:p xmlns:a="http://schemas.openxmlformats.org/drawingml/2006/main">
+            <a:r>
+              <a:t>Release source: /Users/Aamir/Desktop/rUTIs/results/pipeline/longcycler_release_claim_registry.json</a:t>
+            </a:r>
+          </a:p>
+          <a:p xmlns:a="http://schemas.openxmlformats.org/drawingml/2006/main">
+            <a:r>
+              <a:t>Scope: selected QC-passing Longcycler assemblies only.</a:t>
+            </a:r>
+          </a:p>
+          <a:p xmlns:a="http://schemas.openxmlformats.org/drawingml/2006/main">
+            <a:r>
+              <a:t>Clinical phenotype: versioned operational UTI phenotype.</a:t>
+            </a:r>
+          </a:p>
+          <a:p xmlns:a="http://schemas.openxmlformats.org/drawingml/2006/main">
+            <a:r>
+              <a:t>Analytical anchors: 532 episodes; 893 direct pairs; 371 adjacent pairs; RQ01-RQ10.</a:t>
+            </a:r>
+          </a:p>
         </p:txBody>
       </p:sp>
       <p:sp>
@@ -906,7 +1020,26 @@
         <p:txBody>
           <a:bodyPr xmlns:a="http://schemas.openxmlformats.org/drawingml/2006/main"/>
           <a:lstStyle xmlns:a="http://schemas.openxmlformats.org/drawingml/2006/main"/>
-          <a:p xmlns:a="http://schemas.openxmlformats.org/drawingml/2006/main"/>
+          <a:p xmlns:a="http://schemas.openxmlformats.org/drawingml/2006/main">
+            <a:r>
+              <a:t>Release source: /Users/Aamir/Desktop/rUTIs/results/pipeline/longcycler_release_claim_registry.json</a:t>
+            </a:r>
+          </a:p>
+          <a:p xmlns:a="http://schemas.openxmlformats.org/drawingml/2006/main">
+            <a:r>
+              <a:t>Scope: selected QC-passing Longcycler assemblies only.</a:t>
+            </a:r>
+          </a:p>
+          <a:p xmlns:a="http://schemas.openxmlformats.org/drawingml/2006/main">
+            <a:r>
+              <a:t>Clinical phenotype: versioned operational UTI phenotype.</a:t>
+            </a:r>
+          </a:p>
+          <a:p xmlns:a="http://schemas.openxmlformats.org/drawingml/2006/main">
+            <a:r>
+              <a:t>Analytical anchors: 532 episodes; 893 direct pairs; 371 adjacent pairs; RQ01-RQ10.</a:t>
+            </a:r>
+          </a:p>
         </p:txBody>
       </p:sp>
       <p:sp>
@@ -972,7 +1105,26 @@
         <p:txBody>
           <a:bodyPr xmlns:a="http://schemas.openxmlformats.org/drawingml/2006/main"/>
           <a:lstStyle xmlns:a="http://schemas.openxmlformats.org/drawingml/2006/main"/>
-          <a:p xmlns:a="http://schemas.openxmlformats.org/drawingml/2006/main"/>
+          <a:p xmlns:a="http://schemas.openxmlformats.org/drawingml/2006/main">
+            <a:r>
+              <a:t>Release source: /Users/Aamir/Desktop/rUTIs/results/pipeline/longcycler_release_claim_registry.json</a:t>
+            </a:r>
+          </a:p>
+          <a:p xmlns:a="http://schemas.openxmlformats.org/drawingml/2006/main">
+            <a:r>
+              <a:t>Scope: selected QC-passing Longcycler assemblies only.</a:t>
+            </a:r>
+          </a:p>
+          <a:p xmlns:a="http://schemas.openxmlformats.org/drawingml/2006/main">
+            <a:r>
+              <a:t>Clinical phenotype: versioned operational UTI phenotype.</a:t>
+            </a:r>
+          </a:p>
+          <a:p xmlns:a="http://schemas.openxmlformats.org/drawingml/2006/main">
+            <a:r>
+              <a:t>Analytical anchors: 532 episodes; 893 direct pairs; 371 adjacent pairs; RQ01-RQ10.</a:t>
+            </a:r>
+          </a:p>
         </p:txBody>
       </p:sp>
       <p:sp>
@@ -1038,7 +1190,26 @@
         <p:txBody>
           <a:bodyPr xmlns:a="http://schemas.openxmlformats.org/drawingml/2006/main"/>
           <a:lstStyle xmlns:a="http://schemas.openxmlformats.org/drawingml/2006/main"/>
-          <a:p xmlns:a="http://schemas.openxmlformats.org/drawingml/2006/main"/>
+          <a:p xmlns:a="http://schemas.openxmlformats.org/drawingml/2006/main">
+            <a:r>
+              <a:t>Release source: /Users/Aamir/Desktop/rUTIs/results/pipeline/longcycler_release_claim_registry.json</a:t>
+            </a:r>
+          </a:p>
+          <a:p xmlns:a="http://schemas.openxmlformats.org/drawingml/2006/main">
+            <a:r>
+              <a:t>Scope: selected QC-passing Longcycler assemblies only.</a:t>
+            </a:r>
+          </a:p>
+          <a:p xmlns:a="http://schemas.openxmlformats.org/drawingml/2006/main">
+            <a:r>
+              <a:t>Clinical phenotype: versioned operational UTI phenotype.</a:t>
+            </a:r>
+          </a:p>
+          <a:p xmlns:a="http://schemas.openxmlformats.org/drawingml/2006/main">
+            <a:r>
+              <a:t>Analytical anchors: 532 episodes; 893 direct pairs; 371 adjacent pairs; RQ01-RQ10.</a:t>
+            </a:r>
+          </a:p>
         </p:txBody>
       </p:sp>
       <p:sp>
@@ -1104,7 +1275,26 @@
         <p:txBody>
           <a:bodyPr xmlns:a="http://schemas.openxmlformats.org/drawingml/2006/main"/>
           <a:lstStyle xmlns:a="http://schemas.openxmlformats.org/drawingml/2006/main"/>
-          <a:p xmlns:a="http://schemas.openxmlformats.org/drawingml/2006/main"/>
+          <a:p xmlns:a="http://schemas.openxmlformats.org/drawingml/2006/main">
+            <a:r>
+              <a:t>Release source: /Users/Aamir/Desktop/rUTIs/results/pipeline/longcycler_release_claim_registry.json</a:t>
+            </a:r>
+          </a:p>
+          <a:p xmlns:a="http://schemas.openxmlformats.org/drawingml/2006/main">
+            <a:r>
+              <a:t>Scope: selected QC-passing Longcycler assemblies only.</a:t>
+            </a:r>
+          </a:p>
+          <a:p xmlns:a="http://schemas.openxmlformats.org/drawingml/2006/main">
+            <a:r>
+              <a:t>Clinical phenotype: versioned operational UTI phenotype.</a:t>
+            </a:r>
+          </a:p>
+          <a:p xmlns:a="http://schemas.openxmlformats.org/drawingml/2006/main">
+            <a:r>
+              <a:t>Analytical anchors: 532 episodes; 893 direct pairs; 371 adjacent pairs; RQ01-RQ10.</a:t>
+            </a:r>
+          </a:p>
         </p:txBody>
       </p:sp>
       <p:sp>
@@ -1170,7 +1360,26 @@
         <p:txBody>
           <a:bodyPr xmlns:a="http://schemas.openxmlformats.org/drawingml/2006/main"/>
           <a:lstStyle xmlns:a="http://schemas.openxmlformats.org/drawingml/2006/main"/>
-          <a:p xmlns:a="http://schemas.openxmlformats.org/drawingml/2006/main"/>
+          <a:p xmlns:a="http://schemas.openxmlformats.org/drawingml/2006/main">
+            <a:r>
+              <a:t>Release source: /Users/Aamir/Desktop/rUTIs/results/pipeline/longcycler_release_claim_registry.json</a:t>
+            </a:r>
+          </a:p>
+          <a:p xmlns:a="http://schemas.openxmlformats.org/drawingml/2006/main">
+            <a:r>
+              <a:t>Scope: selected QC-passing Longcycler assemblies only.</a:t>
+            </a:r>
+          </a:p>
+          <a:p xmlns:a="http://schemas.openxmlformats.org/drawingml/2006/main">
+            <a:r>
+              <a:t>Clinical phenotype: versioned operational UTI phenotype.</a:t>
+            </a:r>
+          </a:p>
+          <a:p xmlns:a="http://schemas.openxmlformats.org/drawingml/2006/main">
+            <a:r>
+              <a:t>Analytical anchors: 532 episodes; 893 direct pairs; 371 adjacent pairs; RQ01-RQ10.</a:t>
+            </a:r>
+          </a:p>
         </p:txBody>
       </p:sp>
       <p:sp>
@@ -1236,7 +1445,26 @@
         <p:txBody>
           <a:bodyPr xmlns:a="http://schemas.openxmlformats.org/drawingml/2006/main"/>
           <a:lstStyle xmlns:a="http://schemas.openxmlformats.org/drawingml/2006/main"/>
-          <a:p xmlns:a="http://schemas.openxmlformats.org/drawingml/2006/main"/>
+          <a:p xmlns:a="http://schemas.openxmlformats.org/drawingml/2006/main">
+            <a:r>
+              <a:t>Release source: /Users/Aamir/Desktop/rUTIs/results/pipeline/longcycler_release_claim_registry.json</a:t>
+            </a:r>
+          </a:p>
+          <a:p xmlns:a="http://schemas.openxmlformats.org/drawingml/2006/main">
+            <a:r>
+              <a:t>Scope: selected QC-passing Longcycler assemblies only.</a:t>
+            </a:r>
+          </a:p>
+          <a:p xmlns:a="http://schemas.openxmlformats.org/drawingml/2006/main">
+            <a:r>
+              <a:t>Clinical phenotype: versioned operational UTI phenotype.</a:t>
+            </a:r>
+          </a:p>
+          <a:p xmlns:a="http://schemas.openxmlformats.org/drawingml/2006/main">
+            <a:r>
+              <a:t>Analytical anchors: 532 episodes; 893 direct pairs; 371 adjacent pairs; RQ01-RQ10.</a:t>
+            </a:r>
+          </a:p>
         </p:txBody>
       </p:sp>
       <p:sp>
@@ -1302,7 +1530,26 @@
         <p:txBody>
           <a:bodyPr xmlns:a="http://schemas.openxmlformats.org/drawingml/2006/main"/>
           <a:lstStyle xmlns:a="http://schemas.openxmlformats.org/drawingml/2006/main"/>
-          <a:p xmlns:a="http://schemas.openxmlformats.org/drawingml/2006/main"/>
+          <a:p xmlns:a="http://schemas.openxmlformats.org/drawingml/2006/main">
+            <a:r>
+              <a:t>Release source: /Users/Aamir/Desktop/rUTIs/results/pipeline/longcycler_release_claim_registry.json</a:t>
+            </a:r>
+          </a:p>
+          <a:p xmlns:a="http://schemas.openxmlformats.org/drawingml/2006/main">
+            <a:r>
+              <a:t>Scope: selected QC-passing Longcycler assemblies only.</a:t>
+            </a:r>
+          </a:p>
+          <a:p xmlns:a="http://schemas.openxmlformats.org/drawingml/2006/main">
+            <a:r>
+              <a:t>Clinical phenotype: versioned operational UTI phenotype.</a:t>
+            </a:r>
+          </a:p>
+          <a:p xmlns:a="http://schemas.openxmlformats.org/drawingml/2006/main">
+            <a:r>
+              <a:t>Analytical anchors: 532 episodes; 893 direct pairs; 371 adjacent pairs; RQ01-RQ10.</a:t>
+            </a:r>
+          </a:p>
         </p:txBody>
       </p:sp>
       <p:sp>
@@ -1368,7 +1615,26 @@
         <p:txBody>
           <a:bodyPr xmlns:a="http://schemas.openxmlformats.org/drawingml/2006/main"/>
           <a:lstStyle xmlns:a="http://schemas.openxmlformats.org/drawingml/2006/main"/>
-          <a:p xmlns:a="http://schemas.openxmlformats.org/drawingml/2006/main"/>
+          <a:p xmlns:a="http://schemas.openxmlformats.org/drawingml/2006/main">
+            <a:r>
+              <a:t>Release source: /Users/Aamir/Desktop/rUTIs/results/pipeline/longcycler_release_claim_registry.json</a:t>
+            </a:r>
+          </a:p>
+          <a:p xmlns:a="http://schemas.openxmlformats.org/drawingml/2006/main">
+            <a:r>
+              <a:t>Scope: selected QC-passing Longcycler assemblies only.</a:t>
+            </a:r>
+          </a:p>
+          <a:p xmlns:a="http://schemas.openxmlformats.org/drawingml/2006/main">
+            <a:r>
+              <a:t>Clinical phenotype: versioned operational UTI phenotype.</a:t>
+            </a:r>
+          </a:p>
+          <a:p xmlns:a="http://schemas.openxmlformats.org/drawingml/2006/main">
+            <a:r>
+              <a:t>Analytical anchors: 532 episodes; 893 direct pairs; 371 adjacent pairs; RQ01-RQ10.</a:t>
+            </a:r>
+          </a:p>
         </p:txBody>
       </p:sp>
       <p:sp>
@@ -1434,7 +1700,26 @@
         <p:txBody>
           <a:bodyPr xmlns:a="http://schemas.openxmlformats.org/drawingml/2006/main"/>
           <a:lstStyle xmlns:a="http://schemas.openxmlformats.org/drawingml/2006/main"/>
-          <a:p xmlns:a="http://schemas.openxmlformats.org/drawingml/2006/main"/>
+          <a:p xmlns:a="http://schemas.openxmlformats.org/drawingml/2006/main">
+            <a:r>
+              <a:t>Release source: /Users/Aamir/Desktop/rUTIs/results/pipeline/longcycler_release_claim_registry.json</a:t>
+            </a:r>
+          </a:p>
+          <a:p xmlns:a="http://schemas.openxmlformats.org/drawingml/2006/main">
+            <a:r>
+              <a:t>Scope: selected QC-passing Longcycler assemblies only.</a:t>
+            </a:r>
+          </a:p>
+          <a:p xmlns:a="http://schemas.openxmlformats.org/drawingml/2006/main">
+            <a:r>
+              <a:t>Clinical phenotype: versioned operational UTI phenotype.</a:t>
+            </a:r>
+          </a:p>
+          <a:p xmlns:a="http://schemas.openxmlformats.org/drawingml/2006/main">
+            <a:r>
+              <a:t>Analytical anchors: 532 episodes; 893 direct pairs; 371 adjacent pairs; RQ01-RQ10.</a:t>
+            </a:r>
+          </a:p>
         </p:txBody>
       </p:sp>
       <p:sp>
@@ -1500,7 +1785,26 @@
         <p:txBody>
           <a:bodyPr xmlns:a="http://schemas.openxmlformats.org/drawingml/2006/main"/>
           <a:lstStyle xmlns:a="http://schemas.openxmlformats.org/drawingml/2006/main"/>
-          <a:p xmlns:a="http://schemas.openxmlformats.org/drawingml/2006/main"/>
+          <a:p xmlns:a="http://schemas.openxmlformats.org/drawingml/2006/main">
+            <a:r>
+              <a:t>Release source: /Users/Aamir/Desktop/rUTIs/results/pipeline/longcycler_release_claim_registry.json</a:t>
+            </a:r>
+          </a:p>
+          <a:p xmlns:a="http://schemas.openxmlformats.org/drawingml/2006/main">
+            <a:r>
+              <a:t>Scope: selected QC-passing Longcycler assemblies only.</a:t>
+            </a:r>
+          </a:p>
+          <a:p xmlns:a="http://schemas.openxmlformats.org/drawingml/2006/main">
+            <a:r>
+              <a:t>Clinical phenotype: versioned operational UTI phenotype.</a:t>
+            </a:r>
+          </a:p>
+          <a:p xmlns:a="http://schemas.openxmlformats.org/drawingml/2006/main">
+            <a:r>
+              <a:t>Analytical anchors: 532 episodes; 893 direct pairs; 371 adjacent pairs; RQ01-RQ10.</a:t>
+            </a:r>
+          </a:p>
         </p:txBody>
       </p:sp>
       <p:sp>
@@ -1566,7 +1870,26 @@
         <p:txBody>
           <a:bodyPr xmlns:a="http://schemas.openxmlformats.org/drawingml/2006/main"/>
           <a:lstStyle xmlns:a="http://schemas.openxmlformats.org/drawingml/2006/main"/>
-          <a:p xmlns:a="http://schemas.openxmlformats.org/drawingml/2006/main"/>
+          <a:p xmlns:a="http://schemas.openxmlformats.org/drawingml/2006/main">
+            <a:r>
+              <a:t>Release source: /Users/Aamir/Desktop/rUTIs/results/pipeline/longcycler_release_claim_registry.json</a:t>
+            </a:r>
+          </a:p>
+          <a:p xmlns:a="http://schemas.openxmlformats.org/drawingml/2006/main">
+            <a:r>
+              <a:t>Scope: selected QC-passing Longcycler assemblies only.</a:t>
+            </a:r>
+          </a:p>
+          <a:p xmlns:a="http://schemas.openxmlformats.org/drawingml/2006/main">
+            <a:r>
+              <a:t>Clinical phenotype: versioned operational UTI phenotype.</a:t>
+            </a:r>
+          </a:p>
+          <a:p xmlns:a="http://schemas.openxmlformats.org/drawingml/2006/main">
+            <a:r>
+              <a:t>Analytical anchors: 532 episodes; 893 direct pairs; 371 adjacent pairs; RQ01-RQ10.</a:t>
+            </a:r>
+          </a:p>
         </p:txBody>
       </p:sp>
       <p:sp>
@@ -1632,7 +1955,26 @@
         <p:txBody>
           <a:bodyPr xmlns:a="http://schemas.openxmlformats.org/drawingml/2006/main"/>
           <a:lstStyle xmlns:a="http://schemas.openxmlformats.org/drawingml/2006/main"/>
-          <a:p xmlns:a="http://schemas.openxmlformats.org/drawingml/2006/main"/>
+          <a:p xmlns:a="http://schemas.openxmlformats.org/drawingml/2006/main">
+            <a:r>
+              <a:t>Release source: /Users/Aamir/Desktop/rUTIs/results/pipeline/longcycler_release_claim_registry.json</a:t>
+            </a:r>
+          </a:p>
+          <a:p xmlns:a="http://schemas.openxmlformats.org/drawingml/2006/main">
+            <a:r>
+              <a:t>Scope: selected QC-passing Longcycler assemblies only.</a:t>
+            </a:r>
+          </a:p>
+          <a:p xmlns:a="http://schemas.openxmlformats.org/drawingml/2006/main">
+            <a:r>
+              <a:t>Clinical phenotype: versioned operational UTI phenotype.</a:t>
+            </a:r>
+          </a:p>
+          <a:p xmlns:a="http://schemas.openxmlformats.org/drawingml/2006/main">
+            <a:r>
+              <a:t>Analytical anchors: 532 episodes; 893 direct pairs; 371 adjacent pairs; RQ01-RQ10.</a:t>
+            </a:r>
+          </a:p>
         </p:txBody>
       </p:sp>
       <p:sp>
@@ -1698,7 +2040,26 @@
         <p:txBody>
           <a:bodyPr xmlns:a="http://schemas.openxmlformats.org/drawingml/2006/main"/>
           <a:lstStyle xmlns:a="http://schemas.openxmlformats.org/drawingml/2006/main"/>
-          <a:p xmlns:a="http://schemas.openxmlformats.org/drawingml/2006/main"/>
+          <a:p xmlns:a="http://schemas.openxmlformats.org/drawingml/2006/main">
+            <a:r>
+              <a:t>Release source: /Users/Aamir/Desktop/rUTIs/results/pipeline/longcycler_release_claim_registry.json</a:t>
+            </a:r>
+          </a:p>
+          <a:p xmlns:a="http://schemas.openxmlformats.org/drawingml/2006/main">
+            <a:r>
+              <a:t>Scope: selected QC-passing Longcycler assemblies only.</a:t>
+            </a:r>
+          </a:p>
+          <a:p xmlns:a="http://schemas.openxmlformats.org/drawingml/2006/main">
+            <a:r>
+              <a:t>Clinical phenotype: versioned operational UTI phenotype.</a:t>
+            </a:r>
+          </a:p>
+          <a:p xmlns:a="http://schemas.openxmlformats.org/drawingml/2006/main">
+            <a:r>
+              <a:t>Analytical anchors: 532 episodes; 893 direct pairs; 371 adjacent pairs; RQ01-RQ10.</a:t>
+            </a:r>
+          </a:p>
         </p:txBody>
       </p:sp>
       <p:sp>
@@ -1764,7 +2125,26 @@
         <p:txBody>
           <a:bodyPr xmlns:a="http://schemas.openxmlformats.org/drawingml/2006/main"/>
           <a:lstStyle xmlns:a="http://schemas.openxmlformats.org/drawingml/2006/main"/>
-          <a:p xmlns:a="http://schemas.openxmlformats.org/drawingml/2006/main"/>
+          <a:p xmlns:a="http://schemas.openxmlformats.org/drawingml/2006/main">
+            <a:r>
+              <a:t>Release source: /Users/Aamir/Desktop/rUTIs/results/pipeline/longcycler_release_claim_registry.json</a:t>
+            </a:r>
+          </a:p>
+          <a:p xmlns:a="http://schemas.openxmlformats.org/drawingml/2006/main">
+            <a:r>
+              <a:t>Scope: selected QC-passing Longcycler assemblies only.</a:t>
+            </a:r>
+          </a:p>
+          <a:p xmlns:a="http://schemas.openxmlformats.org/drawingml/2006/main">
+            <a:r>
+              <a:t>Clinical phenotype: versioned operational UTI phenotype.</a:t>
+            </a:r>
+          </a:p>
+          <a:p xmlns:a="http://schemas.openxmlformats.org/drawingml/2006/main">
+            <a:r>
+              <a:t>Analytical anchors: 532 episodes; 893 direct pairs; 371 adjacent pairs; RQ01-RQ10.</a:t>
+            </a:r>
+          </a:p>
         </p:txBody>
       </p:sp>
       <p:sp>
@@ -1830,7 +2210,26 @@
         <p:txBody>
           <a:bodyPr xmlns:a="http://schemas.openxmlformats.org/drawingml/2006/main"/>
           <a:lstStyle xmlns:a="http://schemas.openxmlformats.org/drawingml/2006/main"/>
-          <a:p xmlns:a="http://schemas.openxmlformats.org/drawingml/2006/main"/>
+          <a:p xmlns:a="http://schemas.openxmlformats.org/drawingml/2006/main">
+            <a:r>
+              <a:t>Release source: /Users/Aamir/Desktop/rUTIs/results/pipeline/longcycler_release_claim_registry.json</a:t>
+            </a:r>
+          </a:p>
+          <a:p xmlns:a="http://schemas.openxmlformats.org/drawingml/2006/main">
+            <a:r>
+              <a:t>Scope: selected QC-passing Longcycler assemblies only.</a:t>
+            </a:r>
+          </a:p>
+          <a:p xmlns:a="http://schemas.openxmlformats.org/drawingml/2006/main">
+            <a:r>
+              <a:t>Clinical phenotype: versioned operational UTI phenotype.</a:t>
+            </a:r>
+          </a:p>
+          <a:p xmlns:a="http://schemas.openxmlformats.org/drawingml/2006/main">
+            <a:r>
+              <a:t>Analytical anchors: 532 episodes; 893 direct pairs; 371 adjacent pairs; RQ01-RQ10.</a:t>
+            </a:r>
+          </a:p>
         </p:txBody>
       </p:sp>
       <p:sp>
@@ -1896,7 +2295,26 @@
         <p:txBody>
           <a:bodyPr xmlns:a="http://schemas.openxmlformats.org/drawingml/2006/main"/>
           <a:lstStyle xmlns:a="http://schemas.openxmlformats.org/drawingml/2006/main"/>
-          <a:p xmlns:a="http://schemas.openxmlformats.org/drawingml/2006/main"/>
+          <a:p xmlns:a="http://schemas.openxmlformats.org/drawingml/2006/main">
+            <a:r>
+              <a:t>Release source: /Users/Aamir/Desktop/rUTIs/results/pipeline/longcycler_release_claim_registry.json</a:t>
+            </a:r>
+          </a:p>
+          <a:p xmlns:a="http://schemas.openxmlformats.org/drawingml/2006/main">
+            <a:r>
+              <a:t>Scope: selected QC-passing Longcycler assemblies only.</a:t>
+            </a:r>
+          </a:p>
+          <a:p xmlns:a="http://schemas.openxmlformats.org/drawingml/2006/main">
+            <a:r>
+              <a:t>Clinical phenotype: versioned operational UTI phenotype.</a:t>
+            </a:r>
+          </a:p>
+          <a:p xmlns:a="http://schemas.openxmlformats.org/drawingml/2006/main">
+            <a:r>
+              <a:t>Analytical anchors: 532 episodes; 893 direct pairs; 371 adjacent pairs; RQ01-RQ10.</a:t>
+            </a:r>
+          </a:p>
         </p:txBody>
       </p:sp>
       <p:sp>
@@ -1924,7 +2342,7 @@
 </p:notes>
 </file>
 
-<file path=ppt/slideLayouts/slideLayout2.xml><?xml version="1.0" encoding="utf-8"?>
+<file path=ppt/slideLayouts/slideLayout1.xml><?xml version="1.0" encoding="utf-8"?>
 <p:sldLayout xmlns:p="http://schemas.openxmlformats.org/presentationml/2006/main" type="title">
   <p:cSld name="Title Slide">
     <p:spTree>
@@ -1962,7 +2380,7 @@
   </p:cSld>
   <p:clrMap bg1="lt1" tx1="dk1" bg2="lt2" tx2="dk2" accent1="accent1" accent2="accent2" accent3="accent3" accent4="accent4" accent5="accent5" accent6="accent6" hlink="hlink" folHlink="folHlink"/>
   <p:sldLayoutIdLst>
-    <p:sldLayoutId xmlns:r="http://schemas.openxmlformats.org/officeDocument/2006/relationships" id="2147483649" r:id="R404516bf1d114694"/>
+    <p:sldLayoutId xmlns:r="http://schemas.openxmlformats.org/officeDocument/2006/relationships" id="2147483649" r:id="Rf9a35cf63f04459a"/>
   </p:sldLayoutIdLst>
   <p:txStyles>
     <p:titleStyle>
@@ -2244,6 +2662,205 @@
 </p:sldMaster>
 </file>
 
+<file path=ppt/slideMasters/theme/theme2.xml><?xml version="1.0" encoding="utf-8"?>
+<a:theme xmlns:a="http://schemas.openxmlformats.org/drawingml/2006/main" name="ChatGPT">
+  <a:themeElements>
+    <a:clrScheme name="ChatGPT">
+      <a:dk1>
+        <a:srgbClr val="000000"/>
+      </a:dk1>
+      <a:lt1>
+        <a:srgbClr val="FFFFFF"/>
+      </a:lt1>
+      <a:dk2>
+        <a:srgbClr val="0E2841"/>
+      </a:dk2>
+      <a:lt2>
+        <a:srgbClr val="E8E8E8"/>
+      </a:lt2>
+      <a:accent1>
+        <a:srgbClr val="156082"/>
+      </a:accent1>
+      <a:accent2>
+        <a:srgbClr val="E97132"/>
+      </a:accent2>
+      <a:accent3>
+        <a:srgbClr val="196B24"/>
+      </a:accent3>
+      <a:accent4>
+        <a:srgbClr val="0F9ED5"/>
+      </a:accent4>
+      <a:accent5>
+        <a:srgbClr val="A02B93"/>
+      </a:accent5>
+      <a:accent6>
+        <a:srgbClr val="4EA72E"/>
+      </a:accent6>
+      <a:hlink>
+        <a:srgbClr val="467886"/>
+      </a:hlink>
+      <a:folHlink>
+        <a:srgbClr val="96607D"/>
+      </a:folHlink>
+    </a:clrScheme>
+    <a:fontScheme name="Office">
+      <a:majorFont>
+        <a:latin typeface="Calibri Light"/>
+        <a:ea typeface="Calibri Light"/>
+        <a:cs typeface="Calibri Light"/>
+      </a:majorFont>
+      <a:minorFont>
+        <a:latin typeface="Calibri"/>
+        <a:ea typeface="Calibri"/>
+        <a:cs typeface="Calibri"/>
+      </a:minorFont>
+    </a:fontScheme>
+    <a:fmtScheme name="ChatGPT">
+      <a:fillStyleLst>
+        <a:solidFill>
+          <a:schemeClr val="phClr"/>
+        </a:solidFill>
+        <a:solidFill>
+          <a:schemeClr val="dk1"/>
+        </a:solidFill>
+        <a:solidFill>
+          <a:schemeClr val="accent1"/>
+        </a:solidFill>
+      </a:fillStyleLst>
+      <a:lnStyleLst>
+        <a:ln w="12700">
+          <a:solidFill>
+            <a:schemeClr val="phClr"/>
+          </a:solidFill>
+          <a:prstDash val="solid"/>
+        </a:ln>
+        <a:ln w="19050">
+          <a:solidFill>
+            <a:schemeClr val="phClr"/>
+          </a:solidFill>
+          <a:prstDash val="solid"/>
+        </a:ln>
+        <a:ln w="25400">
+          <a:solidFill>
+            <a:schemeClr val="phClr"/>
+          </a:solidFill>
+          <a:prstDash val="solid"/>
+        </a:ln>
+      </a:lnStyleLst>
+      <a:effectStyleLst>
+        <a:effectStyle>
+          <a:effectLst/>
+        </a:effectStyle>
+        <a:effectStyle>
+          <a:effectLst/>
+        </a:effectStyle>
+        <a:effectStyle>
+          <a:effectLst>
+            <a:outerShdw blurRad="57150" dist="19050" dir="5400000">
+              <a:srgbClr val="000000">
+                <a:alpha val="16000"/>
+              </a:srgbClr>
+            </a:outerShdw>
+          </a:effectLst>
+        </a:effectStyle>
+        <a:effectStyle>
+          <a:effectLst>
+            <a:outerShdw blurRad="19050" dist="9525" dir="5400000">
+              <a:srgbClr val="000000">
+                <a:alpha val="6000"/>
+              </a:srgbClr>
+            </a:outerShdw>
+          </a:effectLst>
+        </a:effectStyle>
+        <a:effectStyle>
+          <a:effectLst>
+            <a:outerShdw blurRad="28575" dist="9525" dir="5400000">
+              <a:srgbClr val="000000">
+                <a:alpha val="8000"/>
+              </a:srgbClr>
+            </a:outerShdw>
+          </a:effectLst>
+        </a:effectStyle>
+        <a:effectStyle>
+          <a:effectLst>
+            <a:outerShdw blurRad="57150" dist="19050" dir="5400000">
+              <a:srgbClr val="000000">
+                <a:alpha val="10000"/>
+              </a:srgbClr>
+            </a:outerShdw>
+          </a:effectLst>
+        </a:effectStyle>
+        <a:effectStyle>
+          <a:effectLst>
+            <a:outerShdw blurRad="114300" dist="38100" dir="5400000">
+              <a:srgbClr val="000000">
+                <a:alpha val="12000"/>
+              </a:srgbClr>
+            </a:outerShdw>
+          </a:effectLst>
+        </a:effectStyle>
+        <a:effectStyle>
+          <a:effectLst>
+            <a:outerShdw blurRad="171450" dist="57150" dir="5400000">
+              <a:srgbClr val="000000">
+                <a:alpha val="16000"/>
+              </a:srgbClr>
+            </a:outerShdw>
+          </a:effectLst>
+        </a:effectStyle>
+        <a:effectStyle>
+          <a:effectLst>
+            <a:outerShdw blurRad="266700" dist="95250" dir="5400000">
+              <a:srgbClr val="000000">
+                <a:alpha val="24000"/>
+              </a:srgbClr>
+            </a:outerShdw>
+          </a:effectLst>
+        </a:effectStyle>
+      </a:effectStyleLst>
+      <a:bgFillStyleLst>
+        <a:solidFill>
+          <a:schemeClr val="phClr"/>
+        </a:solidFill>
+        <a:solidFill>
+          <a:schemeClr val="phClr">
+            <a:tint val="95000"/>
+            <a:satMod val="170000"/>
+          </a:schemeClr>
+        </a:solidFill>
+        <a:gradFill>
+          <a:gsLst>
+            <a:gs pos="0">
+              <a:schemeClr val="phClr">
+                <a:tint val="93000"/>
+                <a:shade val="98000"/>
+                <a:lumMod val="102000"/>
+                <a:satMod val="150000"/>
+              </a:schemeClr>
+            </a:gs>
+            <a:gs pos="50000">
+              <a:schemeClr val="phClr">
+                <a:tint val="98000"/>
+                <a:shade val="90000"/>
+                <a:lumMod val="103000"/>
+                <a:satMod val="130000"/>
+              </a:schemeClr>
+            </a:gs>
+            <a:gs pos="100000">
+              <a:schemeClr val="phClr">
+                <a:shade val="63000"/>
+                <a:satMod val="120000"/>
+              </a:schemeClr>
+            </a:gs>
+          </a:gsLst>
+          <a:lin ang="5400000" scaled="0"/>
+        </a:gradFill>
+      </a:bgFillStyleLst>
+    </a:fmtScheme>
+  </a:themeElements>
+</a:theme>
+</file>
+
 <file path=ppt/slides/slide1.xml><?xml version="1.0" encoding="utf-8"?>
 <p:sld xmlns:p="http://schemas.openxmlformats.org/presentationml/2006/main">
   <p:cSld>
@@ -2367,6 +2984,7 @@
           <a:lstStyle xmlns:a="http://schemas.openxmlformats.org/drawingml/2006/main"/>
           <a:p xmlns:a="http://schemas.openxmlformats.org/drawingml/2006/main">
             <a:pPr algn="l">
+              <a:buNone/>
               <a:defRPr sz="900" b="1">
                 <a:solidFill>
                   <a:srgbClr val="607587"/>
@@ -2385,7 +3003,7 @@
                 <a:ea typeface="Aptos"/>
                 <a:cs typeface="Aptos"/>
               </a:rPr>
-              <a:t>CURRENT RESULTS REVIEW  /  ONBOARDING</a:t>
+              <a:t>LONGCYCLER-ONLY RESULTS REVIEW / ONBOARDING</a:t>
             </a:r>
           </a:p>
         </p:txBody>
@@ -2431,6 +3049,7 @@
           <a:lstStyle xmlns:a="http://schemas.openxmlformats.org/drawingml/2006/main"/>
           <a:p xmlns:a="http://schemas.openxmlformats.org/drawingml/2006/main">
             <a:pPr algn="l">
+              <a:buNone/>
               <a:defRPr sz="4425" b="1">
                 <a:solidFill>
                   <a:srgbClr val="152533"/>
@@ -2495,6 +3114,7 @@
           <a:lstStyle xmlns:a="http://schemas.openxmlformats.org/drawingml/2006/main"/>
           <a:p xmlns:a="http://schemas.openxmlformats.org/drawingml/2006/main">
             <a:pPr algn="l">
+              <a:buNone/>
               <a:defRPr sz="3900" b="0">
                 <a:solidFill>
                   <a:srgbClr val="152533"/>
@@ -2559,6 +3179,7 @@
           <a:lstStyle xmlns:a="http://schemas.openxmlformats.org/drawingml/2006/main"/>
           <a:p xmlns:a="http://schemas.openxmlformats.org/drawingml/2006/main">
             <a:pPr algn="l">
+              <a:buNone/>
               <a:defRPr sz="1650" b="0">
                 <a:solidFill>
                   <a:srgbClr val="607587"/>
@@ -2577,7 +3198,7 @@
                 <a:ea typeface="Aptos"/>
                 <a:cs typeface="Aptos"/>
               </a:rPr>
-              <a:t>A current UTI versus Not_UTI review for a new project colleague</a:t>
+              <a:t>Operational UTI versus Not_UTI evidence for a new project colleague</a:t>
             </a:r>
           </a:p>
         </p:txBody>
@@ -2658,6 +3279,7 @@
           <a:lstStyle xmlns:a="http://schemas.openxmlformats.org/drawingml/2006/main"/>
           <a:p xmlns:a="http://schemas.openxmlformats.org/drawingml/2006/main">
             <a:pPr algn="l">
+              <a:buNone/>
               <a:defRPr sz="825" b="1">
                 <a:solidFill>
                   <a:srgbClr val="607587"/>
@@ -2722,6 +3344,7 @@
           <a:lstStyle xmlns:a="http://schemas.openxmlformats.org/drawingml/2006/main"/>
           <a:p xmlns:a="http://schemas.openxmlformats.org/drawingml/2006/main">
             <a:pPr algn="l">
+              <a:buNone/>
               <a:defRPr sz="1200" b="1">
                 <a:solidFill>
                   <a:srgbClr val="E7772F"/>
@@ -2786,6 +3409,7 @@
           <a:lstStyle xmlns:a="http://schemas.openxmlformats.org/drawingml/2006/main"/>
           <a:p xmlns:a="http://schemas.openxmlformats.org/drawingml/2006/main">
             <a:pPr algn="l">
+              <a:buNone/>
               <a:defRPr sz="1650" b="0">
                 <a:solidFill>
                   <a:srgbClr val="152533"/>
@@ -2850,6 +3474,7 @@
           <a:lstStyle xmlns:a="http://schemas.openxmlformats.org/drawingml/2006/main"/>
           <a:p xmlns:a="http://schemas.openxmlformats.org/drawingml/2006/main">
             <a:pPr algn="l">
+              <a:buNone/>
               <a:defRPr sz="1200" b="1">
                 <a:solidFill>
                   <a:srgbClr val="E7772F"/>
@@ -2914,6 +3539,7 @@
           <a:lstStyle xmlns:a="http://schemas.openxmlformats.org/drawingml/2006/main"/>
           <a:p xmlns:a="http://schemas.openxmlformats.org/drawingml/2006/main">
             <a:pPr algn="l">
+              <a:buNone/>
               <a:defRPr sz="1650" b="0">
                 <a:solidFill>
                   <a:srgbClr val="152533"/>
@@ -2978,6 +3604,7 @@
           <a:lstStyle xmlns:a="http://schemas.openxmlformats.org/drawingml/2006/main"/>
           <a:p xmlns:a="http://schemas.openxmlformats.org/drawingml/2006/main">
             <a:pPr algn="l">
+              <a:buNone/>
               <a:defRPr sz="1200" b="1">
                 <a:solidFill>
                   <a:srgbClr val="E7772F"/>
@@ -3042,6 +3669,7 @@
           <a:lstStyle xmlns:a="http://schemas.openxmlformats.org/drawingml/2006/main"/>
           <a:p xmlns:a="http://schemas.openxmlformats.org/drawingml/2006/main">
             <a:pPr algn="l">
+              <a:buNone/>
               <a:defRPr sz="1650" b="0">
                 <a:solidFill>
                   <a:srgbClr val="152533"/>
@@ -3141,6 +3769,7 @@
           <a:lstStyle xmlns:a="http://schemas.openxmlformats.org/drawingml/2006/main"/>
           <a:p xmlns:a="http://schemas.openxmlformats.org/drawingml/2006/main">
             <a:pPr algn="l">
+              <a:buNone/>
               <a:defRPr sz="825" b="1">
                 <a:solidFill>
                   <a:srgbClr val="E7772F"/>
@@ -3240,6 +3869,7 @@
           <a:lstStyle xmlns:a="http://schemas.openxmlformats.org/drawingml/2006/main"/>
           <a:p xmlns:a="http://schemas.openxmlformats.org/drawingml/2006/main">
             <a:pPr algn="l">
+              <a:buNone/>
               <a:defRPr sz="825" b="1">
                 <a:solidFill>
                   <a:srgbClr val="2678B8"/>
@@ -3304,6 +3934,7 @@
           <a:lstStyle xmlns:a="http://schemas.openxmlformats.org/drawingml/2006/main"/>
           <a:p xmlns:a="http://schemas.openxmlformats.org/drawingml/2006/main">
             <a:pPr algn="l">
+              <a:buNone/>
               <a:defRPr sz="900" b="0">
                 <a:solidFill>
                   <a:srgbClr val="607587"/>
@@ -3368,6 +3999,7 @@
           <a:lstStyle xmlns:a="http://schemas.openxmlformats.org/drawingml/2006/main"/>
           <a:p xmlns:a="http://schemas.openxmlformats.org/drawingml/2006/main">
             <a:pPr algn="l">
+              <a:buNone/>
               <a:defRPr sz="825" b="0">
                 <a:solidFill>
                   <a:srgbClr val="607587"/>
@@ -3386,7 +4018,7 @@
                 <a:ea typeface="Aptos"/>
                 <a:cs typeface="Aptos"/>
               </a:rPr>
-              <a:t>Prepared for scientific review and practical handover  |  27 May 2026</a:t>
+              <a:t>Prepared for scientific review and practical handover  |  14 July 2026</a:t>
             </a:r>
           </a:p>
         </p:txBody>
@@ -3524,6 +4156,7 @@
           <a:lstStyle xmlns:a="http://schemas.openxmlformats.org/drawingml/2006/main"/>
           <a:p xmlns:a="http://schemas.openxmlformats.org/drawingml/2006/main">
             <a:pPr algn="l">
+              <a:buNone/>
               <a:defRPr sz="825" b="1">
                 <a:solidFill>
                   <a:srgbClr val="607587"/>
@@ -3588,6 +4221,7 @@
           <a:lstStyle xmlns:a="http://schemas.openxmlformats.org/drawingml/2006/main"/>
           <a:p xmlns:a="http://schemas.openxmlformats.org/drawingml/2006/main">
             <a:pPr algn="l">
+              <a:buNone/>
               <a:defRPr sz="2625" b="1">
                 <a:solidFill>
                   <a:srgbClr val="152533"/>
@@ -3687,6 +4321,7 @@
           <a:lstStyle xmlns:a="http://schemas.openxmlformats.org/drawingml/2006/main"/>
           <a:p xmlns:a="http://schemas.openxmlformats.org/drawingml/2006/main">
             <a:pPr algn="l">
+              <a:buNone/>
               <a:defRPr sz="1200" b="0">
                 <a:solidFill>
                   <a:srgbClr val="607587"/>
@@ -3705,7 +4340,7 @@
                 <a:ea typeface="Aptos"/>
                 <a:cs typeface="Aptos"/>
               </a:rPr>
-              <a:t>Eleven clinical transitions include ten with linked WGS/VF evidence and one missing endpoint.</a:t>
+              <a:t>9 operational transitions are all genomically linked; 0 endpoints are missing.</a:t>
             </a:r>
           </a:p>
         </p:txBody>
@@ -3786,6 +4421,7 @@
           <a:lstStyle xmlns:a="http://schemas.openxmlformats.org/drawingml/2006/main"/>
           <a:p xmlns:a="http://schemas.openxmlformats.org/drawingml/2006/main">
             <a:pPr algn="l">
+              <a:buNone/>
               <a:defRPr sz="825" b="1">
                 <a:solidFill>
                   <a:srgbClr val="607587"/>
@@ -3885,6 +4521,7 @@
           <a:lstStyle xmlns:a="http://schemas.openxmlformats.org/drawingml/2006/main"/>
           <a:p xmlns:a="http://schemas.openxmlformats.org/drawingml/2006/main">
             <a:pPr algn="l">
+              <a:buNone/>
               <a:defRPr sz="750" b="0">
                 <a:solidFill>
                   <a:srgbClr val="607587"/>
@@ -3903,7 +4540,7 @@
                 <a:ea typeface="Aptos"/>
                 <a:cs typeface="Aptos"/>
               </a:rPr>
-              <a:t>rUTI clinical-to-genomic review  |  current UTI_Status analysis  |  27 May 2026</a:t>
+              <a:t>rUTI clinical-to-genomic review  |  operational UTI phenotype | Longcycler-only analysis  |  14 July 2026</a:t>
             </a:r>
           </a:p>
         </p:txBody>
@@ -3949,6 +4586,7 @@
           <a:lstStyle xmlns:a="http://schemas.openxmlformats.org/drawingml/2006/main"/>
           <a:p xmlns:a="http://schemas.openxmlformats.org/drawingml/2006/main">
             <a:pPr algn="r">
+              <a:buNone/>
               <a:defRPr sz="900" b="1">
                 <a:solidFill>
                   <a:srgbClr val="607587"/>
@@ -4007,18 +4645,18 @@
       </p:sp>
       <p:pic>
         <p:nvPicPr>
-          <p:cNvPr id="13" name=""/>
+          <p:cNvPr id="26" name=""/>
           <p:cNvPicPr>
             <a:picLocks xmlns:a="http://schemas.openxmlformats.org/drawingml/2006/main" noChangeAspect="1"/>
           </p:cNvPicPr>
           <p:nvPr/>
         </p:nvPicPr>
         <p:blipFill>
-          <a:blip xmlns:r="http://schemas.openxmlformats.org/officeDocument/2006/relationships" xmlns:a="http://schemas.openxmlformats.org/drawingml/2006/main" r:embed="R783cd20e8c8441ef"/>
+          <a:blip xmlns:r="http://schemas.openxmlformats.org/officeDocument/2006/relationships" xmlns:a="http://schemas.openxmlformats.org/drawingml/2006/main" r:embed="Rc2bee4e453724cad"/>
           <a:stretch xmlns:a="http://schemas.openxmlformats.org/drawingml/2006/main"/>
         </p:blipFill>
         <p:spPr>
-          <a:xfrm xmlns:a="http://schemas.openxmlformats.org/drawingml/2006/main">
+          <a:xfrm xmlns:a="http://schemas.openxmlformats.org/drawingml/2006/main" flipH="0" flipV="0">
             <a:off x="1774205" y="1685925"/>
             <a:ext cx="8586439" cy="4400550"/>
           </a:xfrm>
@@ -4160,6 +4798,7 @@
           <a:lstStyle xmlns:a="http://schemas.openxmlformats.org/drawingml/2006/main"/>
           <a:p xmlns:a="http://schemas.openxmlformats.org/drawingml/2006/main">
             <a:pPr algn="l">
+              <a:buNone/>
               <a:defRPr sz="825" b="1">
                 <a:solidFill>
                   <a:srgbClr val="607587"/>
@@ -4224,6 +4863,7 @@
           <a:lstStyle xmlns:a="http://schemas.openxmlformats.org/drawingml/2006/main"/>
           <a:p xmlns:a="http://schemas.openxmlformats.org/drawingml/2006/main">
             <a:pPr algn="l">
+              <a:buNone/>
               <a:defRPr sz="2625" b="1">
                 <a:solidFill>
                   <a:srgbClr val="152533"/>
@@ -4242,7 +4882,7 @@
                 <a:ea typeface="Aptos Display"/>
                 <a:cs typeface="Aptos Display"/>
               </a:rPr>
-              <a:t>Stable measured profiles can accompany changing clinical state</a:t>
+              <a:t>Direct paired evidence distinguishes close from distant clinical transitions</a:t>
             </a:r>
           </a:p>
         </p:txBody>
@@ -4323,6 +4963,7 @@
           <a:lstStyle xmlns:a="http://schemas.openxmlformats.org/drawingml/2006/main"/>
           <a:p xmlns:a="http://schemas.openxmlformats.org/drawingml/2006/main">
             <a:pPr algn="l">
+              <a:buNone/>
               <a:defRPr sz="1200" b="0">
                 <a:solidFill>
                   <a:srgbClr val="607587"/>
@@ -4341,7 +4982,7 @@
                 <a:ea typeface="Aptos"/>
                 <a:cs typeface="Aptos"/>
               </a:rPr>
-              <a:t>Four transitions show same-strain stable profiles; three are consistent with strain replacement.</a:t>
+              <a:t>5/9 focused transitions and 140/371 adjacent pairs are &lt;=25 SNPs.</a:t>
             </a:r>
           </a:p>
         </p:txBody>
@@ -4422,6 +5063,7 @@
           <a:lstStyle xmlns:a="http://schemas.openxmlformats.org/drawingml/2006/main"/>
           <a:p xmlns:a="http://schemas.openxmlformats.org/drawingml/2006/main">
             <a:pPr algn="l">
+              <a:buNone/>
               <a:defRPr sz="825" b="1">
                 <a:solidFill>
                   <a:srgbClr val="607587"/>
@@ -4521,6 +5163,7 @@
           <a:lstStyle xmlns:a="http://schemas.openxmlformats.org/drawingml/2006/main"/>
           <a:p xmlns:a="http://schemas.openxmlformats.org/drawingml/2006/main">
             <a:pPr algn="l">
+              <a:buNone/>
               <a:defRPr sz="750" b="0">
                 <a:solidFill>
                   <a:srgbClr val="607587"/>
@@ -4539,7 +5182,7 @@
                 <a:ea typeface="Aptos"/>
                 <a:cs typeface="Aptos"/>
               </a:rPr>
-              <a:t>rUTI clinical-to-genomic review  |  current UTI_Status analysis  |  27 May 2026</a:t>
+              <a:t>rUTI clinical-to-genomic review  |  operational UTI phenotype | Longcycler-only analysis  |  14 July 2026</a:t>
             </a:r>
           </a:p>
         </p:txBody>
@@ -4585,6 +5228,7 @@
           <a:lstStyle xmlns:a="http://schemas.openxmlformats.org/drawingml/2006/main"/>
           <a:p xmlns:a="http://schemas.openxmlformats.org/drawingml/2006/main">
             <a:pPr algn="r">
+              <a:buNone/>
               <a:defRPr sz="900" b="1">
                 <a:solidFill>
                   <a:srgbClr val="607587"/>
@@ -4643,18 +5287,18 @@
       </p:sp>
       <p:pic>
         <p:nvPicPr>
-          <p:cNvPr id="13" name=""/>
+          <p:cNvPr id="26" name=""/>
           <p:cNvPicPr>
             <a:picLocks xmlns:a="http://schemas.openxmlformats.org/drawingml/2006/main" noChangeAspect="1"/>
           </p:cNvPicPr>
           <p:nvPr/>
         </p:nvPicPr>
         <p:blipFill>
-          <a:blip xmlns:r="http://schemas.openxmlformats.org/officeDocument/2006/relationships" xmlns:a="http://schemas.openxmlformats.org/drawingml/2006/main" r:embed="R6d1786e48bca4b9a"/>
+          <a:blip xmlns:r="http://schemas.openxmlformats.org/officeDocument/2006/relationships" xmlns:a="http://schemas.openxmlformats.org/drawingml/2006/main" r:embed="Re8b1e458033040f1"/>
           <a:stretch xmlns:a="http://schemas.openxmlformats.org/drawingml/2006/main"/>
         </p:blipFill>
         <p:spPr>
-          <a:xfrm xmlns:a="http://schemas.openxmlformats.org/drawingml/2006/main">
+          <a:xfrm xmlns:a="http://schemas.openxmlformats.org/drawingml/2006/main" flipH="0" flipV="0">
             <a:off x="1657350" y="1676400"/>
             <a:ext cx="8839200" cy="4419600"/>
           </a:xfrm>
@@ -4796,6 +5440,7 @@
           <a:lstStyle xmlns:a="http://schemas.openxmlformats.org/drawingml/2006/main"/>
           <a:p xmlns:a="http://schemas.openxmlformats.org/drawingml/2006/main">
             <a:pPr algn="l">
+              <a:buNone/>
               <a:defRPr sz="825" b="1">
                 <a:solidFill>
                   <a:srgbClr val="607587"/>
@@ -4860,6 +5505,7 @@
           <a:lstStyle xmlns:a="http://schemas.openxmlformats.org/drawingml/2006/main"/>
           <a:p xmlns:a="http://schemas.openxmlformats.org/drawingml/2006/main">
             <a:pPr algn="l">
+              <a:buNone/>
               <a:defRPr sz="2625" b="1">
                 <a:solidFill>
                   <a:srgbClr val="152533"/>
@@ -4878,7 +5524,7 @@
                 <a:ea typeface="Aptos Display"/>
                 <a:cs typeface="Aptos Display"/>
               </a:rPr>
-              <a:t>No global VF association remains significant after FDR correction</a:t>
+              <a:t>Population-level VF analysis remains exploratory</a:t>
             </a:r>
           </a:p>
         </p:txBody>
@@ -4959,6 +5605,7 @@
           <a:lstStyle xmlns:a="http://schemas.openxmlformats.org/drawingml/2006/main"/>
           <a:p xmlns:a="http://schemas.openxmlformats.org/drawingml/2006/main">
             <a:pPr algn="l">
+              <a:buNone/>
               <a:defRPr sz="1200" b="0">
                 <a:solidFill>
                   <a:srgbClr val="607587"/>
@@ -4977,7 +5624,7 @@
                 <a:ea typeface="Aptos"/>
                 <a:cs typeface="Aptos"/>
               </a:rPr>
-              <a:t>With only 17 primary UTI VF-ready episodes, global signals remain exploratory.</a:t>
+              <a:t>With 16 operational UTI episodes, participant-aware VF signals remain exploratory and non-causal.</a:t>
             </a:r>
           </a:p>
         </p:txBody>
@@ -5058,6 +5705,7 @@
           <a:lstStyle xmlns:a="http://schemas.openxmlformats.org/drawingml/2006/main"/>
           <a:p xmlns:a="http://schemas.openxmlformats.org/drawingml/2006/main">
             <a:pPr algn="l">
+              <a:buNone/>
               <a:defRPr sz="825" b="1">
                 <a:solidFill>
                   <a:srgbClr val="607587"/>
@@ -5157,6 +5805,7 @@
           <a:lstStyle xmlns:a="http://schemas.openxmlformats.org/drawingml/2006/main"/>
           <a:p xmlns:a="http://schemas.openxmlformats.org/drawingml/2006/main">
             <a:pPr algn="l">
+              <a:buNone/>
               <a:defRPr sz="750" b="0">
                 <a:solidFill>
                   <a:srgbClr val="607587"/>
@@ -5175,7 +5824,7 @@
                 <a:ea typeface="Aptos"/>
                 <a:cs typeface="Aptos"/>
               </a:rPr>
-              <a:t>rUTI clinical-to-genomic review  |  current UTI_Status analysis  |  27 May 2026</a:t>
+              <a:t>rUTI clinical-to-genomic review  |  operational UTI phenotype | Longcycler-only analysis  |  14 July 2026</a:t>
             </a:r>
           </a:p>
         </p:txBody>
@@ -5221,6 +5870,7 @@
           <a:lstStyle xmlns:a="http://schemas.openxmlformats.org/drawingml/2006/main"/>
           <a:p xmlns:a="http://schemas.openxmlformats.org/drawingml/2006/main">
             <a:pPr algn="r">
+              <a:buNone/>
               <a:defRPr sz="900" b="1">
                 <a:solidFill>
                   <a:srgbClr val="607587"/>
@@ -5279,18 +5929,18 @@
       </p:sp>
       <p:pic>
         <p:nvPicPr>
-          <p:cNvPr id="13" name=""/>
+          <p:cNvPr id="26" name=""/>
           <p:cNvPicPr>
             <a:picLocks xmlns:a="http://schemas.openxmlformats.org/drawingml/2006/main" noChangeAspect="1"/>
           </p:cNvPicPr>
           <p:nvPr/>
         </p:nvPicPr>
         <p:blipFill>
-          <a:blip xmlns:r="http://schemas.openxmlformats.org/officeDocument/2006/relationships" xmlns:a="http://schemas.openxmlformats.org/drawingml/2006/main" r:embed="R6147d443c30a4859"/>
+          <a:blip xmlns:r="http://schemas.openxmlformats.org/officeDocument/2006/relationships" xmlns:a="http://schemas.openxmlformats.org/drawingml/2006/main" r:embed="R387c8b5e35274deb"/>
           <a:stretch xmlns:a="http://schemas.openxmlformats.org/drawingml/2006/main"/>
         </p:blipFill>
         <p:spPr>
-          <a:xfrm xmlns:a="http://schemas.openxmlformats.org/drawingml/2006/main">
+          <a:xfrm xmlns:a="http://schemas.openxmlformats.org/drawingml/2006/main" flipH="0" flipV="0">
             <a:off x="2427288" y="1685925"/>
             <a:ext cx="7318375" cy="4391025"/>
           </a:xfrm>
@@ -5432,6 +6082,7 @@
           <a:lstStyle xmlns:a="http://schemas.openxmlformats.org/drawingml/2006/main"/>
           <a:p xmlns:a="http://schemas.openxmlformats.org/drawingml/2006/main">
             <a:pPr algn="l">
+              <a:buNone/>
               <a:defRPr sz="825" b="1">
                 <a:solidFill>
                   <a:srgbClr val="607587"/>
@@ -5496,6 +6147,7 @@
           <a:lstStyle xmlns:a="http://schemas.openxmlformats.org/drawingml/2006/main"/>
           <a:p xmlns:a="http://schemas.openxmlformats.org/drawingml/2006/main">
             <a:pPr algn="l">
+              <a:buNone/>
               <a:defRPr sz="2625" b="1">
                 <a:solidFill>
                   <a:srgbClr val="152533"/>
@@ -5595,6 +6247,7 @@
           <a:lstStyle xmlns:a="http://schemas.openxmlformats.org/drawingml/2006/main"/>
           <a:p xmlns:a="http://schemas.openxmlformats.org/drawingml/2006/main">
             <a:pPr algn="l">
+              <a:buNone/>
               <a:defRPr sz="1200" b="0">
                 <a:solidFill>
                   <a:srgbClr val="607587"/>
@@ -5694,6 +6347,7 @@
           <a:lstStyle xmlns:a="http://schemas.openxmlformats.org/drawingml/2006/main"/>
           <a:p xmlns:a="http://schemas.openxmlformats.org/drawingml/2006/main">
             <a:pPr algn="l">
+              <a:buNone/>
               <a:defRPr sz="750" b="0">
                 <a:solidFill>
                   <a:srgbClr val="607587"/>
@@ -5712,7 +6366,7 @@
                 <a:ea typeface="Aptos"/>
                 <a:cs typeface="Aptos"/>
               </a:rPr>
-              <a:t>rUTI clinical-to-genomic review  |  current UTI_Status analysis  |  27 May 2026</a:t>
+              <a:t>rUTI clinical-to-genomic review  |  operational UTI phenotype | Longcycler-only analysis  |  14 July 2026</a:t>
             </a:r>
           </a:p>
         </p:txBody>
@@ -5758,6 +6412,7 @@
           <a:lstStyle xmlns:a="http://schemas.openxmlformats.org/drawingml/2006/main"/>
           <a:p xmlns:a="http://schemas.openxmlformats.org/drawingml/2006/main">
             <a:pPr algn="r">
+              <a:buNone/>
               <a:defRPr sz="900" b="1">
                 <a:solidFill>
                   <a:srgbClr val="607587"/>
@@ -5892,6 +6547,7 @@
           <a:lstStyle xmlns:a="http://schemas.openxmlformats.org/drawingml/2006/main"/>
           <a:p xmlns:a="http://schemas.openxmlformats.org/drawingml/2006/main">
             <a:pPr algn="l">
+              <a:buNone/>
               <a:defRPr sz="900" b="1">
                 <a:solidFill>
                   <a:srgbClr val="17855B"/>
@@ -5956,6 +6612,7 @@
           <a:lstStyle xmlns:a="http://schemas.openxmlformats.org/drawingml/2006/main"/>
           <a:p xmlns:a="http://schemas.openxmlformats.org/drawingml/2006/main">
             <a:pPr algn="l">
+              <a:buNone/>
               <a:defRPr sz="1425" b="1">
                 <a:solidFill>
                   <a:srgbClr val="152533"/>
@@ -5974,7 +6631,7 @@
                 <a:ea typeface="Aptos"/>
                 <a:cs typeface="Aptos"/>
               </a:rPr>
-              <a:t>Stable VF profiles occur across some symptom-emergence transitions.</a:t>
+              <a:t>5 of 9 focused direct pairs are &lt;=25 SNPs.</a:t>
             </a:r>
           </a:p>
         </p:txBody>
@@ -6055,6 +6712,7 @@
           <a:lstStyle xmlns:a="http://schemas.openxmlformats.org/drawingml/2006/main"/>
           <a:p xmlns:a="http://schemas.openxmlformats.org/drawingml/2006/main">
             <a:pPr algn="l">
+              <a:buNone/>
               <a:defRPr sz="1350" b="0">
                 <a:solidFill>
                   <a:srgbClr val="152533"/>
@@ -6073,7 +6731,7 @@
                 <a:ea typeface="Aptos"/>
                 <a:cs typeface="Aptos"/>
               </a:rPr>
-              <a:t>Replacement is also present; no single mechanism fits all cases.</a:t>
+              <a:t>4 focused pairs are above the threshold; no single mechanism is established.</a:t>
             </a:r>
           </a:p>
         </p:txBody>
@@ -6189,6 +6847,7 @@
           <a:lstStyle xmlns:a="http://schemas.openxmlformats.org/drawingml/2006/main"/>
           <a:p xmlns:a="http://schemas.openxmlformats.org/drawingml/2006/main">
             <a:pPr algn="l">
+              <a:buNone/>
               <a:defRPr sz="900" b="1">
                 <a:solidFill>
                   <a:srgbClr val="607587"/>
@@ -6253,6 +6912,7 @@
           <a:lstStyle xmlns:a="http://schemas.openxmlformats.org/drawingml/2006/main"/>
           <a:p xmlns:a="http://schemas.openxmlformats.org/drawingml/2006/main">
             <a:pPr algn="l">
+              <a:buNone/>
               <a:defRPr sz="1425" b="1">
                 <a:solidFill>
                   <a:srgbClr val="152533"/>
@@ -6271,7 +6931,7 @@
                 <a:ea typeface="Aptos"/>
                 <a:cs typeface="Aptos"/>
               </a:rPr>
-              <a:t>Only 17 UTI episodes are VF/model-ready.</a:t>
+              <a:t>Only 16 selected episodes meet the operational UTI phenotype.</a:t>
             </a:r>
           </a:p>
         </p:txBody>
@@ -6352,6 +7012,7 @@
           <a:lstStyle xmlns:a="http://schemas.openxmlformats.org/drawingml/2006/main"/>
           <a:p xmlns:a="http://schemas.openxmlformats.org/drawingml/2006/main">
             <a:pPr algn="l">
+              <a:buNone/>
               <a:defRPr sz="1350" b="0">
                 <a:solidFill>
                   <a:srgbClr val="152533"/>
@@ -6486,6 +7147,7 @@
           <a:lstStyle xmlns:a="http://schemas.openxmlformats.org/drawingml/2006/main"/>
           <a:p xmlns:a="http://schemas.openxmlformats.org/drawingml/2006/main">
             <a:pPr algn="l">
+              <a:buNone/>
               <a:defRPr sz="900" b="1">
                 <a:solidFill>
                   <a:srgbClr val="E7772F"/>
@@ -6550,6 +7212,7 @@
           <a:lstStyle xmlns:a="http://schemas.openxmlformats.org/drawingml/2006/main"/>
           <a:p xmlns:a="http://schemas.openxmlformats.org/drawingml/2006/main">
             <a:pPr algn="l">
+              <a:buNone/>
               <a:defRPr sz="1425" b="1">
                 <a:solidFill>
                   <a:srgbClr val="152533"/>
@@ -6649,6 +7312,7 @@
           <a:lstStyle xmlns:a="http://schemas.openxmlformats.org/drawingml/2006/main"/>
           <a:p xmlns:a="http://schemas.openxmlformats.org/drawingml/2006/main">
             <a:pPr algn="l">
+              <a:buNone/>
               <a:defRPr sz="1350" b="0">
                 <a:solidFill>
                   <a:srgbClr val="152533"/>
@@ -6713,6 +7377,7 @@
           <a:lstStyle xmlns:a="http://schemas.openxmlformats.org/drawingml/2006/main"/>
           <a:p xmlns:a="http://schemas.openxmlformats.org/drawingml/2006/main">
             <a:pPr algn="l">
+              <a:buNone/>
               <a:defRPr sz="1500" b="1">
                 <a:solidFill>
                   <a:srgbClr val="152533"/>
@@ -6869,6 +7534,7 @@
           <a:lstStyle xmlns:a="http://schemas.openxmlformats.org/drawingml/2006/main"/>
           <a:p xmlns:a="http://schemas.openxmlformats.org/drawingml/2006/main">
             <a:pPr algn="l">
+              <a:buNone/>
               <a:defRPr sz="825" b="1">
                 <a:solidFill>
                   <a:srgbClr val="607587"/>
@@ -6933,6 +7599,7 @@
           <a:lstStyle xmlns:a="http://schemas.openxmlformats.org/drawingml/2006/main"/>
           <a:p xmlns:a="http://schemas.openxmlformats.org/drawingml/2006/main">
             <a:pPr algn="l">
+              <a:buNone/>
               <a:defRPr sz="2625" b="1">
                 <a:solidFill>
                   <a:srgbClr val="152533"/>
@@ -6951,7 +7618,7 @@
                 <a:ea typeface="Aptos Display"/>
                 <a:cs typeface="Aptos Display"/>
               </a:rPr>
-              <a:t>Canonical outputs and rerun path</a:t>
+              <a:t>Longcycler release outputs and rerun path</a:t>
             </a:r>
           </a:p>
         </p:txBody>
@@ -7032,6 +7699,7 @@
           <a:lstStyle xmlns:a="http://schemas.openxmlformats.org/drawingml/2006/main"/>
           <a:p xmlns:a="http://schemas.openxmlformats.org/drawingml/2006/main">
             <a:pPr algn="l">
+              <a:buNone/>
               <a:defRPr sz="1200" b="0">
                 <a:solidFill>
                   <a:srgbClr val="607587"/>
@@ -7050,7 +7718,7 @@
                 <a:ea typeface="Aptos"/>
                 <a:cs typeface="Aptos"/>
               </a:rPr>
-              <a:t>Use these files as current sources of truth when navigating or reproducing the review.</a:t>
+              <a:t>Claim registry -&gt; 893 direct pairs -&gt; 371 adjacent pairs -&gt; RQ01-RQ10.</a:t>
             </a:r>
           </a:p>
         </p:txBody>
@@ -7131,6 +7799,7 @@
           <a:lstStyle xmlns:a="http://schemas.openxmlformats.org/drawingml/2006/main"/>
           <a:p xmlns:a="http://schemas.openxmlformats.org/drawingml/2006/main">
             <a:pPr algn="l">
+              <a:buNone/>
               <a:defRPr sz="750" b="0">
                 <a:solidFill>
                   <a:srgbClr val="607587"/>
@@ -7149,7 +7818,7 @@
                 <a:ea typeface="Aptos"/>
                 <a:cs typeface="Aptos"/>
               </a:rPr>
-              <a:t>rUTI clinical-to-genomic review  |  current UTI_Status analysis  |  27 May 2026</a:t>
+              <a:t>rUTI clinical-to-genomic review  |  operational UTI phenotype | Longcycler-only analysis  |  14 July 2026</a:t>
             </a:r>
           </a:p>
         </p:txBody>
@@ -7195,6 +7864,7 @@
           <a:lstStyle xmlns:a="http://schemas.openxmlformats.org/drawingml/2006/main"/>
           <a:p xmlns:a="http://schemas.openxmlformats.org/drawingml/2006/main">
             <a:pPr algn="r">
+              <a:buNone/>
               <a:defRPr sz="900" b="1">
                 <a:solidFill>
                   <a:srgbClr val="607587"/>
@@ -7259,6 +7929,7 @@
           <a:lstStyle xmlns:a="http://schemas.openxmlformats.org/drawingml/2006/main"/>
           <a:p xmlns:a="http://schemas.openxmlformats.org/drawingml/2006/main">
             <a:pPr algn="l">
+              <a:buNone/>
               <a:defRPr sz="825" b="1">
                 <a:solidFill>
                   <a:srgbClr val="607587"/>
@@ -7323,6 +7994,7 @@
           <a:lstStyle xmlns:a="http://schemas.openxmlformats.org/drawingml/2006/main"/>
           <a:p xmlns:a="http://schemas.openxmlformats.org/drawingml/2006/main">
             <a:pPr algn="l">
+              <a:buNone/>
               <a:defRPr sz="825" b="1">
                 <a:solidFill>
                   <a:srgbClr val="607587"/>
@@ -7422,6 +8094,7 @@
           <a:lstStyle xmlns:a="http://schemas.openxmlformats.org/drawingml/2006/main"/>
           <a:p xmlns:a="http://schemas.openxmlformats.org/drawingml/2006/main">
             <a:pPr algn="l">
+              <a:buNone/>
               <a:defRPr sz="1275" b="1">
                 <a:solidFill>
                   <a:srgbClr val="152533"/>
@@ -7486,6 +8159,7 @@
           <a:lstStyle xmlns:a="http://schemas.openxmlformats.org/drawingml/2006/main"/>
           <a:p xmlns:a="http://schemas.openxmlformats.org/drawingml/2006/main">
             <a:pPr algn="l">
+              <a:buNone/>
               <a:defRPr sz="1050" b="0">
                 <a:solidFill>
                   <a:srgbClr val="607587"/>
@@ -7504,7 +8178,7 @@
                 <a:ea typeface="Aptos Mono"/>
                 <a:cs typeface="Aptos Mono"/>
               </a:rPr>
-              <a:t>results/summary/final_key_results_summary.md</a:t>
+              <a:t>results/pipeline/longcycler_release_claim_registry.json</a:t>
             </a:r>
           </a:p>
         </p:txBody>
@@ -7585,6 +8259,7 @@
           <a:lstStyle xmlns:a="http://schemas.openxmlformats.org/drawingml/2006/main"/>
           <a:p xmlns:a="http://schemas.openxmlformats.org/drawingml/2006/main">
             <a:pPr algn="l">
+              <a:buNone/>
               <a:defRPr sz="1275" b="1">
                 <a:solidFill>
                   <a:srgbClr val="152533"/>
@@ -7649,6 +8324,7 @@
           <a:lstStyle xmlns:a="http://schemas.openxmlformats.org/drawingml/2006/main"/>
           <a:p xmlns:a="http://schemas.openxmlformats.org/drawingml/2006/main">
             <a:pPr algn="l">
+              <a:buNone/>
               <a:defRPr sz="1050" b="0">
                 <a:solidFill>
                   <a:srgbClr val="607587"/>
@@ -7667,7 +8343,7 @@
                 <a:ea typeface="Aptos Mono"/>
                 <a:cs typeface="Aptos Mono"/>
               </a:rPr>
-              <a:t>results/final_figures/final_figure_captions.md</a:t>
+              <a:t>results/clinical/analysis_cohort_longcycler.csv</a:t>
             </a:r>
           </a:p>
         </p:txBody>
@@ -7748,6 +8424,7 @@
           <a:lstStyle xmlns:a="http://schemas.openxmlformats.org/drawingml/2006/main"/>
           <a:p xmlns:a="http://schemas.openxmlformats.org/drawingml/2006/main">
             <a:pPr algn="l">
+              <a:buNone/>
               <a:defRPr sz="1275" b="1">
                 <a:solidFill>
                   <a:srgbClr val="152533"/>
@@ -7812,6 +8489,7 @@
           <a:lstStyle xmlns:a="http://schemas.openxmlformats.org/drawingml/2006/main"/>
           <a:p xmlns:a="http://schemas.openxmlformats.org/drawingml/2006/main">
             <a:pPr algn="l">
+              <a:buNone/>
               <a:defRPr sz="1050" b="0">
                 <a:solidFill>
                   <a:srgbClr val="607587"/>
@@ -7830,7 +8508,7 @@
                 <a:ea typeface="Aptos Mono"/>
                 <a:cs typeface="Aptos Mono"/>
               </a:rPr>
-              <a:t>results/final_figures/final_figure_manifest.csv</a:t>
+              <a:t>results/strain_compare/pairwise_metrics.csv</a:t>
             </a:r>
           </a:p>
         </p:txBody>
@@ -7911,6 +8589,7 @@
           <a:lstStyle xmlns:a="http://schemas.openxmlformats.org/drawingml/2006/main"/>
           <a:p xmlns:a="http://schemas.openxmlformats.org/drawingml/2006/main">
             <a:pPr algn="l">
+              <a:buNone/>
               <a:defRPr sz="1275" b="1">
                 <a:solidFill>
                   <a:srgbClr val="152533"/>
@@ -7975,6 +8654,7 @@
           <a:lstStyle xmlns:a="http://schemas.openxmlformats.org/drawingml/2006/main"/>
           <a:p xmlns:a="http://schemas.openxmlformats.org/drawingml/2006/main">
             <a:pPr algn="l">
+              <a:buNone/>
               <a:defRPr sz="1050" b="0">
                 <a:solidFill>
                   <a:srgbClr val="607587"/>
@@ -7993,7 +8673,7 @@
                 <a:ea typeface="Aptos Mono"/>
                 <a:cs typeface="Aptos Mono"/>
               </a:rPr>
-              <a:t>results/mechanism/not_uti_to_uti_casebook.md</a:t>
+              <a:t>results/mechanism/not_uti_to_uti_casebook.csv</a:t>
             </a:r>
           </a:p>
         </p:txBody>
@@ -8074,6 +8754,7 @@
           <a:lstStyle xmlns:a="http://schemas.openxmlformats.org/drawingml/2006/main"/>
           <a:p xmlns:a="http://schemas.openxmlformats.org/drawingml/2006/main">
             <a:pPr algn="l">
+              <a:buNone/>
               <a:defRPr sz="1275" b="1">
                 <a:solidFill>
                   <a:srgbClr val="152533"/>
@@ -8138,6 +8819,7 @@
           <a:lstStyle xmlns:a="http://schemas.openxmlformats.org/drawingml/2006/main"/>
           <a:p xmlns:a="http://schemas.openxmlformats.org/drawingml/2006/main">
             <a:pPr algn="l">
+              <a:buNone/>
               <a:defRPr sz="1050" b="0">
                 <a:solidFill>
                   <a:srgbClr val="607587"/>
@@ -8156,7 +8838,7 @@
                 <a:ea typeface="Aptos Mono"/>
                 <a:cs typeface="Aptos Mono"/>
               </a:rPr>
-              <a:t>docs/pipeline_architecture.md</a:t>
+              <a:t>results/research_questions/RUN_COMPLETE.txt</a:t>
             </a:r>
           </a:p>
         </p:txBody>
@@ -8237,6 +8919,7 @@
           <a:lstStyle xmlns:a="http://schemas.openxmlformats.org/drawingml/2006/main"/>
           <a:p xmlns:a="http://schemas.openxmlformats.org/drawingml/2006/main">
             <a:pPr algn="l">
+              <a:buNone/>
               <a:defRPr sz="825" b="1">
                 <a:solidFill>
                   <a:srgbClr val="B7C6D2"/>
@@ -8301,6 +8984,7 @@
           <a:lstStyle xmlns:a="http://schemas.openxmlformats.org/drawingml/2006/main"/>
           <a:p xmlns:a="http://schemas.openxmlformats.org/drawingml/2006/main">
             <a:pPr algn="l">
+              <a:buNone/>
               <a:defRPr sz="1125" b="0">
                 <a:solidFill>
                   <a:srgbClr val="FFFFFF"/>
@@ -8319,7 +9003,7 @@
                 <a:ea typeface="Aptos Mono"/>
                 <a:cs typeface="Aptos Mono"/>
               </a:rPr>
-              <a:t>01  Validate upstream outputs</a:t>
+              <a:t>01  Validate selected cohort</a:t>
             </a:r>
           </a:p>
         </p:txBody>
@@ -8365,6 +9049,7 @@
           <a:lstStyle xmlns:a="http://schemas.openxmlformats.org/drawingml/2006/main"/>
           <a:p xmlns:a="http://schemas.openxmlformats.org/drawingml/2006/main">
             <a:pPr algn="l">
+              <a:buNone/>
               <a:defRPr sz="1125" b="0">
                 <a:solidFill>
                   <a:srgbClr val="FFFFFF"/>
@@ -8383,7 +9068,7 @@
                 <a:ea typeface="Aptos Mono"/>
                 <a:cs typeface="Aptos Mono"/>
               </a:rPr>
-              <a:t>02  Confirm status_map.csv</a:t>
+              <a:t>02  Confirm selected manifest</a:t>
             </a:r>
           </a:p>
         </p:txBody>
@@ -8429,6 +9114,7 @@
           <a:lstStyle xmlns:a="http://schemas.openxmlformats.org/drawingml/2006/main"/>
           <a:p xmlns:a="http://schemas.openxmlformats.org/drawingml/2006/main">
             <a:pPr algn="l">
+              <a:buNone/>
               <a:defRPr sz="1125" b="0">
                 <a:solidFill>
                   <a:srgbClr val="FFFFFF"/>
@@ -8447,7 +9133,7 @@
                 <a:ea typeface="Aptos Mono"/>
                 <a:cs typeface="Aptos Mono"/>
               </a:rPr>
-              <a:t>03  Confirm vf_analysis_ready.csv</a:t>
+              <a:t>03  Confirm direct pair evidence</a:t>
             </a:r>
           </a:p>
         </p:txBody>
@@ -8493,6 +9179,7 @@
           <a:lstStyle xmlns:a="http://schemas.openxmlformats.org/drawingml/2006/main"/>
           <a:p xmlns:a="http://schemas.openxmlformats.org/drawingml/2006/main">
             <a:pPr algn="l">
+              <a:buNone/>
               <a:defRPr sz="1125" b="0">
                 <a:solidFill>
                   <a:srgbClr val="FFFFFF"/>
@@ -8511,7 +9198,7 @@
                 <a:ea typeface="Aptos Mono"/>
                 <a:cs typeface="Aptos Mono"/>
               </a:rPr>
-              <a:t>04  Refresh casebook</a:t>
+              <a:t>04  Run RQ01-RQ10</a:t>
             </a:r>
           </a:p>
         </p:txBody>
@@ -8557,6 +9244,7 @@
           <a:lstStyle xmlns:a="http://schemas.openxmlformats.org/drawingml/2006/main"/>
           <a:p xmlns:a="http://schemas.openxmlformats.org/drawingml/2006/main">
             <a:pPr algn="l">
+              <a:buNone/>
               <a:defRPr sz="1125" b="1">
                 <a:solidFill>
                   <a:srgbClr val="FFFFFF"/>
@@ -8575,7 +9263,7 @@
                 <a:ea typeface="Aptos Mono"/>
                 <a:cs typeface="Aptos Mono"/>
               </a:rPr>
-              <a:t>05  Render final figures</a:t>
+              <a:t>05  Publish claim registry and decks</a:t>
             </a:r>
           </a:p>
         </p:txBody>
@@ -8656,6 +9344,7 @@
           <a:lstStyle xmlns:a="http://schemas.openxmlformats.org/drawingml/2006/main"/>
           <a:p xmlns:a="http://schemas.openxmlformats.org/drawingml/2006/main">
             <a:pPr algn="l">
+              <a:buNone/>
               <a:defRPr sz="825" b="1">
                 <a:solidFill>
                   <a:srgbClr val="17855B"/>
@@ -8720,6 +9409,7 @@
           <a:lstStyle xmlns:a="http://schemas.openxmlformats.org/drawingml/2006/main"/>
           <a:p xmlns:a="http://schemas.openxmlformats.org/drawingml/2006/main">
             <a:pPr algn="l">
+              <a:buNone/>
               <a:defRPr sz="1275" b="1">
                 <a:solidFill>
                   <a:srgbClr val="FFFFFF"/>
@@ -8738,7 +9428,7 @@
                 <a:ea typeface="Aptos Mono"/>
                 <a:cs typeface="Aptos Mono"/>
               </a:rPr>
-              <a:t>35_final_figure_pack.R</a:t>
+              <a:t>RUN_COMPLETE_ANALYSIS.sh</a:t>
             </a:r>
           </a:p>
         </p:txBody>
@@ -8819,6 +9509,7 @@
           <a:lstStyle xmlns:a="http://schemas.openxmlformats.org/drawingml/2006/main"/>
           <a:p xmlns:a="http://schemas.openxmlformats.org/drawingml/2006/main">
             <a:pPr algn="l">
+              <a:buNone/>
               <a:defRPr sz="1125" b="1">
                 <a:solidFill>
                   <a:srgbClr val="607587"/>
@@ -8883,6 +9574,7 @@
           <a:lstStyle xmlns:a="http://schemas.openxmlformats.org/drawingml/2006/main"/>
           <a:p xmlns:a="http://schemas.openxmlformats.org/drawingml/2006/main">
             <a:pPr algn="l">
+              <a:buNone/>
               <a:defRPr sz="1500" b="1">
                 <a:solidFill>
                   <a:srgbClr val="152533"/>
@@ -8901,7 +9593,7 @@
                 <a:ea typeface="Aptos"/>
                 <a:cs typeface="Aptos"/>
               </a:rPr>
-              <a:t>Keep primary UTI_Status outputs separate from superseded legacy labels.</a:t>
+              <a:t>Use the versioned operational phenotype and selected Longcycler cohort throughout.</a:t>
             </a:r>
           </a:p>
         </p:txBody>
@@ -9039,6 +9731,7 @@
           <a:lstStyle xmlns:a="http://schemas.openxmlformats.org/drawingml/2006/main"/>
           <a:p xmlns:a="http://schemas.openxmlformats.org/drawingml/2006/main">
             <a:pPr algn="l">
+              <a:buNone/>
               <a:defRPr sz="825" b="1">
                 <a:solidFill>
                   <a:srgbClr val="607587"/>
@@ -9103,6 +9796,7 @@
           <a:lstStyle xmlns:a="http://schemas.openxmlformats.org/drawingml/2006/main"/>
           <a:p xmlns:a="http://schemas.openxmlformats.org/drawingml/2006/main">
             <a:pPr algn="l">
+              <a:buNone/>
               <a:defRPr sz="2625" b="1">
                 <a:solidFill>
                   <a:srgbClr val="152533"/>
@@ -9121,7 +9815,7 @@
                 <a:ea typeface="Aptos Display"/>
                 <a:cs typeface="Aptos Display"/>
               </a:rPr>
-              <a:t>Current UTI classification audit</a:t>
+              <a:t>Operational UTI phenotype audit</a:t>
             </a:r>
           </a:p>
         </p:txBody>
@@ -9202,6 +9896,7 @@
           <a:lstStyle xmlns:a="http://schemas.openxmlformats.org/drawingml/2006/main"/>
           <a:p xmlns:a="http://schemas.openxmlformats.org/drawingml/2006/main">
             <a:pPr algn="l">
+              <a:buNone/>
               <a:defRPr sz="1200" b="0">
                 <a:solidFill>
                   <a:srgbClr val="607587"/>
@@ -9220,7 +9915,7 @@
                 <a:ea typeface="Aptos"/>
                 <a:cs typeface="Aptos"/>
               </a:rPr>
-              <a:t>Current catheter-aware symptom and culture-support rule; diagnostic context only.</a:t>
+              <a:t>Versioned catheter-aware symptom and culture-support rule applied to 532 selected episodes.</a:t>
             </a:r>
           </a:p>
         </p:txBody>
@@ -9301,6 +9996,7 @@
           <a:lstStyle xmlns:a="http://schemas.openxmlformats.org/drawingml/2006/main"/>
           <a:p xmlns:a="http://schemas.openxmlformats.org/drawingml/2006/main">
             <a:pPr algn="l">
+              <a:buNone/>
               <a:defRPr sz="825" b="1">
                 <a:solidFill>
                   <a:srgbClr val="607587"/>
@@ -9400,6 +10096,7 @@
           <a:lstStyle xmlns:a="http://schemas.openxmlformats.org/drawingml/2006/main"/>
           <a:p xmlns:a="http://schemas.openxmlformats.org/drawingml/2006/main">
             <a:pPr algn="l">
+              <a:buNone/>
               <a:defRPr sz="750" b="0">
                 <a:solidFill>
                   <a:srgbClr val="607587"/>
@@ -9418,7 +10115,7 @@
                 <a:ea typeface="Aptos"/>
                 <a:cs typeface="Aptos"/>
               </a:rPr>
-              <a:t>rUTI clinical-to-genomic review  |  current UTI_Status analysis  |  27 May 2026</a:t>
+              <a:t>rUTI clinical-to-genomic review  |  operational UTI phenotype | Longcycler-only analysis  |  14 July 2026</a:t>
             </a:r>
           </a:p>
         </p:txBody>
@@ -9464,6 +10161,7 @@
           <a:lstStyle xmlns:a="http://schemas.openxmlformats.org/drawingml/2006/main"/>
           <a:p xmlns:a="http://schemas.openxmlformats.org/drawingml/2006/main">
             <a:pPr algn="r">
+              <a:buNone/>
               <a:defRPr sz="900" b="1">
                 <a:solidFill>
                   <a:srgbClr val="607587"/>
@@ -9522,18 +10220,18 @@
       </p:sp>
       <p:pic>
         <p:nvPicPr>
-          <p:cNvPr id="13" name=""/>
+          <p:cNvPr id="26" name=""/>
           <p:cNvPicPr>
             <a:picLocks xmlns:a="http://schemas.openxmlformats.org/drawingml/2006/main" noChangeAspect="1"/>
           </p:cNvPicPr>
           <p:nvPr/>
         </p:nvPicPr>
         <p:blipFill>
-          <a:blip xmlns:r="http://schemas.openxmlformats.org/officeDocument/2006/relationships" xmlns:a="http://schemas.openxmlformats.org/drawingml/2006/main" r:embed="Rb97470f5edea4ad2"/>
+          <a:blip xmlns:r="http://schemas.openxmlformats.org/officeDocument/2006/relationships" xmlns:a="http://schemas.openxmlformats.org/drawingml/2006/main" r:embed="Rc8cb7c732bf34be6"/>
           <a:stretch xmlns:a="http://schemas.openxmlformats.org/drawingml/2006/main"/>
         </p:blipFill>
         <p:spPr>
-          <a:xfrm xmlns:a="http://schemas.openxmlformats.org/drawingml/2006/main">
+          <a:xfrm xmlns:a="http://schemas.openxmlformats.org/drawingml/2006/main" flipH="0" flipV="0">
             <a:off x="2509016" y="1743075"/>
             <a:ext cx="7193017" cy="4171950"/>
           </a:xfrm>
@@ -9675,6 +10373,7 @@
           <a:lstStyle xmlns:a="http://schemas.openxmlformats.org/drawingml/2006/main"/>
           <a:p xmlns:a="http://schemas.openxmlformats.org/drawingml/2006/main">
             <a:pPr algn="l">
+              <a:buNone/>
               <a:defRPr sz="825" b="1">
                 <a:solidFill>
                   <a:srgbClr val="607587"/>
@@ -9739,6 +10438,7 @@
           <a:lstStyle xmlns:a="http://schemas.openxmlformats.org/drawingml/2006/main"/>
           <a:p xmlns:a="http://schemas.openxmlformats.org/drawingml/2006/main">
             <a:pPr algn="l">
+              <a:buNone/>
               <a:defRPr sz="2625" b="1">
                 <a:solidFill>
                   <a:srgbClr val="152533"/>
@@ -9838,6 +10538,7 @@
           <a:lstStyle xmlns:a="http://schemas.openxmlformats.org/drawingml/2006/main"/>
           <a:p xmlns:a="http://schemas.openxmlformats.org/drawingml/2006/main">
             <a:pPr algn="l">
+              <a:buNone/>
               <a:defRPr sz="1200" b="0">
                 <a:solidFill>
                   <a:srgbClr val="607587"/>
@@ -9937,6 +10638,7 @@
           <a:lstStyle xmlns:a="http://schemas.openxmlformats.org/drawingml/2006/main"/>
           <a:p xmlns:a="http://schemas.openxmlformats.org/drawingml/2006/main">
             <a:pPr algn="l">
+              <a:buNone/>
               <a:defRPr sz="825" b="1">
                 <a:solidFill>
                   <a:srgbClr val="607587"/>
@@ -10036,6 +10738,7 @@
           <a:lstStyle xmlns:a="http://schemas.openxmlformats.org/drawingml/2006/main"/>
           <a:p xmlns:a="http://schemas.openxmlformats.org/drawingml/2006/main">
             <a:pPr algn="l">
+              <a:buNone/>
               <a:defRPr sz="750" b="0">
                 <a:solidFill>
                   <a:srgbClr val="607587"/>
@@ -10054,7 +10757,7 @@
                 <a:ea typeface="Aptos"/>
                 <a:cs typeface="Aptos"/>
               </a:rPr>
-              <a:t>rUTI clinical-to-genomic review  |  current UTI_Status analysis  |  27 May 2026</a:t>
+              <a:t>rUTI clinical-to-genomic review  |  operational UTI phenotype | Longcycler-only analysis  |  14 July 2026</a:t>
             </a:r>
           </a:p>
         </p:txBody>
@@ -10100,6 +10803,7 @@
           <a:lstStyle xmlns:a="http://schemas.openxmlformats.org/drawingml/2006/main"/>
           <a:p xmlns:a="http://schemas.openxmlformats.org/drawingml/2006/main">
             <a:pPr algn="r">
+              <a:buNone/>
               <a:defRPr sz="900" b="1">
                 <a:solidFill>
                   <a:srgbClr val="607587"/>
@@ -10158,18 +10862,18 @@
       </p:sp>
       <p:pic>
         <p:nvPicPr>
-          <p:cNvPr id="13" name=""/>
+          <p:cNvPr id="26" name=""/>
           <p:cNvPicPr>
             <a:picLocks xmlns:a="http://schemas.openxmlformats.org/drawingml/2006/main" noChangeAspect="1"/>
           </p:cNvPicPr>
           <p:nvPr/>
         </p:nvPicPr>
         <p:blipFill>
-          <a:blip xmlns:r="http://schemas.openxmlformats.org/officeDocument/2006/relationships" xmlns:a="http://schemas.openxmlformats.org/drawingml/2006/main" r:embed="Rb68fb53a28164458"/>
+          <a:blip xmlns:r="http://schemas.openxmlformats.org/officeDocument/2006/relationships" xmlns:a="http://schemas.openxmlformats.org/drawingml/2006/main" r:embed="R433df1a0607443d1"/>
           <a:stretch xmlns:a="http://schemas.openxmlformats.org/drawingml/2006/main"/>
         </p:blipFill>
         <p:spPr>
-          <a:xfrm xmlns:a="http://schemas.openxmlformats.org/drawingml/2006/main">
+          <a:xfrm xmlns:a="http://schemas.openxmlformats.org/drawingml/2006/main" flipH="0" flipV="0">
             <a:off x="3290888" y="1628775"/>
             <a:ext cx="5667375" cy="4533900"/>
           </a:xfrm>
@@ -10311,6 +11015,7 @@
           <a:lstStyle xmlns:a="http://schemas.openxmlformats.org/drawingml/2006/main"/>
           <a:p xmlns:a="http://schemas.openxmlformats.org/drawingml/2006/main">
             <a:pPr algn="l">
+              <a:buNone/>
               <a:defRPr sz="825" b="1">
                 <a:solidFill>
                   <a:srgbClr val="607587"/>
@@ -10375,6 +11080,7 @@
           <a:lstStyle xmlns:a="http://schemas.openxmlformats.org/drawingml/2006/main"/>
           <a:p xmlns:a="http://schemas.openxmlformats.org/drawingml/2006/main">
             <a:pPr algn="l">
+              <a:buNone/>
               <a:defRPr sz="2625" b="1">
                 <a:solidFill>
                   <a:srgbClr val="152533"/>
@@ -10474,6 +11180,7 @@
           <a:lstStyle xmlns:a="http://schemas.openxmlformats.org/drawingml/2006/main"/>
           <a:p xmlns:a="http://schemas.openxmlformats.org/drawingml/2006/main">
             <a:pPr algn="l">
+              <a:buNone/>
               <a:defRPr sz="1200" b="0">
                 <a:solidFill>
                   <a:srgbClr val="607587"/>
@@ -10573,6 +11280,7 @@
           <a:lstStyle xmlns:a="http://schemas.openxmlformats.org/drawingml/2006/main"/>
           <a:p xmlns:a="http://schemas.openxmlformats.org/drawingml/2006/main">
             <a:pPr algn="l">
+              <a:buNone/>
               <a:defRPr sz="825" b="1">
                 <a:solidFill>
                   <a:srgbClr val="607587"/>
@@ -10672,6 +11380,7 @@
           <a:lstStyle xmlns:a="http://schemas.openxmlformats.org/drawingml/2006/main"/>
           <a:p xmlns:a="http://schemas.openxmlformats.org/drawingml/2006/main">
             <a:pPr algn="l">
+              <a:buNone/>
               <a:defRPr sz="750" b="0">
                 <a:solidFill>
                   <a:srgbClr val="607587"/>
@@ -10690,7 +11399,7 @@
                 <a:ea typeface="Aptos"/>
                 <a:cs typeface="Aptos"/>
               </a:rPr>
-              <a:t>rUTI clinical-to-genomic review  |  current UTI_Status analysis  |  27 May 2026</a:t>
+              <a:t>rUTI clinical-to-genomic review  |  operational UTI phenotype | Longcycler-only analysis  |  14 July 2026</a:t>
             </a:r>
           </a:p>
         </p:txBody>
@@ -10736,6 +11445,7 @@
           <a:lstStyle xmlns:a="http://schemas.openxmlformats.org/drawingml/2006/main"/>
           <a:p xmlns:a="http://schemas.openxmlformats.org/drawingml/2006/main">
             <a:pPr algn="r">
+              <a:buNone/>
               <a:defRPr sz="900" b="1">
                 <a:solidFill>
                   <a:srgbClr val="607587"/>
@@ -10794,18 +11504,18 @@
       </p:sp>
       <p:pic>
         <p:nvPicPr>
-          <p:cNvPr id="13" name=""/>
+          <p:cNvPr id="26" name=""/>
           <p:cNvPicPr>
             <a:picLocks xmlns:a="http://schemas.openxmlformats.org/drawingml/2006/main" noChangeAspect="1"/>
           </p:cNvPicPr>
           <p:nvPr/>
         </p:nvPicPr>
         <p:blipFill>
-          <a:blip xmlns:r="http://schemas.openxmlformats.org/officeDocument/2006/relationships" xmlns:a="http://schemas.openxmlformats.org/drawingml/2006/main" r:embed="R6a96378d10e748e6"/>
+          <a:blip xmlns:r="http://schemas.openxmlformats.org/officeDocument/2006/relationships" xmlns:a="http://schemas.openxmlformats.org/drawingml/2006/main" r:embed="Re3ca624f1a57460c"/>
           <a:stretch xmlns:a="http://schemas.openxmlformats.org/drawingml/2006/main"/>
         </p:blipFill>
         <p:spPr>
-          <a:xfrm xmlns:a="http://schemas.openxmlformats.org/drawingml/2006/main">
+          <a:xfrm xmlns:a="http://schemas.openxmlformats.org/drawingml/2006/main" flipH="0" flipV="0">
             <a:off x="3095625" y="1743075"/>
             <a:ext cx="6000750" cy="4267200"/>
           </a:xfrm>
@@ -10947,6 +11657,7 @@
           <a:lstStyle xmlns:a="http://schemas.openxmlformats.org/drawingml/2006/main"/>
           <a:p xmlns:a="http://schemas.openxmlformats.org/drawingml/2006/main">
             <a:pPr algn="l">
+              <a:buNone/>
               <a:defRPr sz="825" b="1">
                 <a:solidFill>
                   <a:srgbClr val="607587"/>
@@ -11011,6 +11722,7 @@
           <a:lstStyle xmlns:a="http://schemas.openxmlformats.org/drawingml/2006/main"/>
           <a:p xmlns:a="http://schemas.openxmlformats.org/drawingml/2006/main">
             <a:pPr algn="l">
+              <a:buNone/>
               <a:defRPr sz="2625" b="1">
                 <a:solidFill>
                   <a:srgbClr val="152533"/>
@@ -11110,6 +11822,7 @@
           <a:lstStyle xmlns:a="http://schemas.openxmlformats.org/drawingml/2006/main"/>
           <a:p xmlns:a="http://schemas.openxmlformats.org/drawingml/2006/main">
             <a:pPr algn="l">
+              <a:buNone/>
               <a:defRPr sz="1200" b="0">
                 <a:solidFill>
                   <a:srgbClr val="607587"/>
@@ -11209,6 +11922,7 @@
           <a:lstStyle xmlns:a="http://schemas.openxmlformats.org/drawingml/2006/main"/>
           <a:p xmlns:a="http://schemas.openxmlformats.org/drawingml/2006/main">
             <a:pPr algn="l">
+              <a:buNone/>
               <a:defRPr sz="825" b="1">
                 <a:solidFill>
                   <a:srgbClr val="607587"/>
@@ -11308,6 +12022,7 @@
           <a:lstStyle xmlns:a="http://schemas.openxmlformats.org/drawingml/2006/main"/>
           <a:p xmlns:a="http://schemas.openxmlformats.org/drawingml/2006/main">
             <a:pPr algn="l">
+              <a:buNone/>
               <a:defRPr sz="750" b="0">
                 <a:solidFill>
                   <a:srgbClr val="607587"/>
@@ -11326,7 +12041,7 @@
                 <a:ea typeface="Aptos"/>
                 <a:cs typeface="Aptos"/>
               </a:rPr>
-              <a:t>rUTI clinical-to-genomic review  |  current UTI_Status analysis  |  27 May 2026</a:t>
+              <a:t>rUTI clinical-to-genomic review  |  operational UTI phenotype | Longcycler-only analysis  |  14 July 2026</a:t>
             </a:r>
           </a:p>
         </p:txBody>
@@ -11372,6 +12087,7 @@
           <a:lstStyle xmlns:a="http://schemas.openxmlformats.org/drawingml/2006/main"/>
           <a:p xmlns:a="http://schemas.openxmlformats.org/drawingml/2006/main">
             <a:pPr algn="r">
+              <a:buNone/>
               <a:defRPr sz="900" b="1">
                 <a:solidFill>
                   <a:srgbClr val="607587"/>
@@ -11430,18 +12146,18 @@
       </p:sp>
       <p:pic>
         <p:nvPicPr>
-          <p:cNvPr id="13" name=""/>
+          <p:cNvPr id="26" name=""/>
           <p:cNvPicPr>
             <a:picLocks xmlns:a="http://schemas.openxmlformats.org/drawingml/2006/main" noChangeAspect="1"/>
           </p:cNvPicPr>
           <p:nvPr/>
         </p:nvPicPr>
         <p:blipFill>
-          <a:blip xmlns:r="http://schemas.openxmlformats.org/officeDocument/2006/relationships" xmlns:a="http://schemas.openxmlformats.org/drawingml/2006/main" r:embed="R776d1fa9f3364a52"/>
+          <a:blip xmlns:r="http://schemas.openxmlformats.org/officeDocument/2006/relationships" xmlns:a="http://schemas.openxmlformats.org/drawingml/2006/main" r:embed="R3aaed9aed48f496c"/>
           <a:stretch xmlns:a="http://schemas.openxmlformats.org/drawingml/2006/main"/>
         </p:blipFill>
         <p:spPr>
-          <a:xfrm xmlns:a="http://schemas.openxmlformats.org/drawingml/2006/main">
+          <a:xfrm xmlns:a="http://schemas.openxmlformats.org/drawingml/2006/main" flipH="0" flipV="0">
             <a:off x="2200955" y="1714500"/>
             <a:ext cx="7790089" cy="4362450"/>
           </a:xfrm>
@@ -11583,6 +12299,7 @@
           <a:lstStyle xmlns:a="http://schemas.openxmlformats.org/drawingml/2006/main"/>
           <a:p xmlns:a="http://schemas.openxmlformats.org/drawingml/2006/main">
             <a:pPr algn="l">
+              <a:buNone/>
               <a:defRPr sz="825" b="1">
                 <a:solidFill>
                   <a:srgbClr val="607587"/>
@@ -11647,6 +12364,7 @@
           <a:lstStyle xmlns:a="http://schemas.openxmlformats.org/drawingml/2006/main"/>
           <a:p xmlns:a="http://schemas.openxmlformats.org/drawingml/2006/main">
             <a:pPr algn="l">
+              <a:buNone/>
               <a:defRPr sz="2625" b="1">
                 <a:solidFill>
                   <a:srgbClr val="152533"/>
@@ -11746,6 +12464,7 @@
           <a:lstStyle xmlns:a="http://schemas.openxmlformats.org/drawingml/2006/main"/>
           <a:p xmlns:a="http://schemas.openxmlformats.org/drawingml/2006/main">
             <a:pPr algn="l">
+              <a:buNone/>
               <a:defRPr sz="1200" b="0">
                 <a:solidFill>
                   <a:srgbClr val="607587"/>
@@ -11764,7 +12483,7 @@
                 <a:ea typeface="Aptos"/>
                 <a:cs typeface="Aptos"/>
               </a:rPr>
-              <a:t>Near-miss episodes remain sensitivity-only and do not enter the primary UTI group.</a:t>
+              <a:t>17 near-miss rows remain sensitivity-only and do not enter the operational UTI group.</a:t>
             </a:r>
           </a:p>
         </p:txBody>
@@ -11845,6 +12564,7 @@
           <a:lstStyle xmlns:a="http://schemas.openxmlformats.org/drawingml/2006/main"/>
           <a:p xmlns:a="http://schemas.openxmlformats.org/drawingml/2006/main">
             <a:pPr algn="l">
+              <a:buNone/>
               <a:defRPr sz="825" b="1">
                 <a:solidFill>
                   <a:srgbClr val="607587"/>
@@ -11944,6 +12664,7 @@
           <a:lstStyle xmlns:a="http://schemas.openxmlformats.org/drawingml/2006/main"/>
           <a:p xmlns:a="http://schemas.openxmlformats.org/drawingml/2006/main">
             <a:pPr algn="l">
+              <a:buNone/>
               <a:defRPr sz="750" b="0">
                 <a:solidFill>
                   <a:srgbClr val="607587"/>
@@ -11962,7 +12683,7 @@
                 <a:ea typeface="Aptos"/>
                 <a:cs typeface="Aptos"/>
               </a:rPr>
-              <a:t>rUTI clinical-to-genomic review  |  current UTI_Status analysis  |  27 May 2026</a:t>
+              <a:t>rUTI clinical-to-genomic review  |  operational UTI phenotype | Longcycler-only analysis  |  14 July 2026</a:t>
             </a:r>
           </a:p>
         </p:txBody>
@@ -12008,6 +12729,7 @@
           <a:lstStyle xmlns:a="http://schemas.openxmlformats.org/drawingml/2006/main"/>
           <a:p xmlns:a="http://schemas.openxmlformats.org/drawingml/2006/main">
             <a:pPr algn="r">
+              <a:buNone/>
               <a:defRPr sz="900" b="1">
                 <a:solidFill>
                   <a:srgbClr val="607587"/>
@@ -12066,18 +12788,18 @@
       </p:sp>
       <p:pic>
         <p:nvPicPr>
-          <p:cNvPr id="13" name=""/>
+          <p:cNvPr id="26" name=""/>
           <p:cNvPicPr>
             <a:picLocks xmlns:a="http://schemas.openxmlformats.org/drawingml/2006/main" noChangeAspect="1"/>
           </p:cNvPicPr>
           <p:nvPr/>
         </p:nvPicPr>
         <p:blipFill>
-          <a:blip xmlns:r="http://schemas.openxmlformats.org/officeDocument/2006/relationships" xmlns:a="http://schemas.openxmlformats.org/drawingml/2006/main" r:embed="Rade515f5b6e24a99"/>
+          <a:blip xmlns:r="http://schemas.openxmlformats.org/officeDocument/2006/relationships" xmlns:a="http://schemas.openxmlformats.org/drawingml/2006/main" r:embed="Rf84ddeda20bb4315"/>
           <a:stretch xmlns:a="http://schemas.openxmlformats.org/drawingml/2006/main"/>
         </p:blipFill>
         <p:spPr>
-          <a:xfrm xmlns:a="http://schemas.openxmlformats.org/drawingml/2006/main">
+          <a:xfrm xmlns:a="http://schemas.openxmlformats.org/drawingml/2006/main" flipH="0" flipV="0">
             <a:off x="2316710" y="1704975"/>
             <a:ext cx="7587155" cy="4400550"/>
           </a:xfrm>
@@ -12219,6 +12941,7 @@
           <a:lstStyle xmlns:a="http://schemas.openxmlformats.org/drawingml/2006/main"/>
           <a:p xmlns:a="http://schemas.openxmlformats.org/drawingml/2006/main">
             <a:pPr algn="l">
+              <a:buNone/>
               <a:defRPr sz="825" b="1">
                 <a:solidFill>
                   <a:srgbClr val="607587"/>
@@ -12283,6 +13006,7 @@
           <a:lstStyle xmlns:a="http://schemas.openxmlformats.org/drawingml/2006/main"/>
           <a:p xmlns:a="http://schemas.openxmlformats.org/drawingml/2006/main">
             <a:pPr algn="l">
+              <a:buNone/>
               <a:defRPr sz="2625" b="1">
                 <a:solidFill>
                   <a:srgbClr val="152533"/>
@@ -12382,6 +13106,7 @@
           <a:lstStyle xmlns:a="http://schemas.openxmlformats.org/drawingml/2006/main"/>
           <a:p xmlns:a="http://schemas.openxmlformats.org/drawingml/2006/main">
             <a:pPr algn="l">
+              <a:buNone/>
               <a:defRPr sz="1200" b="0">
                 <a:solidFill>
                   <a:srgbClr val="607587"/>
@@ -12400,7 +13125,7 @@
                 <a:ea typeface="Aptos"/>
                 <a:cs typeface="Aptos"/>
               </a:rPr>
-              <a:t>The primary comparison separates culture-supported symptomatic episodes from a heterogeneous remainder.</a:t>
+              <a:t>The versioned operational phenotype separates culture-supported compatible episodes from a heterogeneous remainder.</a:t>
             </a:r>
           </a:p>
         </p:txBody>
@@ -12481,6 +13206,7 @@
           <a:lstStyle xmlns:a="http://schemas.openxmlformats.org/drawingml/2006/main"/>
           <a:p xmlns:a="http://schemas.openxmlformats.org/drawingml/2006/main">
             <a:pPr algn="l">
+              <a:buNone/>
               <a:defRPr sz="750" b="0">
                 <a:solidFill>
                   <a:srgbClr val="607587"/>
@@ -12499,7 +13225,7 @@
                 <a:ea typeface="Aptos"/>
                 <a:cs typeface="Aptos"/>
               </a:rPr>
-              <a:t>rUTI clinical-to-genomic review  |  current UTI_Status analysis  |  27 May 2026</a:t>
+              <a:t>rUTI clinical-to-genomic review  |  operational UTI phenotype | Longcycler-only analysis  |  14 July 2026</a:t>
             </a:r>
           </a:p>
         </p:txBody>
@@ -12545,6 +13271,7 @@
           <a:lstStyle xmlns:a="http://schemas.openxmlformats.org/drawingml/2006/main"/>
           <a:p xmlns:a="http://schemas.openxmlformats.org/drawingml/2006/main">
             <a:pPr algn="r">
+              <a:buNone/>
               <a:defRPr sz="900" b="1">
                 <a:solidFill>
                   <a:srgbClr val="607587"/>
@@ -12609,6 +13336,7 @@
           <a:lstStyle xmlns:a="http://schemas.openxmlformats.org/drawingml/2006/main"/>
           <a:p xmlns:a="http://schemas.openxmlformats.org/drawingml/2006/main">
             <a:pPr algn="l">
+              <a:buNone/>
               <a:defRPr sz="825" b="1">
                 <a:solidFill>
                   <a:srgbClr val="607587"/>
@@ -12743,6 +13471,7 @@
           <a:lstStyle xmlns:a="http://schemas.openxmlformats.org/drawingml/2006/main"/>
           <a:p xmlns:a="http://schemas.openxmlformats.org/drawingml/2006/main">
             <a:pPr algn="l">
+              <a:buNone/>
               <a:defRPr sz="825" b="1">
                 <a:solidFill>
                   <a:srgbClr val="E7772F"/>
@@ -12807,6 +13536,7 @@
           <a:lstStyle xmlns:a="http://schemas.openxmlformats.org/drawingml/2006/main"/>
           <a:p xmlns:a="http://schemas.openxmlformats.org/drawingml/2006/main">
             <a:pPr algn="l">
+              <a:buNone/>
               <a:defRPr sz="1725" b="1">
                 <a:solidFill>
                   <a:srgbClr val="152533"/>
@@ -12871,6 +13601,7 @@
           <a:lstStyle xmlns:a="http://schemas.openxmlformats.org/drawingml/2006/main"/>
           <a:p xmlns:a="http://schemas.openxmlformats.org/drawingml/2006/main">
             <a:pPr algn="l">
+              <a:buNone/>
               <a:defRPr sz="1200" b="0">
                 <a:solidFill>
                   <a:srgbClr val="607587"/>
@@ -13005,6 +13736,7 @@
           <a:lstStyle xmlns:a="http://schemas.openxmlformats.org/drawingml/2006/main"/>
           <a:p xmlns:a="http://schemas.openxmlformats.org/drawingml/2006/main">
             <a:pPr algn="l">
+              <a:buNone/>
               <a:defRPr sz="825" b="1">
                 <a:solidFill>
                   <a:srgbClr val="2678B8"/>
@@ -13069,6 +13801,7 @@
           <a:lstStyle xmlns:a="http://schemas.openxmlformats.org/drawingml/2006/main"/>
           <a:p xmlns:a="http://schemas.openxmlformats.org/drawingml/2006/main">
             <a:pPr algn="l">
+              <a:buNone/>
               <a:defRPr sz="1875" b="1">
                 <a:solidFill>
                   <a:srgbClr val="152533"/>
@@ -13133,6 +13866,7 @@
           <a:lstStyle xmlns:a="http://schemas.openxmlformats.org/drawingml/2006/main"/>
           <a:p xmlns:a="http://schemas.openxmlformats.org/drawingml/2006/main">
             <a:pPr algn="l">
+              <a:buNone/>
               <a:defRPr sz="1200" b="0">
                 <a:solidFill>
                   <a:srgbClr val="607587"/>
@@ -13156,6 +13890,7 @@
           </a:p>
           <a:p xmlns:a="http://schemas.openxmlformats.org/drawingml/2006/main">
             <a:pPr algn="l">
+              <a:buNone/>
               <a:defRPr sz="1200" b="0">
                 <a:solidFill>
                   <a:srgbClr val="607587"/>
@@ -13220,6 +13955,7 @@
           <a:lstStyle xmlns:a="http://schemas.openxmlformats.org/drawingml/2006/main"/>
           <a:p xmlns:a="http://schemas.openxmlformats.org/drawingml/2006/main">
             <a:pPr algn="l">
+              <a:buNone/>
               <a:defRPr sz="825" b="1">
                 <a:solidFill>
                   <a:srgbClr val="607587"/>
@@ -13284,6 +14020,7 @@
           <a:lstStyle xmlns:a="http://schemas.openxmlformats.org/drawingml/2006/main"/>
           <a:p xmlns:a="http://schemas.openxmlformats.org/drawingml/2006/main">
             <a:pPr algn="l">
+              <a:buNone/>
               <a:defRPr sz="1350" b="1">
                 <a:solidFill>
                   <a:srgbClr val="E7772F"/>
@@ -13348,6 +14085,7 @@
           <a:lstStyle xmlns:a="http://schemas.openxmlformats.org/drawingml/2006/main"/>
           <a:p xmlns:a="http://schemas.openxmlformats.org/drawingml/2006/main">
             <a:pPr algn="l">
+              <a:buNone/>
               <a:defRPr sz="1725" b="0">
                 <a:solidFill>
                   <a:srgbClr val="152533"/>
@@ -13447,6 +14185,7 @@
           <a:lstStyle xmlns:a="http://schemas.openxmlformats.org/drawingml/2006/main"/>
           <a:p xmlns:a="http://schemas.openxmlformats.org/drawingml/2006/main">
             <a:pPr algn="l">
+              <a:buNone/>
               <a:defRPr sz="1350" b="1">
                 <a:solidFill>
                   <a:srgbClr val="E7772F"/>
@@ -13511,6 +14250,7 @@
           <a:lstStyle xmlns:a="http://schemas.openxmlformats.org/drawingml/2006/main"/>
           <a:p xmlns:a="http://schemas.openxmlformats.org/drawingml/2006/main">
             <a:pPr algn="l">
+              <a:buNone/>
               <a:defRPr sz="1725" b="0">
                 <a:solidFill>
                   <a:srgbClr val="152533"/>
@@ -13610,6 +14350,7 @@
           <a:lstStyle xmlns:a="http://schemas.openxmlformats.org/drawingml/2006/main"/>
           <a:p xmlns:a="http://schemas.openxmlformats.org/drawingml/2006/main">
             <a:pPr algn="l">
+              <a:buNone/>
               <a:defRPr sz="1350" b="1">
                 <a:solidFill>
                   <a:srgbClr val="E7772F"/>
@@ -13674,6 +14415,7 @@
           <a:lstStyle xmlns:a="http://schemas.openxmlformats.org/drawingml/2006/main"/>
           <a:p xmlns:a="http://schemas.openxmlformats.org/drawingml/2006/main">
             <a:pPr algn="l">
+              <a:buNone/>
               <a:defRPr sz="1725" b="1">
                 <a:solidFill>
                   <a:srgbClr val="152533"/>
@@ -13773,6 +14515,7 @@
           <a:lstStyle xmlns:a="http://schemas.openxmlformats.org/drawingml/2006/main"/>
           <a:p xmlns:a="http://schemas.openxmlformats.org/drawingml/2006/main">
             <a:pPr algn="l">
+              <a:buNone/>
               <a:defRPr sz="1275" b="1">
                 <a:solidFill>
                   <a:srgbClr val="152533"/>
@@ -13929,6 +14672,7 @@
           <a:lstStyle xmlns:a="http://schemas.openxmlformats.org/drawingml/2006/main"/>
           <a:p xmlns:a="http://schemas.openxmlformats.org/drawingml/2006/main">
             <a:pPr algn="l">
+              <a:buNone/>
               <a:defRPr sz="825" b="1">
                 <a:solidFill>
                   <a:srgbClr val="607587"/>
@@ -13993,6 +14737,7 @@
           <a:lstStyle xmlns:a="http://schemas.openxmlformats.org/drawingml/2006/main"/>
           <a:p xmlns:a="http://schemas.openxmlformats.org/drawingml/2006/main">
             <a:pPr algn="l">
+              <a:buNone/>
               <a:defRPr sz="2625" b="1">
                 <a:solidFill>
                   <a:srgbClr val="152533"/>
@@ -14092,6 +14837,7 @@
           <a:lstStyle xmlns:a="http://schemas.openxmlformats.org/drawingml/2006/main"/>
           <a:p xmlns:a="http://schemas.openxmlformats.org/drawingml/2006/main">
             <a:pPr algn="l">
+              <a:buNone/>
               <a:defRPr sz="1200" b="0">
                 <a:solidFill>
                   <a:srgbClr val="607587"/>
@@ -14110,7 +14856,7 @@
                 <a:ea typeface="Aptos"/>
                 <a:cs typeface="Aptos"/>
               </a:rPr>
-              <a:t>Instability is expected with 17 VF-ready UTI episodes and is not association testing.</a:t>
+              <a:t>Instability is expected with 16 operational UTI episodes and is not confirmatory association testing.</a:t>
             </a:r>
           </a:p>
         </p:txBody>
@@ -14191,6 +14937,7 @@
           <a:lstStyle xmlns:a="http://schemas.openxmlformats.org/drawingml/2006/main"/>
           <a:p xmlns:a="http://schemas.openxmlformats.org/drawingml/2006/main">
             <a:pPr algn="l">
+              <a:buNone/>
               <a:defRPr sz="825" b="1">
                 <a:solidFill>
                   <a:srgbClr val="607587"/>
@@ -14290,6 +15037,7 @@
           <a:lstStyle xmlns:a="http://schemas.openxmlformats.org/drawingml/2006/main"/>
           <a:p xmlns:a="http://schemas.openxmlformats.org/drawingml/2006/main">
             <a:pPr algn="l">
+              <a:buNone/>
               <a:defRPr sz="750" b="0">
                 <a:solidFill>
                   <a:srgbClr val="607587"/>
@@ -14308,7 +15056,7 @@
                 <a:ea typeface="Aptos"/>
                 <a:cs typeface="Aptos"/>
               </a:rPr>
-              <a:t>rUTI clinical-to-genomic review  |  current UTI_Status analysis  |  27 May 2026</a:t>
+              <a:t>rUTI clinical-to-genomic review  |  operational UTI phenotype | Longcycler-only analysis  |  14 July 2026</a:t>
             </a:r>
           </a:p>
         </p:txBody>
@@ -14354,6 +15102,7 @@
           <a:lstStyle xmlns:a="http://schemas.openxmlformats.org/drawingml/2006/main"/>
           <a:p xmlns:a="http://schemas.openxmlformats.org/drawingml/2006/main">
             <a:pPr algn="r">
+              <a:buNone/>
               <a:defRPr sz="900" b="1">
                 <a:solidFill>
                   <a:srgbClr val="607587"/>
@@ -14412,18 +15161,18 @@
       </p:sp>
       <p:pic>
         <p:nvPicPr>
-          <p:cNvPr id="13" name=""/>
+          <p:cNvPr id="26" name=""/>
           <p:cNvPicPr>
             <a:picLocks xmlns:a="http://schemas.openxmlformats.org/drawingml/2006/main" noChangeAspect="1"/>
           </p:cNvPicPr>
           <p:nvPr/>
         </p:nvPicPr>
         <p:blipFill>
-          <a:blip xmlns:r="http://schemas.openxmlformats.org/officeDocument/2006/relationships" xmlns:a="http://schemas.openxmlformats.org/drawingml/2006/main" r:embed="R0b2291a1b57f4f17"/>
+          <a:blip xmlns:r="http://schemas.openxmlformats.org/officeDocument/2006/relationships" xmlns:a="http://schemas.openxmlformats.org/drawingml/2006/main" r:embed="R74c6275938c44e00"/>
           <a:stretch xmlns:a="http://schemas.openxmlformats.org/drawingml/2006/main"/>
         </p:blipFill>
         <p:spPr>
-          <a:xfrm xmlns:a="http://schemas.openxmlformats.org/drawingml/2006/main">
+          <a:xfrm xmlns:a="http://schemas.openxmlformats.org/drawingml/2006/main" flipH="0" flipV="0">
             <a:off x="1445759" y="1714500"/>
             <a:ext cx="9348107" cy="4362450"/>
           </a:xfrm>
@@ -14565,6 +15314,7 @@
           <a:lstStyle xmlns:a="http://schemas.openxmlformats.org/drawingml/2006/main"/>
           <a:p xmlns:a="http://schemas.openxmlformats.org/drawingml/2006/main">
             <a:pPr algn="l">
+              <a:buNone/>
               <a:defRPr sz="825" b="1">
                 <a:solidFill>
                   <a:srgbClr val="607587"/>
@@ -14629,6 +15379,7 @@
           <a:lstStyle xmlns:a="http://schemas.openxmlformats.org/drawingml/2006/main"/>
           <a:p xmlns:a="http://schemas.openxmlformats.org/drawingml/2006/main">
             <a:pPr algn="l">
+              <a:buNone/>
               <a:defRPr sz="2625" b="1">
                 <a:solidFill>
                   <a:srgbClr val="152533"/>
@@ -14728,6 +15479,7 @@
           <a:lstStyle xmlns:a="http://schemas.openxmlformats.org/drawingml/2006/main"/>
           <a:p xmlns:a="http://schemas.openxmlformats.org/drawingml/2006/main">
             <a:pPr algn="l">
+              <a:buNone/>
               <a:defRPr sz="1200" b="0">
                 <a:solidFill>
                   <a:srgbClr val="607587"/>
@@ -14827,6 +15579,7 @@
           <a:lstStyle xmlns:a="http://schemas.openxmlformats.org/drawingml/2006/main"/>
           <a:p xmlns:a="http://schemas.openxmlformats.org/drawingml/2006/main">
             <a:pPr algn="l">
+              <a:buNone/>
               <a:defRPr sz="825" b="1">
                 <a:solidFill>
                   <a:srgbClr val="607587"/>
@@ -14926,6 +15679,7 @@
           <a:lstStyle xmlns:a="http://schemas.openxmlformats.org/drawingml/2006/main"/>
           <a:p xmlns:a="http://schemas.openxmlformats.org/drawingml/2006/main">
             <a:pPr algn="l">
+              <a:buNone/>
               <a:defRPr sz="750" b="0">
                 <a:solidFill>
                   <a:srgbClr val="607587"/>
@@ -14944,7 +15698,7 @@
                 <a:ea typeface="Aptos"/>
                 <a:cs typeface="Aptos"/>
               </a:rPr>
-              <a:t>rUTI clinical-to-genomic review  |  current UTI_Status analysis  |  27 May 2026</a:t>
+              <a:t>rUTI clinical-to-genomic review  |  operational UTI phenotype | Longcycler-only analysis  |  14 July 2026</a:t>
             </a:r>
           </a:p>
         </p:txBody>
@@ -14990,6 +15744,7 @@
           <a:lstStyle xmlns:a="http://schemas.openxmlformats.org/drawingml/2006/main"/>
           <a:p xmlns:a="http://schemas.openxmlformats.org/drawingml/2006/main">
             <a:pPr algn="r">
+              <a:buNone/>
               <a:defRPr sz="900" b="1">
                 <a:solidFill>
                   <a:srgbClr val="607587"/>
@@ -15048,18 +15803,18 @@
       </p:sp>
       <p:pic>
         <p:nvPicPr>
-          <p:cNvPr id="13" name=""/>
+          <p:cNvPr id="26" name=""/>
           <p:cNvPicPr>
             <a:picLocks xmlns:a="http://schemas.openxmlformats.org/drawingml/2006/main" noChangeAspect="1"/>
           </p:cNvPicPr>
           <p:nvPr/>
         </p:nvPicPr>
         <p:blipFill>
-          <a:blip xmlns:r="http://schemas.openxmlformats.org/officeDocument/2006/relationships" xmlns:a="http://schemas.openxmlformats.org/drawingml/2006/main" r:embed="Rc7efc54b940240fc"/>
+          <a:blip xmlns:r="http://schemas.openxmlformats.org/officeDocument/2006/relationships" xmlns:a="http://schemas.openxmlformats.org/drawingml/2006/main" r:embed="R59a3c48989e34f97"/>
           <a:stretch xmlns:a="http://schemas.openxmlformats.org/drawingml/2006/main"/>
         </p:blipFill>
         <p:spPr>
-          <a:xfrm xmlns:a="http://schemas.openxmlformats.org/drawingml/2006/main">
+          <a:xfrm xmlns:a="http://schemas.openxmlformats.org/drawingml/2006/main" flipH="0" flipV="0">
             <a:off x="1945061" y="1714500"/>
             <a:ext cx="8339978" cy="4362450"/>
           </a:xfrm>
@@ -15201,6 +15956,7 @@
           <a:lstStyle xmlns:a="http://schemas.openxmlformats.org/drawingml/2006/main"/>
           <a:p xmlns:a="http://schemas.openxmlformats.org/drawingml/2006/main">
             <a:pPr algn="l">
+              <a:buNone/>
               <a:defRPr sz="825" b="1">
                 <a:solidFill>
                   <a:srgbClr val="607587"/>
@@ -15265,6 +16021,7 @@
           <a:lstStyle xmlns:a="http://schemas.openxmlformats.org/drawingml/2006/main"/>
           <a:p xmlns:a="http://schemas.openxmlformats.org/drawingml/2006/main">
             <a:pPr algn="l">
+              <a:buNone/>
               <a:defRPr sz="2625" b="1">
                 <a:solidFill>
                   <a:srgbClr val="152533"/>
@@ -15364,6 +16121,7 @@
           <a:lstStyle xmlns:a="http://schemas.openxmlformats.org/drawingml/2006/main"/>
           <a:p xmlns:a="http://schemas.openxmlformats.org/drawingml/2006/main">
             <a:pPr algn="l">
+              <a:buNone/>
               <a:defRPr sz="1200" b="0">
                 <a:solidFill>
                   <a:srgbClr val="607587"/>
@@ -15463,6 +16221,7 @@
           <a:lstStyle xmlns:a="http://schemas.openxmlformats.org/drawingml/2006/main"/>
           <a:p xmlns:a="http://schemas.openxmlformats.org/drawingml/2006/main">
             <a:pPr algn="l">
+              <a:buNone/>
               <a:defRPr sz="750" b="0">
                 <a:solidFill>
                   <a:srgbClr val="607587"/>
@@ -15481,7 +16240,7 @@
                 <a:ea typeface="Aptos"/>
                 <a:cs typeface="Aptos"/>
               </a:rPr>
-              <a:t>rUTI clinical-to-genomic review  |  current UTI_Status analysis  |  27 May 2026</a:t>
+              <a:t>rUTI clinical-to-genomic review  |  operational UTI phenotype | Longcycler-only analysis  |  14 July 2026</a:t>
             </a:r>
           </a:p>
         </p:txBody>
@@ -15527,6 +16286,7 @@
           <a:lstStyle xmlns:a="http://schemas.openxmlformats.org/drawingml/2006/main"/>
           <a:p xmlns:a="http://schemas.openxmlformats.org/drawingml/2006/main">
             <a:pPr algn="r">
+              <a:buNone/>
               <a:defRPr sz="900" b="1">
                 <a:solidFill>
                   <a:srgbClr val="607587"/>
@@ -15591,6 +16351,7 @@
           <a:lstStyle xmlns:a="http://schemas.openxmlformats.org/drawingml/2006/main"/>
           <a:p xmlns:a="http://schemas.openxmlformats.org/drawingml/2006/main">
             <a:pPr algn="l">
+              <a:buNone/>
               <a:defRPr sz="825" b="1">
                 <a:solidFill>
                   <a:srgbClr val="17855B"/>
@@ -15690,6 +16451,7 @@
           <a:lstStyle xmlns:a="http://schemas.openxmlformats.org/drawingml/2006/main"/>
           <a:p xmlns:a="http://schemas.openxmlformats.org/drawingml/2006/main">
             <a:pPr algn="l">
+              <a:buNone/>
               <a:defRPr sz="1275" b="0">
                 <a:solidFill>
                   <a:srgbClr val="152533"/>
@@ -15708,7 +16470,7 @@
                 <a:ea typeface="Aptos"/>
                 <a:cs typeface="Aptos"/>
               </a:rPr>
-              <a:t>-  583 clinical episodes: 18 UTI / 565 Not_UTI</a:t>
+              <a:t>-  532 selected episodes: 16 UTI / 516 Not_UTI</a:t>
             </a:r>
           </a:p>
         </p:txBody>
@@ -15754,6 +16516,7 @@
           <a:lstStyle xmlns:a="http://schemas.openxmlformats.org/drawingml/2006/main"/>
           <a:p xmlns:a="http://schemas.openxmlformats.org/drawingml/2006/main">
             <a:pPr algn="l">
+              <a:buNone/>
               <a:defRPr sz="1275" b="0">
                 <a:solidFill>
                   <a:srgbClr val="152533"/>
@@ -15772,7 +16535,7 @@
                 <a:ea typeface="Aptos"/>
                 <a:cs typeface="Aptos"/>
               </a:rPr>
-              <a:t>-  556 VF-ready episodes: 17 UTI / 539 Not_UTI</a:t>
+              <a:t>-  893 direct pairs; 371 adjacent from 139 residents</a:t>
             </a:r>
           </a:p>
         </p:txBody>
@@ -15818,6 +16581,7 @@
           <a:lstStyle xmlns:a="http://schemas.openxmlformats.org/drawingml/2006/main"/>
           <a:p xmlns:a="http://schemas.openxmlformats.org/drawingml/2006/main">
             <a:pPr algn="l">
+              <a:buNone/>
               <a:defRPr sz="1275" b="0">
                 <a:solidFill>
                   <a:srgbClr val="152533"/>
@@ -15836,7 +16600,7 @@
                 <a:ea typeface="Aptos"/>
                 <a:cs typeface="Aptos"/>
               </a:rPr>
-              <a:t>-  11 clinical transitions; 10 WGS/VF-linked</a:t>
+              <a:t>-  9/9/0 focused cases / linked / missing; 5 &lt;=25 SNPs</a:t>
             </a:r>
           </a:p>
         </p:txBody>
@@ -15882,6 +16646,7 @@
           <a:lstStyle xmlns:a="http://schemas.openxmlformats.org/drawingml/2006/main"/>
           <a:p xmlns:a="http://schemas.openxmlformats.org/drawingml/2006/main">
             <a:pPr algn="l">
+              <a:buNone/>
               <a:defRPr sz="1275" b="1">
                 <a:solidFill>
                   <a:srgbClr val="152533"/>
@@ -15900,7 +16665,7 @@
                 <a:ea typeface="Aptos"/>
                 <a:cs typeface="Aptos"/>
               </a:rPr>
-              <a:t>-  No global VF association significant after FDR</a:t>
+              <a:t>-  17 near-miss rows are sensitivity-only; RQ01-RQ10 complete</a:t>
             </a:r>
           </a:p>
         </p:txBody>
@@ -15946,6 +16711,7 @@
           <a:lstStyle xmlns:a="http://schemas.openxmlformats.org/drawingml/2006/main"/>
           <a:p xmlns:a="http://schemas.openxmlformats.org/drawingml/2006/main">
             <a:pPr algn="l">
+              <a:buNone/>
               <a:defRPr sz="825" b="1">
                 <a:solidFill>
                   <a:srgbClr val="B95836"/>
@@ -16045,6 +16811,7 @@
           <a:lstStyle xmlns:a="http://schemas.openxmlformats.org/drawingml/2006/main"/>
           <a:p xmlns:a="http://schemas.openxmlformats.org/drawingml/2006/main">
             <a:pPr algn="l">
+              <a:buNone/>
               <a:defRPr sz="1275" b="0">
                 <a:solidFill>
                   <a:srgbClr val="152533"/>
@@ -16063,7 +16830,7 @@
                 <a:ea typeface="Aptos"/>
                 <a:cs typeface="Aptos"/>
               </a:rPr>
-              <a:t>-  ASB-versus-UTI as the current comparison</a:t>
+              <a:t>-  a non-operational phenotype as the current comparison</a:t>
             </a:r>
           </a:p>
         </p:txBody>
@@ -16109,6 +16876,7 @@
           <a:lstStyle xmlns:a="http://schemas.openxmlformats.org/drawingml/2006/main"/>
           <a:p xmlns:a="http://schemas.openxmlformats.org/drawingml/2006/main">
             <a:pPr algn="l">
+              <a:buNone/>
               <a:defRPr sz="1275" b="0">
                 <a:solidFill>
                   <a:srgbClr val="152533"/>
@@ -16127,7 +16895,7 @@
                 <a:ea typeface="Aptos"/>
                 <a:cs typeface="Aptos"/>
               </a:rPr>
-              <a:t>-  significant lpf findings as current evidence</a:t>
+              <a:t>-  named VF or mutation signals as causal evidence</a:t>
             </a:r>
           </a:p>
         </p:txBody>
@@ -16173,6 +16941,7 @@
           <a:lstStyle xmlns:a="http://schemas.openxmlformats.org/drawingml/2006/main"/>
           <a:p xmlns:a="http://schemas.openxmlformats.org/drawingml/2006/main">
             <a:pPr algn="l">
+              <a:buNone/>
               <a:defRPr sz="1275" b="0">
                 <a:solidFill>
                   <a:srgbClr val="152533"/>
@@ -16237,6 +17006,7 @@
           <a:lstStyle xmlns:a="http://schemas.openxmlformats.org/drawingml/2006/main"/>
           <a:p xmlns:a="http://schemas.openxmlformats.org/drawingml/2006/main">
             <a:pPr algn="l">
+              <a:buNone/>
               <a:defRPr sz="1275" b="0">
                 <a:solidFill>
                   <a:srgbClr val="152533"/>
@@ -16301,6 +17071,7 @@
           <a:lstStyle xmlns:a="http://schemas.openxmlformats.org/drawingml/2006/main"/>
           <a:p xmlns:a="http://schemas.openxmlformats.org/drawingml/2006/main">
             <a:pPr algn="l">
+              <a:buNone/>
               <a:defRPr sz="825" b="1">
                 <a:solidFill>
                   <a:srgbClr val="607587"/>
@@ -16400,6 +17171,7 @@
           <a:lstStyle xmlns:a="http://schemas.openxmlformats.org/drawingml/2006/main"/>
           <a:p xmlns:a="http://schemas.openxmlformats.org/drawingml/2006/main">
             <a:pPr algn="l">
+              <a:buNone/>
               <a:defRPr sz="1050" b="0">
                 <a:solidFill>
                   <a:srgbClr val="152533"/>
@@ -16418,7 +17190,7 @@
                 <a:ea typeface="Aptos Mono"/>
                 <a:cs typeface="Aptos Mono"/>
               </a:rPr>
-              <a:t>results/longitudinal/swimmer_plot.png  |  full longitudinal context</a:t>
+              <a:t>plots/publication/Fig1_Swimmer_Plot.png  |  contextual longitudinal lookup</a:t>
             </a:r>
           </a:p>
         </p:txBody>
@@ -16499,6 +17271,7 @@
           <a:lstStyle xmlns:a="http://schemas.openxmlformats.org/drawingml/2006/main"/>
           <a:p xmlns:a="http://schemas.openxmlformats.org/drawingml/2006/main">
             <a:pPr algn="l">
+              <a:buNone/>
               <a:defRPr sz="1050" b="0">
                 <a:solidFill>
                   <a:srgbClr val="152533"/>
@@ -16598,6 +17371,7 @@
           <a:lstStyle xmlns:a="http://schemas.openxmlformats.org/drawingml/2006/main"/>
           <a:p xmlns:a="http://schemas.openxmlformats.org/drawingml/2006/main">
             <a:pPr algn="l">
+              <a:buNone/>
               <a:defRPr sz="1050" b="0">
                 <a:solidFill>
                   <a:srgbClr val="152533"/>
@@ -16754,6 +17528,7 @@
           <a:lstStyle xmlns:a="http://schemas.openxmlformats.org/drawingml/2006/main"/>
           <a:p xmlns:a="http://schemas.openxmlformats.org/drawingml/2006/main">
             <a:pPr algn="l">
+              <a:buNone/>
               <a:defRPr sz="825" b="1">
                 <a:solidFill>
                   <a:srgbClr val="607587"/>
@@ -16818,6 +17593,7 @@
           <a:lstStyle xmlns:a="http://schemas.openxmlformats.org/drawingml/2006/main"/>
           <a:p xmlns:a="http://schemas.openxmlformats.org/drawingml/2006/main">
             <a:pPr algn="l">
+              <a:buNone/>
               <a:defRPr sz="2625" b="1">
                 <a:solidFill>
                   <a:srgbClr val="152533"/>
@@ -16917,6 +17693,7 @@
           <a:lstStyle xmlns:a="http://schemas.openxmlformats.org/drawingml/2006/main"/>
           <a:p xmlns:a="http://schemas.openxmlformats.org/drawingml/2006/main">
             <a:pPr algn="l">
+              <a:buNone/>
               <a:defRPr sz="1200" b="0">
                 <a:solidFill>
                   <a:srgbClr val="607587"/>
@@ -16935,7 +17712,7 @@
                 <a:ea typeface="Aptos"/>
                 <a:cs typeface="Aptos"/>
               </a:rPr>
-              <a:t>The same sampling structure supports both clinical classification and VF/WGS comparisons.</a:t>
+              <a:t>One selected QC-passing Longcycler genome links to each of 532 analytical episodes.</a:t>
             </a:r>
           </a:p>
         </p:txBody>
@@ -17016,6 +17793,7 @@
           <a:lstStyle xmlns:a="http://schemas.openxmlformats.org/drawingml/2006/main"/>
           <a:p xmlns:a="http://schemas.openxmlformats.org/drawingml/2006/main">
             <a:pPr algn="l">
+              <a:buNone/>
               <a:defRPr sz="750" b="0">
                 <a:solidFill>
                   <a:srgbClr val="607587"/>
@@ -17034,7 +17812,7 @@
                 <a:ea typeface="Aptos"/>
                 <a:cs typeface="Aptos"/>
               </a:rPr>
-              <a:t>rUTI clinical-to-genomic review  |  current UTI_Status analysis  |  27 May 2026</a:t>
+              <a:t>rUTI clinical-to-genomic review  |  operational UTI phenotype | Longcycler-only analysis  |  14 July 2026</a:t>
             </a:r>
           </a:p>
         </p:txBody>
@@ -17080,6 +17858,7 @@
           <a:lstStyle xmlns:a="http://schemas.openxmlformats.org/drawingml/2006/main"/>
           <a:p xmlns:a="http://schemas.openxmlformats.org/drawingml/2006/main">
             <a:pPr algn="r">
+              <a:buNone/>
               <a:defRPr sz="900" b="1">
                 <a:solidFill>
                   <a:srgbClr val="607587"/>
@@ -17144,6 +17923,7 @@
           <a:lstStyle xmlns:a="http://schemas.openxmlformats.org/drawingml/2006/main"/>
           <a:p xmlns:a="http://schemas.openxmlformats.org/drawingml/2006/main">
             <a:pPr algn="l">
+              <a:buNone/>
               <a:defRPr sz="825" b="1">
                 <a:solidFill>
                   <a:srgbClr val="607587"/>
@@ -17278,6 +18058,7 @@
           <a:lstStyle xmlns:a="http://schemas.openxmlformats.org/drawingml/2006/main"/>
           <a:p xmlns:a="http://schemas.openxmlformats.org/drawingml/2006/main">
             <a:pPr algn="ctr">
+              <a:buNone/>
               <a:defRPr sz="1050" b="1">
                 <a:solidFill>
                   <a:srgbClr val="2678B8"/>
@@ -17342,6 +18123,7 @@
           <a:lstStyle xmlns:a="http://schemas.openxmlformats.org/drawingml/2006/main"/>
           <a:p xmlns:a="http://schemas.openxmlformats.org/drawingml/2006/main">
             <a:pPr algn="ctr">
+              <a:buNone/>
               <a:defRPr sz="975" b="0">
                 <a:solidFill>
                   <a:srgbClr val="607587"/>
@@ -17439,6 +18221,7 @@
           <a:lstStyle xmlns:a="http://schemas.openxmlformats.org/drawingml/2006/main"/>
           <a:p xmlns:a="http://schemas.openxmlformats.org/drawingml/2006/main">
             <a:pPr algn="ctr">
+              <a:buNone/>
               <a:defRPr sz="750" b="1">
                 <a:solidFill>
                   <a:srgbClr val="607587"/>
@@ -17538,6 +18321,7 @@
           <a:lstStyle xmlns:a="http://schemas.openxmlformats.org/drawingml/2006/main"/>
           <a:p xmlns:a="http://schemas.openxmlformats.org/drawingml/2006/main">
             <a:pPr algn="ctr">
+              <a:buNone/>
               <a:defRPr sz="1050" b="1">
                 <a:solidFill>
                   <a:srgbClr val="2678B8"/>
@@ -17602,6 +18386,7 @@
           <a:lstStyle xmlns:a="http://schemas.openxmlformats.org/drawingml/2006/main"/>
           <a:p xmlns:a="http://schemas.openxmlformats.org/drawingml/2006/main">
             <a:pPr algn="ctr">
+              <a:buNone/>
               <a:defRPr sz="975" b="0">
                 <a:solidFill>
                   <a:srgbClr val="607587"/>
@@ -17699,6 +18484,7 @@
           <a:lstStyle xmlns:a="http://schemas.openxmlformats.org/drawingml/2006/main"/>
           <a:p xmlns:a="http://schemas.openxmlformats.org/drawingml/2006/main">
             <a:pPr algn="ctr">
+              <a:buNone/>
               <a:defRPr sz="750" b="1">
                 <a:solidFill>
                   <a:srgbClr val="607587"/>
@@ -17798,6 +18584,7 @@
           <a:lstStyle xmlns:a="http://schemas.openxmlformats.org/drawingml/2006/main"/>
           <a:p xmlns:a="http://schemas.openxmlformats.org/drawingml/2006/main">
             <a:pPr algn="ctr">
+              <a:buNone/>
               <a:defRPr sz="1050" b="1">
                 <a:solidFill>
                   <a:srgbClr val="E7772F"/>
@@ -17862,6 +18649,7 @@
           <a:lstStyle xmlns:a="http://schemas.openxmlformats.org/drawingml/2006/main"/>
           <a:p xmlns:a="http://schemas.openxmlformats.org/drawingml/2006/main">
             <a:pPr algn="ctr">
+              <a:buNone/>
               <a:defRPr sz="975" b="0">
                 <a:solidFill>
                   <a:srgbClr val="607587"/>
@@ -17959,6 +18747,7 @@
           <a:lstStyle xmlns:a="http://schemas.openxmlformats.org/drawingml/2006/main"/>
           <a:p xmlns:a="http://schemas.openxmlformats.org/drawingml/2006/main">
             <a:pPr algn="ctr">
+              <a:buNone/>
               <a:defRPr sz="750" b="1">
                 <a:solidFill>
                   <a:srgbClr val="607587"/>
@@ -18023,6 +18812,7 @@
           <a:lstStyle xmlns:a="http://schemas.openxmlformats.org/drawingml/2006/main"/>
           <a:p xmlns:a="http://schemas.openxmlformats.org/drawingml/2006/main">
             <a:pPr algn="l">
+              <a:buNone/>
               <a:defRPr sz="900" b="0">
                 <a:solidFill>
                   <a:srgbClr val="607587"/>
@@ -18087,6 +18877,7 @@
           <a:lstStyle xmlns:a="http://schemas.openxmlformats.org/drawingml/2006/main"/>
           <a:p xmlns:a="http://schemas.openxmlformats.org/drawingml/2006/main">
             <a:pPr algn="l">
+              <a:buNone/>
               <a:defRPr sz="900" b="0">
                 <a:solidFill>
                   <a:srgbClr val="607587"/>
@@ -18186,6 +18977,7 @@
           <a:lstStyle xmlns:a="http://schemas.openxmlformats.org/drawingml/2006/main"/>
           <a:p xmlns:a="http://schemas.openxmlformats.org/drawingml/2006/main">
             <a:pPr algn="l">
+              <a:buNone/>
               <a:defRPr sz="1425" b="1">
                 <a:solidFill>
                   <a:srgbClr val="17855B"/>
@@ -18204,7 +18996,7 @@
                 <a:ea typeface="Aptos"/>
                 <a:cs typeface="Aptos"/>
               </a:rPr>
-              <a:t>Link episode status to WGS and virulence-factor profiles</a:t>
+              <a:t>Link operational episode status to selected genomes and VF profiles</a:t>
             </a:r>
           </a:p>
         </p:txBody>
@@ -18250,6 +19042,7 @@
           <a:lstStyle xmlns:a="http://schemas.openxmlformats.org/drawingml/2006/main"/>
           <a:p xmlns:a="http://schemas.openxmlformats.org/drawingml/2006/main">
             <a:pPr algn="l">
+              <a:buNone/>
               <a:defRPr sz="1050" b="0">
                 <a:solidFill>
                   <a:srgbClr val="607587"/>
@@ -18314,6 +19107,7 @@
           <a:lstStyle xmlns:a="http://schemas.openxmlformats.org/drawingml/2006/main"/>
           <a:p xmlns:a="http://schemas.openxmlformats.org/drawingml/2006/main">
             <a:pPr algn="l">
+              <a:buNone/>
               <a:defRPr sz="825" b="1">
                 <a:solidFill>
                   <a:srgbClr val="607587"/>
@@ -18413,6 +19207,7 @@
           <a:lstStyle xmlns:a="http://schemas.openxmlformats.org/drawingml/2006/main"/>
           <a:p xmlns:a="http://schemas.openxmlformats.org/drawingml/2006/main">
             <a:pPr algn="l">
+              <a:buNone/>
               <a:defRPr sz="1500" b="1">
                 <a:solidFill>
                   <a:srgbClr val="152533"/>
@@ -18477,6 +19272,7 @@
           <a:lstStyle xmlns:a="http://schemas.openxmlformats.org/drawingml/2006/main"/>
           <a:p xmlns:a="http://schemas.openxmlformats.org/drawingml/2006/main">
             <a:pPr algn="l">
+              <a:buNone/>
               <a:defRPr sz="1200" b="1">
                 <a:solidFill>
                   <a:srgbClr val="607587"/>
@@ -18541,6 +19337,7 @@
           <a:lstStyle xmlns:a="http://schemas.openxmlformats.org/drawingml/2006/main"/>
           <a:p xmlns:a="http://schemas.openxmlformats.org/drawingml/2006/main">
             <a:pPr algn="ctr">
+              <a:buNone/>
               <a:defRPr sz="2175" b="1">
                 <a:solidFill>
                   <a:srgbClr val="E7772F"/>
@@ -18640,6 +19437,7 @@
           <a:lstStyle xmlns:a="http://schemas.openxmlformats.org/drawingml/2006/main"/>
           <a:p xmlns:a="http://schemas.openxmlformats.org/drawingml/2006/main">
             <a:pPr algn="l">
+              <a:buNone/>
               <a:defRPr sz="1500" b="1">
                 <a:solidFill>
                   <a:srgbClr val="152533"/>
@@ -18704,6 +19502,7 @@
           <a:lstStyle xmlns:a="http://schemas.openxmlformats.org/drawingml/2006/main"/>
           <a:p xmlns:a="http://schemas.openxmlformats.org/drawingml/2006/main">
             <a:pPr algn="l">
+              <a:buNone/>
               <a:defRPr sz="1200" b="0">
                 <a:solidFill>
                   <a:srgbClr val="607587"/>
@@ -18838,6 +19637,7 @@
           <a:lstStyle xmlns:a="http://schemas.openxmlformats.org/drawingml/2006/main"/>
           <a:p xmlns:a="http://schemas.openxmlformats.org/drawingml/2006/main">
             <a:pPr algn="l">
+              <a:buNone/>
               <a:defRPr sz="825" b="1">
                 <a:solidFill>
                   <a:srgbClr val="E7772F"/>
@@ -18902,6 +19702,7 @@
           <a:lstStyle xmlns:a="http://schemas.openxmlformats.org/drawingml/2006/main"/>
           <a:p xmlns:a="http://schemas.openxmlformats.org/drawingml/2006/main">
             <a:pPr algn="l">
+              <a:buNone/>
               <a:defRPr sz="975" b="0">
                 <a:solidFill>
                   <a:srgbClr val="607587"/>
@@ -19036,6 +19837,7 @@
           <a:lstStyle xmlns:a="http://schemas.openxmlformats.org/drawingml/2006/main"/>
           <a:p xmlns:a="http://schemas.openxmlformats.org/drawingml/2006/main">
             <a:pPr algn="l">
+              <a:buNone/>
               <a:defRPr sz="825" b="1">
                 <a:solidFill>
                   <a:srgbClr val="2678B8"/>
@@ -19100,6 +19902,7 @@
           <a:lstStyle xmlns:a="http://schemas.openxmlformats.org/drawingml/2006/main"/>
           <a:p xmlns:a="http://schemas.openxmlformats.org/drawingml/2006/main">
             <a:pPr algn="l">
+              <a:buNone/>
               <a:defRPr sz="975" b="0">
                 <a:solidFill>
                   <a:srgbClr val="607587"/>
@@ -19256,6 +20059,7 @@
           <a:lstStyle xmlns:a="http://schemas.openxmlformats.org/drawingml/2006/main"/>
           <a:p xmlns:a="http://schemas.openxmlformats.org/drawingml/2006/main">
             <a:pPr algn="l">
+              <a:buNone/>
               <a:defRPr sz="825" b="1">
                 <a:solidFill>
                   <a:srgbClr val="607587"/>
@@ -19320,6 +20124,7 @@
           <a:lstStyle xmlns:a="http://schemas.openxmlformats.org/drawingml/2006/main"/>
           <a:p xmlns:a="http://schemas.openxmlformats.org/drawingml/2006/main">
             <a:pPr algn="l">
+              <a:buNone/>
               <a:defRPr sz="2625" b="1">
                 <a:solidFill>
                   <a:srgbClr val="152533"/>
@@ -19338,7 +20143,7 @@
                 <a:ea typeface="Aptos Display"/>
                 <a:cs typeface="Aptos Display"/>
               </a:rPr>
-              <a:t>The primary UTI denominator is deliberately narrow</a:t>
+              <a:t>The selected operational UTI denominator is deliberately narrow</a:t>
             </a:r>
           </a:p>
         </p:txBody>
@@ -19419,6 +20224,7 @@
           <a:lstStyle xmlns:a="http://schemas.openxmlformats.org/drawingml/2006/main"/>
           <a:p xmlns:a="http://schemas.openxmlformats.org/drawingml/2006/main">
             <a:pPr algn="l">
+              <a:buNone/>
               <a:defRPr sz="1200" b="0">
                 <a:solidFill>
                   <a:srgbClr val="607587"/>
@@ -19518,6 +20324,7 @@
           <a:lstStyle xmlns:a="http://schemas.openxmlformats.org/drawingml/2006/main"/>
           <a:p xmlns:a="http://schemas.openxmlformats.org/drawingml/2006/main">
             <a:pPr algn="l">
+              <a:buNone/>
               <a:defRPr sz="825" b="1">
                 <a:solidFill>
                   <a:srgbClr val="607587"/>
@@ -19617,6 +20424,7 @@
           <a:lstStyle xmlns:a="http://schemas.openxmlformats.org/drawingml/2006/main"/>
           <a:p xmlns:a="http://schemas.openxmlformats.org/drawingml/2006/main">
             <a:pPr algn="l">
+              <a:buNone/>
               <a:defRPr sz="750" b="0">
                 <a:solidFill>
                   <a:srgbClr val="607587"/>
@@ -19635,7 +20443,7 @@
                 <a:ea typeface="Aptos"/>
                 <a:cs typeface="Aptos"/>
               </a:rPr>
-              <a:t>rUTI clinical-to-genomic review  |  current UTI_Status analysis  |  27 May 2026</a:t>
+              <a:t>rUTI clinical-to-genomic review  |  operational UTI phenotype | Longcycler-only analysis  |  14 July 2026</a:t>
             </a:r>
           </a:p>
         </p:txBody>
@@ -19681,6 +20489,7 @@
           <a:lstStyle xmlns:a="http://schemas.openxmlformats.org/drawingml/2006/main"/>
           <a:p xmlns:a="http://schemas.openxmlformats.org/drawingml/2006/main">
             <a:pPr algn="r">
+              <a:buNone/>
               <a:defRPr sz="900" b="1">
                 <a:solidFill>
                   <a:srgbClr val="607587"/>
@@ -19739,18 +20548,18 @@
       </p:sp>
       <p:pic>
         <p:nvPicPr>
-          <p:cNvPr id="13" name=""/>
+          <p:cNvPr id="26" name=""/>
           <p:cNvPicPr>
             <a:picLocks xmlns:a="http://schemas.openxmlformats.org/drawingml/2006/main" noChangeAspect="1"/>
           </p:cNvPicPr>
           <p:nvPr/>
         </p:nvPicPr>
         <p:blipFill>
-          <a:blip xmlns:r="http://schemas.openxmlformats.org/officeDocument/2006/relationships" xmlns:a="http://schemas.openxmlformats.org/drawingml/2006/main" r:embed="R4abd6bf865ad4b3f"/>
+          <a:blip xmlns:r="http://schemas.openxmlformats.org/officeDocument/2006/relationships" xmlns:a="http://schemas.openxmlformats.org/drawingml/2006/main" r:embed="R3a7650fcb489441e"/>
           <a:stretch xmlns:a="http://schemas.openxmlformats.org/drawingml/2006/main"/>
         </p:blipFill>
         <p:spPr>
-          <a:xfrm xmlns:a="http://schemas.openxmlformats.org/drawingml/2006/main">
+          <a:xfrm xmlns:a="http://schemas.openxmlformats.org/drawingml/2006/main" flipH="0" flipV="0">
             <a:off x="781050" y="1834452"/>
             <a:ext cx="10563225" cy="4084447"/>
           </a:xfrm>
@@ -19892,6 +20701,7 @@
           <a:lstStyle xmlns:a="http://schemas.openxmlformats.org/drawingml/2006/main"/>
           <a:p xmlns:a="http://schemas.openxmlformats.org/drawingml/2006/main">
             <a:pPr algn="l">
+              <a:buNone/>
               <a:defRPr sz="825" b="1">
                 <a:solidFill>
                   <a:srgbClr val="607587"/>
@@ -19956,6 +20766,7 @@
           <a:lstStyle xmlns:a="http://schemas.openxmlformats.org/drawingml/2006/main"/>
           <a:p xmlns:a="http://schemas.openxmlformats.org/drawingml/2006/main">
             <a:pPr algn="l">
+              <a:buNone/>
               <a:defRPr sz="2625" b="1">
                 <a:solidFill>
                   <a:srgbClr val="152533"/>
@@ -20055,6 +20866,7 @@
           <a:lstStyle xmlns:a="http://schemas.openxmlformats.org/drawingml/2006/main"/>
           <a:p xmlns:a="http://schemas.openxmlformats.org/drawingml/2006/main">
             <a:pPr algn="l">
+              <a:buNone/>
               <a:defRPr sz="1200" b="0">
                 <a:solidFill>
                   <a:srgbClr val="607587"/>
@@ -20073,7 +20885,7 @@
                 <a:ea typeface="Aptos"/>
                 <a:cs typeface="Aptos"/>
               </a:rPr>
-              <a:t>Counts are shown at their analytical level: assembly-level QC is not an episode denominator.</a:t>
+              <a:t>Every analytical count refers to the selected Longcycler-linked cohort; source attrition is excluded from results.</a:t>
             </a:r>
           </a:p>
         </p:txBody>
@@ -20154,6 +20966,7 @@
           <a:lstStyle xmlns:a="http://schemas.openxmlformats.org/drawingml/2006/main"/>
           <a:p xmlns:a="http://schemas.openxmlformats.org/drawingml/2006/main">
             <a:pPr algn="l">
+              <a:buNone/>
               <a:defRPr sz="825" b="1">
                 <a:solidFill>
                   <a:srgbClr val="607587"/>
@@ -20253,6 +21066,7 @@
           <a:lstStyle xmlns:a="http://schemas.openxmlformats.org/drawingml/2006/main"/>
           <a:p xmlns:a="http://schemas.openxmlformats.org/drawingml/2006/main">
             <a:pPr algn="l">
+              <a:buNone/>
               <a:defRPr sz="750" b="0">
                 <a:solidFill>
                   <a:srgbClr val="607587"/>
@@ -20271,7 +21085,7 @@
                 <a:ea typeface="Aptos"/>
                 <a:cs typeface="Aptos"/>
               </a:rPr>
-              <a:t>rUTI clinical-to-genomic review  |  current UTI_Status analysis  |  27 May 2026</a:t>
+              <a:t>rUTI clinical-to-genomic review  |  operational UTI phenotype | Longcycler-only analysis  |  14 July 2026</a:t>
             </a:r>
           </a:p>
         </p:txBody>
@@ -20317,6 +21131,7 @@
           <a:lstStyle xmlns:a="http://schemas.openxmlformats.org/drawingml/2006/main"/>
           <a:p xmlns:a="http://schemas.openxmlformats.org/drawingml/2006/main">
             <a:pPr algn="r">
+              <a:buNone/>
               <a:defRPr sz="900" b="1">
                 <a:solidFill>
                   <a:srgbClr val="607587"/>
@@ -20381,6 +21196,7 @@
           <a:lstStyle xmlns:a="http://schemas.openxmlformats.org/drawingml/2006/main"/>
           <a:p xmlns:a="http://schemas.openxmlformats.org/drawingml/2006/main">
             <a:pPr algn="l">
+              <a:buNone/>
               <a:defRPr sz="825" b="1">
                 <a:solidFill>
                   <a:srgbClr val="E7772F"/>
@@ -20515,6 +21331,7 @@
           <a:lstStyle xmlns:a="http://schemas.openxmlformats.org/drawingml/2006/main"/>
           <a:p xmlns:a="http://schemas.openxmlformats.org/drawingml/2006/main">
             <a:pPr algn="l">
+              <a:buNone/>
               <a:defRPr sz="975" b="1">
                 <a:solidFill>
                   <a:srgbClr val="E7772F"/>
@@ -20579,6 +21396,7 @@
           <a:lstStyle xmlns:a="http://schemas.openxmlformats.org/drawingml/2006/main"/>
           <a:p xmlns:a="http://schemas.openxmlformats.org/drawingml/2006/main">
             <a:pPr algn="l">
+              <a:buNone/>
               <a:defRPr sz="1050" b="1">
                 <a:solidFill>
                   <a:srgbClr val="152533"/>
@@ -20597,7 +21415,7 @@
                 <a:ea typeface="Aptos"/>
                 <a:cs typeface="Aptos"/>
               </a:rPr>
-              <a:t>Episodes classified</a:t>
+              <a:t>Selected episodes</a:t>
             </a:r>
           </a:p>
         </p:txBody>
@@ -20643,6 +21461,7 @@
           <a:lstStyle xmlns:a="http://schemas.openxmlformats.org/drawingml/2006/main"/>
           <a:p xmlns:a="http://schemas.openxmlformats.org/drawingml/2006/main">
             <a:pPr algn="l">
+              <a:buNone/>
               <a:defRPr sz="1950" b="1">
                 <a:solidFill>
                   <a:srgbClr val="152533"/>
@@ -20661,7 +21480,7 @@
                 <a:ea typeface="Aptos Display"/>
                 <a:cs typeface="Aptos Display"/>
               </a:rPr>
-              <a:t>585</a:t>
+              <a:t>532</a:t>
             </a:r>
           </a:p>
         </p:txBody>
@@ -20707,6 +21526,7 @@
           <a:lstStyle xmlns:a="http://schemas.openxmlformats.org/drawingml/2006/main"/>
           <a:p xmlns:a="http://schemas.openxmlformats.org/drawingml/2006/main">
             <a:pPr algn="l">
+              <a:buNone/>
               <a:defRPr sz="900" b="0">
                 <a:solidFill>
                   <a:srgbClr val="607587"/>
@@ -20725,7 +21545,7 @@
                 <a:ea typeface="Aptos"/>
                 <a:cs typeface="Aptos"/>
               </a:rPr>
-              <a:t>before primary manual exclusions</a:t>
+              <a:t>161 residents</a:t>
             </a:r>
           </a:p>
         </p:txBody>
@@ -20771,6 +21591,7 @@
           <a:lstStyle xmlns:a="http://schemas.openxmlformats.org/drawingml/2006/main"/>
           <a:p xmlns:a="http://schemas.openxmlformats.org/drawingml/2006/main">
             <a:pPr algn="l">
+              <a:buNone/>
               <a:defRPr sz="750" b="0">
                 <a:solidFill>
                   <a:srgbClr val="607587"/>
@@ -20789,7 +21610,7 @@
                 <a:ea typeface="Aptos Mono"/>
                 <a:cs typeface="Aptos Mono"/>
               </a:rPr>
-              <a:t>00a / 00b classification</a:t>
+              <a:t>analysis_cohort_longcycler.csv</a:t>
             </a:r>
           </a:p>
         </p:txBody>
@@ -20905,6 +21726,7 @@
           <a:lstStyle xmlns:a="http://schemas.openxmlformats.org/drawingml/2006/main"/>
           <a:p xmlns:a="http://schemas.openxmlformats.org/drawingml/2006/main">
             <a:pPr algn="l">
+              <a:buNone/>
               <a:defRPr sz="975" b="1">
                 <a:solidFill>
                   <a:srgbClr val="E7772F"/>
@@ -20969,6 +21791,7 @@
           <a:lstStyle xmlns:a="http://schemas.openxmlformats.org/drawingml/2006/main"/>
           <a:p xmlns:a="http://schemas.openxmlformats.org/drawingml/2006/main">
             <a:pPr algn="l">
+              <a:buNone/>
               <a:defRPr sz="1050" b="1">
                 <a:solidFill>
                   <a:srgbClr val="152533"/>
@@ -20987,7 +21810,7 @@
                 <a:ea typeface="Aptos"/>
                 <a:cs typeface="Aptos"/>
               </a:rPr>
-              <a:t>Primary included</a:t>
+              <a:t>Operational phenotype</a:t>
             </a:r>
           </a:p>
         </p:txBody>
@@ -21033,6 +21856,7 @@
           <a:lstStyle xmlns:a="http://schemas.openxmlformats.org/drawingml/2006/main"/>
           <a:p xmlns:a="http://schemas.openxmlformats.org/drawingml/2006/main">
             <a:pPr algn="l">
+              <a:buNone/>
               <a:defRPr sz="1950" b="1">
                 <a:solidFill>
                   <a:srgbClr val="152533"/>
@@ -21051,7 +21875,7 @@
                 <a:ea typeface="Aptos Display"/>
                 <a:cs typeface="Aptos Display"/>
               </a:rPr>
-              <a:t>583</a:t>
+              <a:t>532</a:t>
             </a:r>
           </a:p>
         </p:txBody>
@@ -21097,6 +21921,7 @@
           <a:lstStyle xmlns:a="http://schemas.openxmlformats.org/drawingml/2006/main"/>
           <a:p xmlns:a="http://schemas.openxmlformats.org/drawingml/2006/main">
             <a:pPr algn="l">
+              <a:buNone/>
               <a:defRPr sz="900" b="0">
                 <a:solidFill>
                   <a:srgbClr val="607587"/>
@@ -21115,7 +21940,7 @@
                 <a:ea typeface="Aptos"/>
                 <a:cs typeface="Aptos"/>
               </a:rPr>
-              <a:t>18 UTI  |  565 Not_UTI  |  2 excluded</a:t>
+              <a:t>16 UTI  |  516 Not_UTI</a:t>
             </a:r>
           </a:p>
         </p:txBody>
@@ -21161,6 +21986,7 @@
           <a:lstStyle xmlns:a="http://schemas.openxmlformats.org/drawingml/2006/main"/>
           <a:p xmlns:a="http://schemas.openxmlformats.org/drawingml/2006/main">
             <a:pPr algn="l">
+              <a:buNone/>
               <a:defRPr sz="750" b="0">
                 <a:solidFill>
                   <a:srgbClr val="607587"/>
@@ -21179,7 +22005,7 @@
                 <a:ea typeface="Aptos Mono"/>
                 <a:cs typeface="Aptos Mono"/>
               </a:rPr>
-              <a:t>00b status_map_primary_included</a:t>
+              <a:t>versioned operational rule</a:t>
             </a:r>
           </a:p>
         </p:txBody>
@@ -21225,6 +22051,7 @@
           <a:lstStyle xmlns:a="http://schemas.openxmlformats.org/drawingml/2006/main"/>
           <a:p xmlns:a="http://schemas.openxmlformats.org/drawingml/2006/main">
             <a:pPr algn="l">
+              <a:buNone/>
               <a:defRPr sz="825" b="1">
                 <a:solidFill>
                   <a:srgbClr val="2678B8"/>
@@ -21359,6 +22186,7 @@
           <a:lstStyle xmlns:a="http://schemas.openxmlformats.org/drawingml/2006/main"/>
           <a:p xmlns:a="http://schemas.openxmlformats.org/drawingml/2006/main">
             <a:pPr algn="l">
+              <a:buNone/>
               <a:defRPr sz="975" b="1">
                 <a:solidFill>
                   <a:srgbClr val="2678B8"/>
@@ -21423,6 +22251,7 @@
           <a:lstStyle xmlns:a="http://schemas.openxmlformats.org/drawingml/2006/main"/>
           <a:p xmlns:a="http://schemas.openxmlformats.org/drawingml/2006/main">
             <a:pPr algn="l">
+              <a:buNone/>
               <a:defRPr sz="1050" b="1">
                 <a:solidFill>
                   <a:srgbClr val="152533"/>
@@ -21441,7 +22270,7 @@
                 <a:ea typeface="Aptos"/>
                 <a:cs typeface="Aptos"/>
               </a:rPr>
-              <a:t>Assembly QC records</a:t>
+              <a:t>Selected assemblies</a:t>
             </a:r>
           </a:p>
         </p:txBody>
@@ -21487,6 +22316,7 @@
           <a:lstStyle xmlns:a="http://schemas.openxmlformats.org/drawingml/2006/main"/>
           <a:p xmlns:a="http://schemas.openxmlformats.org/drawingml/2006/main">
             <a:pPr algn="l">
+              <a:buNone/>
               <a:defRPr sz="1950" b="1">
                 <a:solidFill>
                   <a:srgbClr val="152533"/>
@@ -21505,7 +22335,7 @@
                 <a:ea typeface="Aptos Display"/>
                 <a:cs typeface="Aptos Display"/>
               </a:rPr>
-              <a:t>1,291</a:t>
+              <a:t>532</a:t>
             </a:r>
           </a:p>
         </p:txBody>
@@ -21551,6 +22381,7 @@
           <a:lstStyle xmlns:a="http://schemas.openxmlformats.org/drawingml/2006/main"/>
           <a:p xmlns:a="http://schemas.openxmlformats.org/drawingml/2006/main">
             <a:pPr algn="l">
+              <a:buNone/>
               <a:defRPr sz="900" b="0">
                 <a:solidFill>
                   <a:srgbClr val="607587"/>
@@ -21569,7 +22400,7 @@
                 <a:ea typeface="Aptos"/>
                 <a:cs typeface="Aptos"/>
               </a:rPr>
-              <a:t>includes assembler alternatives</a:t>
+              <a:t>QC-passing Longcycler only</a:t>
             </a:r>
           </a:p>
         </p:txBody>
@@ -21615,6 +22446,7 @@
           <a:lstStyle xmlns:a="http://schemas.openxmlformats.org/drawingml/2006/main"/>
           <a:p xmlns:a="http://schemas.openxmlformats.org/drawingml/2006/main">
             <a:pPr algn="l">
+              <a:buNone/>
               <a:defRPr sz="750" b="0">
                 <a:solidFill>
                   <a:srgbClr val="607587"/>
@@ -21633,7 +22465,7 @@
                 <a:ea typeface="Aptos Mono"/>
                 <a:cs typeface="Aptos Mono"/>
               </a:rPr>
-              <a:t>12a_wgs_qc.R</a:t>
+              <a:t>analysis_assembly_manifest.csv</a:t>
             </a:r>
           </a:p>
         </p:txBody>
@@ -21749,6 +22581,7 @@
           <a:lstStyle xmlns:a="http://schemas.openxmlformats.org/drawingml/2006/main"/>
           <a:p xmlns:a="http://schemas.openxmlformats.org/drawingml/2006/main">
             <a:pPr algn="l">
+              <a:buNone/>
               <a:defRPr sz="975" b="1">
                 <a:solidFill>
                   <a:srgbClr val="2678B8"/>
@@ -21813,6 +22646,7 @@
           <a:lstStyle xmlns:a="http://schemas.openxmlformats.org/drawingml/2006/main"/>
           <a:p xmlns:a="http://schemas.openxmlformats.org/drawingml/2006/main">
             <a:pPr algn="l">
+              <a:buNone/>
               <a:defRPr sz="1050" b="1">
                 <a:solidFill>
                   <a:srgbClr val="152533"/>
@@ -21831,7 +22665,7 @@
                 <a:ea typeface="Aptos"/>
                 <a:cs typeface="Aptos"/>
               </a:rPr>
-              <a:t>Canonical episodes</a:t>
+              <a:t>Selected genomes</a:t>
             </a:r>
           </a:p>
         </p:txBody>
@@ -21877,6 +22711,7 @@
           <a:lstStyle xmlns:a="http://schemas.openxmlformats.org/drawingml/2006/main"/>
           <a:p xmlns:a="http://schemas.openxmlformats.org/drawingml/2006/main">
             <a:pPr algn="l">
+              <a:buNone/>
               <a:defRPr sz="1950" b="1">
                 <a:solidFill>
                   <a:srgbClr val="152533"/>
@@ -21895,7 +22730,7 @@
                 <a:ea typeface="Aptos Display"/>
                 <a:cs typeface="Aptos Display"/>
               </a:rPr>
-              <a:t>556</a:t>
+              <a:t>532</a:t>
             </a:r>
           </a:p>
         </p:txBody>
@@ -21941,6 +22776,7 @@
           <a:lstStyle xmlns:a="http://schemas.openxmlformats.org/drawingml/2006/main"/>
           <a:p xmlns:a="http://schemas.openxmlformats.org/drawingml/2006/main">
             <a:pPr algn="l">
+              <a:buNone/>
               <a:defRPr sz="900" b="0">
                 <a:solidFill>
                   <a:srgbClr val="607587"/>
@@ -21959,7 +22795,7 @@
                 <a:ea typeface="Aptos"/>
                 <a:cs typeface="Aptos"/>
               </a:rPr>
-              <a:t>one selected assembly per episode</a:t>
+              <a:t>one genome per selected episode</a:t>
             </a:r>
           </a:p>
         </p:txBody>
@@ -22005,6 +22841,7 @@
           <a:lstStyle xmlns:a="http://schemas.openxmlformats.org/drawingml/2006/main"/>
           <a:p xmlns:a="http://schemas.openxmlformats.org/drawingml/2006/main">
             <a:pPr algn="l">
+              <a:buNone/>
               <a:defRPr sz="750" b="0">
                 <a:solidFill>
                   <a:srgbClr val="607587"/>
@@ -22104,6 +22941,7 @@
           <a:lstStyle xmlns:a="http://schemas.openxmlformats.org/drawingml/2006/main"/>
           <a:p xmlns:a="http://schemas.openxmlformats.org/drawingml/2006/main">
             <a:pPr algn="l">
+              <a:buNone/>
               <a:defRPr sz="825" b="1">
                 <a:solidFill>
                   <a:srgbClr val="17855B"/>
@@ -22238,6 +23076,7 @@
           <a:lstStyle xmlns:a="http://schemas.openxmlformats.org/drawingml/2006/main"/>
           <a:p xmlns:a="http://schemas.openxmlformats.org/drawingml/2006/main">
             <a:pPr algn="l">
+              <a:buNone/>
               <a:defRPr sz="975" b="1">
                 <a:solidFill>
                   <a:srgbClr val="17855B"/>
@@ -22302,6 +23141,7 @@
           <a:lstStyle xmlns:a="http://schemas.openxmlformats.org/drawingml/2006/main"/>
           <a:p xmlns:a="http://schemas.openxmlformats.org/drawingml/2006/main">
             <a:pPr algn="l">
+              <a:buNone/>
               <a:defRPr sz="1050" b="1">
                 <a:solidFill>
                   <a:srgbClr val="152533"/>
@@ -22320,7 +23160,7 @@
                 <a:ea typeface="Aptos"/>
                 <a:cs typeface="Aptos"/>
               </a:rPr>
-              <a:t>VF presence/absence</a:t>
+              <a:t>VF feature rows</a:t>
             </a:r>
           </a:p>
         </p:txBody>
@@ -22366,6 +23206,7 @@
           <a:lstStyle xmlns:a="http://schemas.openxmlformats.org/drawingml/2006/main"/>
           <a:p xmlns:a="http://schemas.openxmlformats.org/drawingml/2006/main">
             <a:pPr algn="l">
+              <a:buNone/>
               <a:defRPr sz="1950" b="1">
                 <a:solidFill>
                   <a:srgbClr val="152533"/>
@@ -22384,7 +23225,7 @@
                 <a:ea typeface="Aptos Display"/>
                 <a:cs typeface="Aptos Display"/>
               </a:rPr>
-              <a:t>556</a:t>
+              <a:t>532</a:t>
             </a:r>
           </a:p>
         </p:txBody>
@@ -22430,6 +23271,7 @@
           <a:lstStyle xmlns:a="http://schemas.openxmlformats.org/drawingml/2006/main"/>
           <a:p xmlns:a="http://schemas.openxmlformats.org/drawingml/2006/main">
             <a:pPr algn="l">
+              <a:buNone/>
               <a:defRPr sz="900" b="0">
                 <a:solidFill>
                   <a:srgbClr val="607587"/>
@@ -22448,7 +23290,7 @@
                 <a:ea typeface="Aptos"/>
                 <a:cs typeface="Aptos"/>
               </a:rPr>
-              <a:t>episode-level VF rows</a:t>
+              <a:t>selected episode-level rows</a:t>
             </a:r>
           </a:p>
         </p:txBody>
@@ -22494,6 +23336,7 @@
           <a:lstStyle xmlns:a="http://schemas.openxmlformats.org/drawingml/2006/main"/>
           <a:p xmlns:a="http://schemas.openxmlformats.org/drawingml/2006/main">
             <a:pPr algn="l">
+              <a:buNone/>
               <a:defRPr sz="750" b="0">
                 <a:solidFill>
                   <a:srgbClr val="607587"/>
@@ -22628,6 +23471,7 @@
           <a:lstStyle xmlns:a="http://schemas.openxmlformats.org/drawingml/2006/main"/>
           <a:p xmlns:a="http://schemas.openxmlformats.org/drawingml/2006/main">
             <a:pPr algn="l">
+              <a:buNone/>
               <a:defRPr sz="975" b="1">
                 <a:solidFill>
                   <a:srgbClr val="17855B"/>
@@ -22692,6 +23536,7 @@
           <a:lstStyle xmlns:a="http://schemas.openxmlformats.org/drawingml/2006/main"/>
           <a:p xmlns:a="http://schemas.openxmlformats.org/drawingml/2006/main">
             <a:pPr algn="l">
+              <a:buNone/>
               <a:defRPr sz="1050" b="1">
                 <a:solidFill>
                   <a:srgbClr val="152533"/>
@@ -22710,7 +23555,7 @@
                 <a:ea typeface="Aptos"/>
                 <a:cs typeface="Aptos"/>
               </a:rPr>
-              <a:t>Model-ready</a:t>
+              <a:t>Direct-pair ready</a:t>
             </a:r>
           </a:p>
         </p:txBody>
@@ -22756,6 +23601,7 @@
           <a:lstStyle xmlns:a="http://schemas.openxmlformats.org/drawingml/2006/main"/>
           <a:p xmlns:a="http://schemas.openxmlformats.org/drawingml/2006/main">
             <a:pPr algn="l">
+              <a:buNone/>
               <a:defRPr sz="1950" b="1">
                 <a:solidFill>
                   <a:srgbClr val="152533"/>
@@ -22774,7 +23620,7 @@
                 <a:ea typeface="Aptos Display"/>
                 <a:cs typeface="Aptos Display"/>
               </a:rPr>
-              <a:t>556</a:t>
+              <a:t>532</a:t>
             </a:r>
           </a:p>
         </p:txBody>
@@ -22820,6 +23666,7 @@
           <a:lstStyle xmlns:a="http://schemas.openxmlformats.org/drawingml/2006/main"/>
           <a:p xmlns:a="http://schemas.openxmlformats.org/drawingml/2006/main">
             <a:pPr algn="l">
+              <a:buNone/>
               <a:defRPr sz="900" b="0">
                 <a:solidFill>
                   <a:srgbClr val="607587"/>
@@ -22838,11 +23685,12 @@
                 <a:ea typeface="Aptos"/>
                 <a:cs typeface="Aptos"/>
               </a:rPr>
-              <a:t>17 UTI  |  539 Not_UTI</a:t>
+              <a:t>893 within-resident pairs</a:t>
             </a:r>
           </a:p>
           <a:p xmlns:a="http://schemas.openxmlformats.org/drawingml/2006/main">
             <a:pPr algn="l">
+              <a:buNone/>
               <a:defRPr sz="900" b="0">
                 <a:solidFill>
                   <a:srgbClr val="607587"/>
@@ -22861,7 +23709,7 @@
                 <a:ea typeface="Aptos"/>
                 <a:cs typeface="Aptos"/>
               </a:rPr>
-              <a:t>27 clinical episodes lack VF-ready evidence</a:t>
+              <a:t>371 adjacent pairs</a:t>
             </a:r>
           </a:p>
         </p:txBody>
@@ -22907,6 +23755,7 @@
           <a:lstStyle xmlns:a="http://schemas.openxmlformats.org/drawingml/2006/main"/>
           <a:p xmlns:a="http://schemas.openxmlformats.org/drawingml/2006/main">
             <a:pPr algn="l">
+              <a:buNone/>
               <a:defRPr sz="750" b="0">
                 <a:solidFill>
                   <a:srgbClr val="607587"/>
@@ -22925,7 +23774,7 @@
                 <a:ea typeface="Aptos Mono"/>
                 <a:cs typeface="Aptos Mono"/>
               </a:rPr>
-              <a:t>22_vf_build_analysis_dataset.R</a:t>
+              <a:t>pairwise_metrics.csv</a:t>
             </a:r>
           </a:p>
         </p:txBody>
@@ -23041,6 +23890,7 @@
           <a:lstStyle xmlns:a="http://schemas.openxmlformats.org/drawingml/2006/main"/>
           <a:p xmlns:a="http://schemas.openxmlformats.org/drawingml/2006/main">
             <a:pPr algn="l">
+              <a:buNone/>
               <a:defRPr sz="975" b="1">
                 <a:solidFill>
                   <a:srgbClr val="17855B"/>
@@ -23105,6 +23955,7 @@
           <a:lstStyle xmlns:a="http://schemas.openxmlformats.org/drawingml/2006/main"/>
           <a:p xmlns:a="http://schemas.openxmlformats.org/drawingml/2006/main">
             <a:pPr algn="l">
+              <a:buNone/>
               <a:defRPr sz="1050" b="1">
                 <a:solidFill>
                   <a:srgbClr val="152533"/>
@@ -23123,7 +23974,7 @@
                 <a:ea typeface="Aptos"/>
                 <a:cs typeface="Aptos"/>
               </a:rPr>
-              <a:t>VF feature space</a:t>
+              <a:t>VFDB feature space</a:t>
             </a:r>
           </a:p>
         </p:txBody>
@@ -23169,6 +24020,7 @@
           <a:lstStyle xmlns:a="http://schemas.openxmlformats.org/drawingml/2006/main"/>
           <a:p xmlns:a="http://schemas.openxmlformats.org/drawingml/2006/main">
             <a:pPr algn="l">
+              <a:buNone/>
               <a:defRPr sz="1950" b="1">
                 <a:solidFill>
                   <a:srgbClr val="152533"/>
@@ -23187,7 +24039,7 @@
                 <a:ea typeface="Aptos Display"/>
                 <a:cs typeface="Aptos Display"/>
               </a:rPr>
-              <a:t>227 -&gt; 32</a:t>
+              <a:t>227</a:t>
             </a:r>
           </a:p>
         </p:txBody>
@@ -23233,6 +24085,7 @@
           <a:lstStyle xmlns:a="http://schemas.openxmlformats.org/drawingml/2006/main"/>
           <a:p xmlns:a="http://schemas.openxmlformats.org/drawingml/2006/main">
             <a:pPr algn="l">
+              <a:buNone/>
               <a:defRPr sz="900" b="0">
                 <a:solidFill>
                   <a:srgbClr val="607587"/>
@@ -23251,11 +24104,12 @@
                 <a:ea typeface="Aptos"/>
                 <a:cs typeface="Aptos"/>
               </a:rPr>
-              <a:t>genes -&gt; modules</a:t>
+              <a:t>binary VF features</a:t>
             </a:r>
           </a:p>
           <a:p xmlns:a="http://schemas.openxmlformats.org/drawingml/2006/main">
             <a:pPr algn="l">
+              <a:buNone/>
               <a:defRPr sz="900" b="0">
                 <a:solidFill>
                   <a:srgbClr val="607587"/>
@@ -23274,7 +24128,7 @@
                 <a:ea typeface="Aptos"/>
                 <a:cs typeface="Aptos"/>
               </a:rPr>
-              <a:t>18 UPEC-candidate modules</a:t>
+              <a:t>module summaries exploratory</a:t>
             </a:r>
           </a:p>
         </p:txBody>
@@ -23320,6 +24174,7 @@
           <a:lstStyle xmlns:a="http://schemas.openxmlformats.org/drawingml/2006/main"/>
           <a:p xmlns:a="http://schemas.openxmlformats.org/drawingml/2006/main">
             <a:pPr algn="l">
+              <a:buNone/>
               <a:defRPr sz="750" b="0">
                 <a:solidFill>
                   <a:srgbClr val="607587"/>
@@ -23338,7 +24193,7 @@
                 <a:ea typeface="Aptos Mono"/>
                 <a:cs typeface="Aptos Mono"/>
               </a:rPr>
-              <a:t>26_vf_define_gene_modules.R</a:t>
+              <a:t>current final-run VF outputs</a:t>
             </a:r>
           </a:p>
         </p:txBody>
@@ -23454,6 +24309,7 @@
           <a:lstStyle xmlns:a="http://schemas.openxmlformats.org/drawingml/2006/main"/>
           <a:p xmlns:a="http://schemas.openxmlformats.org/drawingml/2006/main">
             <a:pPr algn="l">
+              <a:buNone/>
               <a:defRPr sz="975" b="1">
                 <a:solidFill>
                   <a:srgbClr val="17855B"/>
@@ -23518,6 +24374,7 @@
           <a:lstStyle xmlns:a="http://schemas.openxmlformats.org/drawingml/2006/main"/>
           <a:p xmlns:a="http://schemas.openxmlformats.org/drawingml/2006/main">
             <a:pPr algn="l">
+              <a:buNone/>
               <a:defRPr sz="1050" b="1">
                 <a:solidFill>
                   <a:srgbClr val="152533"/>
@@ -23582,6 +24439,7 @@
           <a:lstStyle xmlns:a="http://schemas.openxmlformats.org/drawingml/2006/main"/>
           <a:p xmlns:a="http://schemas.openxmlformats.org/drawingml/2006/main">
             <a:pPr algn="l">
+              <a:buNone/>
               <a:defRPr sz="1950" b="1">
                 <a:solidFill>
                   <a:srgbClr val="152533"/>
@@ -23600,7 +24458,7 @@
                 <a:ea typeface="Aptos Display"/>
                 <a:cs typeface="Aptos Display"/>
               </a:rPr>
-              <a:t>11 -&gt; 10</a:t>
+              <a:t>9 -&gt; 9</a:t>
             </a:r>
           </a:p>
         </p:txBody>
@@ -23646,6 +24504,7 @@
           <a:lstStyle xmlns:a="http://schemas.openxmlformats.org/drawingml/2006/main"/>
           <a:p xmlns:a="http://schemas.openxmlformats.org/drawingml/2006/main">
             <a:pPr algn="l">
+              <a:buNone/>
               <a:defRPr sz="900" b="0">
                 <a:solidFill>
                   <a:srgbClr val="607587"/>
@@ -23664,11 +24523,12 @@
                 <a:ea typeface="Aptos"/>
                 <a:cs typeface="Aptos"/>
               </a:rPr>
-              <a:t>clinical transitions -&gt; WGS/VF-linked</a:t>
+              <a:t>operational transitions -&gt; genomically linked</a:t>
             </a:r>
           </a:p>
           <a:p xmlns:a="http://schemas.openxmlformats.org/drawingml/2006/main">
             <a:pPr algn="l">
+              <a:buNone/>
               <a:defRPr sz="900" b="0">
                 <a:solidFill>
                   <a:srgbClr val="607587"/>
@@ -23687,7 +24547,7 @@
                 <a:ea typeface="Aptos"/>
                 <a:cs typeface="Aptos"/>
               </a:rPr>
-              <a:t>1 endpoint missing</a:t>
+              <a:t>0 endpoints missing</a:t>
             </a:r>
           </a:p>
         </p:txBody>
@@ -23733,6 +24593,7 @@
           <a:lstStyle xmlns:a="http://schemas.openxmlformats.org/drawingml/2006/main"/>
           <a:p xmlns:a="http://schemas.openxmlformats.org/drawingml/2006/main">
             <a:pPr algn="l">
+              <a:buNone/>
               <a:defRPr sz="750" b="0">
                 <a:solidFill>
                   <a:srgbClr val="607587"/>
@@ -23889,6 +24750,7 @@
           <a:lstStyle xmlns:a="http://schemas.openxmlformats.org/drawingml/2006/main"/>
           <a:p xmlns:a="http://schemas.openxmlformats.org/drawingml/2006/main">
             <a:pPr algn="l">
+              <a:buNone/>
               <a:defRPr sz="825" b="1">
                 <a:solidFill>
                   <a:srgbClr val="607587"/>
@@ -23953,6 +24815,7 @@
           <a:lstStyle xmlns:a="http://schemas.openxmlformats.org/drawingml/2006/main"/>
           <a:p xmlns:a="http://schemas.openxmlformats.org/drawingml/2006/main">
             <a:pPr algn="l">
+              <a:buNone/>
               <a:defRPr sz="2625" b="1">
                 <a:solidFill>
                   <a:srgbClr val="152533"/>
@@ -24052,6 +24915,7 @@
           <a:lstStyle xmlns:a="http://schemas.openxmlformats.org/drawingml/2006/main"/>
           <a:p xmlns:a="http://schemas.openxmlformats.org/drawingml/2006/main">
             <a:pPr algn="l">
+              <a:buNone/>
               <a:defRPr sz="1200" b="0">
                 <a:solidFill>
                   <a:srgbClr val="607587"/>
@@ -24151,6 +25015,7 @@
           <a:lstStyle xmlns:a="http://schemas.openxmlformats.org/drawingml/2006/main"/>
           <a:p xmlns:a="http://schemas.openxmlformats.org/drawingml/2006/main">
             <a:pPr algn="l">
+              <a:buNone/>
               <a:defRPr sz="825" b="1">
                 <a:solidFill>
                   <a:srgbClr val="607587"/>
@@ -24250,6 +25115,7 @@
           <a:lstStyle xmlns:a="http://schemas.openxmlformats.org/drawingml/2006/main"/>
           <a:p xmlns:a="http://schemas.openxmlformats.org/drawingml/2006/main">
             <a:pPr algn="l">
+              <a:buNone/>
               <a:defRPr sz="750" b="0">
                 <a:solidFill>
                   <a:srgbClr val="607587"/>
@@ -24268,7 +25134,7 @@
                 <a:ea typeface="Aptos"/>
                 <a:cs typeface="Aptos"/>
               </a:rPr>
-              <a:t>rUTI clinical-to-genomic review  |  current UTI_Status analysis  |  27 May 2026</a:t>
+              <a:t>rUTI clinical-to-genomic review  |  operational UTI phenotype | Longcycler-only analysis  |  14 July 2026</a:t>
             </a:r>
           </a:p>
         </p:txBody>
@@ -24314,6 +25180,7 @@
           <a:lstStyle xmlns:a="http://schemas.openxmlformats.org/drawingml/2006/main"/>
           <a:p xmlns:a="http://schemas.openxmlformats.org/drawingml/2006/main">
             <a:pPr algn="r">
+              <a:buNone/>
               <a:defRPr sz="900" b="1">
                 <a:solidFill>
                   <a:srgbClr val="607587"/>
@@ -24378,6 +25245,7 @@
           <a:lstStyle xmlns:a="http://schemas.openxmlformats.org/drawingml/2006/main"/>
           <a:p xmlns:a="http://schemas.openxmlformats.org/drawingml/2006/main">
             <a:pPr algn="l">
+              <a:buNone/>
               <a:defRPr sz="825" b="1">
                 <a:solidFill>
                   <a:srgbClr val="607587"/>
@@ -24477,6 +25345,7 @@
           <a:lstStyle xmlns:a="http://schemas.openxmlformats.org/drawingml/2006/main"/>
           <a:p xmlns:a="http://schemas.openxmlformats.org/drawingml/2006/main">
             <a:pPr algn="l">
+              <a:buNone/>
               <a:defRPr sz="3150" b="1">
                 <a:solidFill>
                   <a:srgbClr val="2678B8"/>
@@ -24495,7 +25364,7 @@
                 <a:ea typeface="Aptos Display"/>
                 <a:cs typeface="Aptos Display"/>
               </a:rPr>
-              <a:t>556</a:t>
+              <a:t>532</a:t>
             </a:r>
           </a:p>
         </p:txBody>
@@ -24541,6 +25410,7 @@
           <a:lstStyle xmlns:a="http://schemas.openxmlformats.org/drawingml/2006/main"/>
           <a:p xmlns:a="http://schemas.openxmlformats.org/drawingml/2006/main">
             <a:pPr algn="l">
+              <a:buNone/>
               <a:defRPr sz="1500" b="1">
                 <a:solidFill>
                   <a:srgbClr val="152533"/>
@@ -24559,11 +25429,12 @@
                 <a:ea typeface="Aptos"/>
                 <a:cs typeface="Aptos"/>
               </a:rPr>
-              <a:t>VF/WGS-linked</a:t>
+              <a:t>selected Longcycler-linked</a:t>
             </a:r>
           </a:p>
           <a:p xmlns:a="http://schemas.openxmlformats.org/drawingml/2006/main">
             <a:pPr algn="l">
+              <a:buNone/>
               <a:defRPr sz="1500" b="1">
                 <a:solidFill>
                   <a:srgbClr val="152533"/>
@@ -24628,6 +25499,7 @@
           <a:lstStyle xmlns:a="http://schemas.openxmlformats.org/drawingml/2006/main"/>
           <a:p xmlns:a="http://schemas.openxmlformats.org/drawingml/2006/main">
             <a:pPr algn="l">
+              <a:buNone/>
               <a:defRPr sz="900" b="0">
                 <a:solidFill>
                   <a:srgbClr val="607587"/>
@@ -24692,6 +25564,7 @@
           <a:lstStyle xmlns:a="http://schemas.openxmlformats.org/drawingml/2006/main"/>
           <a:p xmlns:a="http://schemas.openxmlformats.org/drawingml/2006/main">
             <a:pPr algn="l">
+              <a:buNone/>
               <a:defRPr sz="825" b="1">
                 <a:solidFill>
                   <a:srgbClr val="607587"/>
@@ -24791,6 +25664,7 @@
           <a:lstStyle xmlns:a="http://schemas.openxmlformats.org/drawingml/2006/main"/>
           <a:p xmlns:a="http://schemas.openxmlformats.org/drawingml/2006/main">
             <a:pPr algn="l">
+              <a:buNone/>
               <a:defRPr sz="1875" b="1">
                 <a:solidFill>
                   <a:srgbClr val="17855B"/>
@@ -24809,7 +25683,7 @@
                 <a:ea typeface="Aptos"/>
                 <a:cs typeface="Aptos"/>
               </a:rPr>
-              <a:t>227 VF genes</a:t>
+              <a:t>227 VF features</a:t>
             </a:r>
           </a:p>
         </p:txBody>
@@ -24855,6 +25729,7 @@
           <a:lstStyle xmlns:a="http://schemas.openxmlformats.org/drawingml/2006/main"/>
           <a:p xmlns:a="http://schemas.openxmlformats.org/drawingml/2006/main">
             <a:pPr algn="l">
+              <a:buNone/>
               <a:defRPr sz="900" b="0">
                 <a:solidFill>
                   <a:srgbClr val="607587"/>
@@ -24954,6 +25829,7 @@
           <a:lstStyle xmlns:a="http://schemas.openxmlformats.org/drawingml/2006/main"/>
           <a:p xmlns:a="http://schemas.openxmlformats.org/drawingml/2006/main">
             <a:pPr algn="l">
+              <a:buNone/>
               <a:defRPr sz="1875" b="1">
                 <a:solidFill>
                   <a:srgbClr val="17855B"/>
@@ -24972,7 +25848,7 @@
                 <a:ea typeface="Aptos"/>
                 <a:cs typeface="Aptos"/>
               </a:rPr>
-              <a:t>32 modules</a:t>
+              <a:t>VF modules</a:t>
             </a:r>
           </a:p>
         </p:txBody>
@@ -25018,6 +25894,7 @@
           <a:lstStyle xmlns:a="http://schemas.openxmlformats.org/drawingml/2006/main"/>
           <a:p xmlns:a="http://schemas.openxmlformats.org/drawingml/2006/main">
             <a:pPr algn="l">
+              <a:buNone/>
               <a:defRPr sz="900" b="0">
                 <a:solidFill>
                   <a:srgbClr val="607587"/>
@@ -25036,7 +25913,7 @@
                 <a:ea typeface="Aptos"/>
                 <a:cs typeface="Aptos"/>
               </a:rPr>
-              <a:t>18 UPEC-candidate systems</a:t>
+              <a:t>exploratory summaries</a:t>
             </a:r>
           </a:p>
         </p:txBody>
@@ -25082,6 +25959,7 @@
           <a:lstStyle xmlns:a="http://schemas.openxmlformats.org/drawingml/2006/main"/>
           <a:p xmlns:a="http://schemas.openxmlformats.org/drawingml/2006/main">
             <a:pPr algn="l">
+              <a:buNone/>
               <a:defRPr sz="825" b="1">
                 <a:solidFill>
                   <a:srgbClr val="607587"/>
@@ -25216,6 +26094,7 @@
           <a:lstStyle xmlns:a="http://schemas.openxmlformats.org/drawingml/2006/main"/>
           <a:p xmlns:a="http://schemas.openxmlformats.org/drawingml/2006/main">
             <a:pPr algn="l">
+              <a:buNone/>
               <a:defRPr sz="1575" b="1">
                 <a:solidFill>
                   <a:srgbClr val="152533"/>
@@ -25280,6 +26159,7 @@
           <a:lstStyle xmlns:a="http://schemas.openxmlformats.org/drawingml/2006/main"/>
           <a:p xmlns:a="http://schemas.openxmlformats.org/drawingml/2006/main">
             <a:pPr algn="l">
+              <a:buNone/>
               <a:defRPr sz="1275" b="0">
                 <a:solidFill>
                   <a:srgbClr val="152533"/>
@@ -25344,6 +26224,7 @@
           <a:lstStyle xmlns:a="http://schemas.openxmlformats.org/drawingml/2006/main"/>
           <a:p xmlns:a="http://schemas.openxmlformats.org/drawingml/2006/main">
             <a:pPr algn="l">
+              <a:buNone/>
               <a:defRPr sz="825" b="1">
                 <a:solidFill>
                   <a:srgbClr val="607587"/>
@@ -25478,6 +26359,7 @@
           <a:lstStyle xmlns:a="http://schemas.openxmlformats.org/drawingml/2006/main"/>
           <a:p xmlns:a="http://schemas.openxmlformats.org/drawingml/2006/main">
             <a:pPr algn="l">
+              <a:buNone/>
               <a:defRPr sz="1575" b="1">
                 <a:solidFill>
                   <a:srgbClr val="152533"/>
@@ -25542,6 +26424,7 @@
           <a:lstStyle xmlns:a="http://schemas.openxmlformats.org/drawingml/2006/main"/>
           <a:p xmlns:a="http://schemas.openxmlformats.org/drawingml/2006/main">
             <a:pPr algn="l">
+              <a:buNone/>
               <a:defRPr sz="1275" b="0">
                 <a:solidFill>
                   <a:srgbClr val="152533"/>
@@ -25606,6 +26489,7 @@
           <a:lstStyle xmlns:a="http://schemas.openxmlformats.org/drawingml/2006/main"/>
           <a:p xmlns:a="http://schemas.openxmlformats.org/drawingml/2006/main">
             <a:pPr algn="l">
+              <a:buNone/>
               <a:defRPr sz="825" b="1">
                 <a:solidFill>
                   <a:srgbClr val="607587"/>
@@ -25740,6 +26624,7 @@
           <a:lstStyle xmlns:a="http://schemas.openxmlformats.org/drawingml/2006/main"/>
           <a:p xmlns:a="http://schemas.openxmlformats.org/drawingml/2006/main">
             <a:pPr algn="l">
+              <a:buNone/>
               <a:defRPr sz="1575" b="1">
                 <a:solidFill>
                   <a:srgbClr val="152533"/>
@@ -25804,6 +26689,7 @@
           <a:lstStyle xmlns:a="http://schemas.openxmlformats.org/drawingml/2006/main"/>
           <a:p xmlns:a="http://schemas.openxmlformats.org/drawingml/2006/main">
             <a:pPr algn="l">
+              <a:buNone/>
               <a:defRPr sz="1275" b="0">
                 <a:solidFill>
                   <a:srgbClr val="152533"/>
@@ -25868,6 +26754,7 @@
           <a:lstStyle xmlns:a="http://schemas.openxmlformats.org/drawingml/2006/main"/>
           <a:p xmlns:a="http://schemas.openxmlformats.org/drawingml/2006/main">
             <a:pPr algn="l">
+              <a:buNone/>
               <a:defRPr sz="825" b="1">
                 <a:solidFill>
                   <a:srgbClr val="607587"/>
@@ -25967,6 +26854,7 @@
           <a:lstStyle xmlns:a="http://schemas.openxmlformats.org/drawingml/2006/main"/>
           <a:p xmlns:a="http://schemas.openxmlformats.org/drawingml/2006/main">
             <a:pPr algn="l">
+              <a:buNone/>
               <a:defRPr sz="1275" b="1">
                 <a:solidFill>
                   <a:srgbClr val="607587"/>
@@ -26031,6 +26919,7 @@
           <a:lstStyle xmlns:a="http://schemas.openxmlformats.org/drawingml/2006/main"/>
           <a:p xmlns:a="http://schemas.openxmlformats.org/drawingml/2006/main">
             <a:pPr algn="l">
+              <a:buNone/>
               <a:defRPr sz="1650" b="1">
                 <a:solidFill>
                   <a:srgbClr val="152533"/>
@@ -26187,6 +27076,7 @@
           <a:lstStyle xmlns:a="http://schemas.openxmlformats.org/drawingml/2006/main"/>
           <a:p xmlns:a="http://schemas.openxmlformats.org/drawingml/2006/main">
             <a:pPr algn="l">
+              <a:buNone/>
               <a:defRPr sz="825" b="1">
                 <a:solidFill>
                   <a:srgbClr val="607587"/>
@@ -26251,6 +27141,7 @@
           <a:lstStyle xmlns:a="http://schemas.openxmlformats.org/drawingml/2006/main"/>
           <a:p xmlns:a="http://schemas.openxmlformats.org/drawingml/2006/main">
             <a:pPr algn="l">
+              <a:buNone/>
               <a:defRPr sz="2625" b="1">
                 <a:solidFill>
                   <a:srgbClr val="152533"/>
@@ -26269,7 +27160,7 @@
                 <a:ea typeface="Aptos Display"/>
                 <a:cs typeface="Aptos Display"/>
               </a:rPr>
-              <a:t>Observed VF burden overlaps strongly across status groups</a:t>
+              <a:t>Observed VF burden is descriptive across operational status groups</a:t>
             </a:r>
           </a:p>
         </p:txBody>
@@ -26350,6 +27241,7 @@
           <a:lstStyle xmlns:a="http://schemas.openxmlformats.org/drawingml/2006/main"/>
           <a:p xmlns:a="http://schemas.openxmlformats.org/drawingml/2006/main">
             <a:pPr algn="l">
+              <a:buNone/>
               <a:defRPr sz="1200" b="0">
                 <a:solidFill>
                   <a:srgbClr val="607587"/>
@@ -26368,7 +27260,7 @@
                 <a:ea typeface="Aptos"/>
                 <a:cs typeface="Aptos"/>
               </a:rPr>
-              <a:t>The UTI group is sparse (n=17), so this is descriptive distributional evidence rather than a causal test.</a:t>
+              <a:t>The operational UTI group is sparse (n=16), so this remains descriptive rather than causal.</a:t>
             </a:r>
           </a:p>
         </p:txBody>
@@ -26449,6 +27341,7 @@
           <a:lstStyle xmlns:a="http://schemas.openxmlformats.org/drawingml/2006/main"/>
           <a:p xmlns:a="http://schemas.openxmlformats.org/drawingml/2006/main">
             <a:pPr algn="l">
+              <a:buNone/>
               <a:defRPr sz="825" b="1">
                 <a:solidFill>
                   <a:srgbClr val="607587"/>
@@ -26548,6 +27441,7 @@
           <a:lstStyle xmlns:a="http://schemas.openxmlformats.org/drawingml/2006/main"/>
           <a:p xmlns:a="http://schemas.openxmlformats.org/drawingml/2006/main">
             <a:pPr algn="l">
+              <a:buNone/>
               <a:defRPr sz="750" b="0">
                 <a:solidFill>
                   <a:srgbClr val="607587"/>
@@ -26566,7 +27460,7 @@
                 <a:ea typeface="Aptos"/>
                 <a:cs typeface="Aptos"/>
               </a:rPr>
-              <a:t>rUTI clinical-to-genomic review  |  current UTI_Status analysis  |  27 May 2026</a:t>
+              <a:t>rUTI clinical-to-genomic review  |  operational UTI phenotype | Longcycler-only analysis  |  14 July 2026</a:t>
             </a:r>
           </a:p>
         </p:txBody>
@@ -26612,6 +27506,7 @@
           <a:lstStyle xmlns:a="http://schemas.openxmlformats.org/drawingml/2006/main"/>
           <a:p xmlns:a="http://schemas.openxmlformats.org/drawingml/2006/main">
             <a:pPr algn="r">
+              <a:buNone/>
               <a:defRPr sz="900" b="1">
                 <a:solidFill>
                   <a:srgbClr val="607587"/>
@@ -26670,18 +27565,18 @@
       </p:sp>
       <p:pic>
         <p:nvPicPr>
-          <p:cNvPr id="13" name=""/>
+          <p:cNvPr id="26" name=""/>
           <p:cNvPicPr>
             <a:picLocks xmlns:a="http://schemas.openxmlformats.org/drawingml/2006/main" noChangeAspect="1"/>
           </p:cNvPicPr>
           <p:nvPr/>
         </p:nvPicPr>
         <p:blipFill>
-          <a:blip xmlns:r="http://schemas.openxmlformats.org/officeDocument/2006/relationships" xmlns:a="http://schemas.openxmlformats.org/drawingml/2006/main" r:embed="R1cd202bfbcc8429b"/>
+          <a:blip xmlns:r="http://schemas.openxmlformats.org/officeDocument/2006/relationships" xmlns:a="http://schemas.openxmlformats.org/drawingml/2006/main" r:embed="R389a7e1be61c41ff"/>
           <a:stretch xmlns:a="http://schemas.openxmlformats.org/drawingml/2006/main"/>
         </p:blipFill>
         <p:spPr>
-          <a:xfrm xmlns:a="http://schemas.openxmlformats.org/drawingml/2006/main">
+          <a:xfrm xmlns:a="http://schemas.openxmlformats.org/drawingml/2006/main" flipH="0" flipV="0">
             <a:off x="3406009" y="1685925"/>
             <a:ext cx="5379983" cy="4457700"/>
           </a:xfrm>
@@ -26823,6 +27718,7 @@
           <a:lstStyle xmlns:a="http://schemas.openxmlformats.org/drawingml/2006/main"/>
           <a:p xmlns:a="http://schemas.openxmlformats.org/drawingml/2006/main">
             <a:pPr algn="l">
+              <a:buNone/>
               <a:defRPr sz="825" b="1">
                 <a:solidFill>
                   <a:srgbClr val="607587"/>
@@ -26887,6 +27783,7 @@
           <a:lstStyle xmlns:a="http://schemas.openxmlformats.org/drawingml/2006/main"/>
           <a:p xmlns:a="http://schemas.openxmlformats.org/drawingml/2006/main">
             <a:pPr algn="l">
+              <a:buNone/>
               <a:defRPr sz="2625" b="1">
                 <a:solidFill>
                   <a:srgbClr val="152533"/>
@@ -26905,7 +27802,7 @@
                 <a:ea typeface="Aptos Display"/>
                 <a:cs typeface="Aptos Display"/>
               </a:rPr>
-              <a:t>Nominal VF screens do not become confirmed associations</a:t>
+              <a:t>Participant-aware VF screens remain exploratory</a:t>
             </a:r>
           </a:p>
         </p:txBody>
@@ -26986,6 +27883,7 @@
           <a:lstStyle xmlns:a="http://schemas.openxmlformats.org/drawingml/2006/main"/>
           <a:p xmlns:a="http://schemas.openxmlformats.org/drawingml/2006/main">
             <a:pPr algn="l">
+              <a:buNone/>
               <a:defRPr sz="1200" b="0">
                 <a:solidFill>
                   <a:srgbClr val="607587"/>
@@ -27004,7 +27902,7 @@
                 <a:ea typeface="Aptos"/>
                 <a:cs typeface="Aptos"/>
               </a:rPr>
-              <a:t>Participant-aware modelling and FDR correction define the evidential limit of the current dataset.</a:t>
+              <a:t>Participant-aware modelling in 532 selected episodes defines the current evidential boundary.</a:t>
             </a:r>
           </a:p>
         </p:txBody>
@@ -27085,6 +27983,7 @@
           <a:lstStyle xmlns:a="http://schemas.openxmlformats.org/drawingml/2006/main"/>
           <a:p xmlns:a="http://schemas.openxmlformats.org/drawingml/2006/main">
             <a:pPr algn="l">
+              <a:buNone/>
               <a:defRPr sz="825" b="1">
                 <a:solidFill>
                   <a:srgbClr val="607587"/>
@@ -27184,6 +28083,7 @@
           <a:lstStyle xmlns:a="http://schemas.openxmlformats.org/drawingml/2006/main"/>
           <a:p xmlns:a="http://schemas.openxmlformats.org/drawingml/2006/main">
             <a:pPr algn="l">
+              <a:buNone/>
               <a:defRPr sz="750" b="0">
                 <a:solidFill>
                   <a:srgbClr val="607587"/>
@@ -27202,7 +28102,7 @@
                 <a:ea typeface="Aptos"/>
                 <a:cs typeface="Aptos"/>
               </a:rPr>
-              <a:t>rUTI clinical-to-genomic review  |  current UTI_Status analysis  |  27 May 2026</a:t>
+              <a:t>rUTI clinical-to-genomic review  |  operational UTI phenotype | Longcycler-only analysis  |  14 July 2026</a:t>
             </a:r>
           </a:p>
         </p:txBody>
@@ -27248,6 +28148,7 @@
           <a:lstStyle xmlns:a="http://schemas.openxmlformats.org/drawingml/2006/main"/>
           <a:p xmlns:a="http://schemas.openxmlformats.org/drawingml/2006/main">
             <a:pPr algn="r">
+              <a:buNone/>
               <a:defRPr sz="900" b="1">
                 <a:solidFill>
                   <a:srgbClr val="607587"/>
@@ -27306,18 +28207,18 @@
       </p:sp>
       <p:pic>
         <p:nvPicPr>
-          <p:cNvPr id="13" name=""/>
+          <p:cNvPr id="26" name=""/>
           <p:cNvPicPr>
             <a:picLocks xmlns:a="http://schemas.openxmlformats.org/drawingml/2006/main" noChangeAspect="1"/>
           </p:cNvPicPr>
           <p:nvPr/>
         </p:nvPicPr>
         <p:blipFill>
-          <a:blip xmlns:r="http://schemas.openxmlformats.org/officeDocument/2006/relationships" xmlns:a="http://schemas.openxmlformats.org/drawingml/2006/main" r:embed="R39f6aad7a2f64cd0"/>
+          <a:blip xmlns:r="http://schemas.openxmlformats.org/officeDocument/2006/relationships" xmlns:a="http://schemas.openxmlformats.org/drawingml/2006/main" r:embed="Re14396b2278d460b"/>
           <a:stretch xmlns:a="http://schemas.openxmlformats.org/drawingml/2006/main"/>
         </p:blipFill>
         <p:spPr>
-          <a:xfrm xmlns:a="http://schemas.openxmlformats.org/drawingml/2006/main">
+          <a:xfrm xmlns:a="http://schemas.openxmlformats.org/drawingml/2006/main" flipH="0" flipV="0">
             <a:off x="2398102" y="1695450"/>
             <a:ext cx="7414846" cy="4381500"/>
           </a:xfrm>
@@ -27459,6 +28360,7 @@
           <a:lstStyle xmlns:a="http://schemas.openxmlformats.org/drawingml/2006/main"/>
           <a:p xmlns:a="http://schemas.openxmlformats.org/drawingml/2006/main">
             <a:pPr algn="l">
+              <a:buNone/>
               <a:defRPr sz="825" b="1">
                 <a:solidFill>
                   <a:srgbClr val="607587"/>
@@ -27523,6 +28425,7 @@
           <a:lstStyle xmlns:a="http://schemas.openxmlformats.org/drawingml/2006/main"/>
           <a:p xmlns:a="http://schemas.openxmlformats.org/drawingml/2006/main">
             <a:pPr algn="l">
+              <a:buNone/>
               <a:defRPr sz="2625" b="1">
                 <a:solidFill>
                   <a:srgbClr val="152533"/>
@@ -27541,7 +28444,7 @@
                 <a:ea typeface="Aptos Display"/>
                 <a:cs typeface="Aptos Display"/>
               </a:rPr>
-              <a:t>Participant 20026: symptoms emerge with a stable VF profile</a:t>
+              <a:t>9 operational Not_UTI-to-UTI transitions are all genomically linked</a:t>
             </a:r>
           </a:p>
         </p:txBody>
@@ -27622,6 +28525,7 @@
           <a:lstStyle xmlns:a="http://schemas.openxmlformats.org/drawingml/2006/main"/>
           <a:p xmlns:a="http://schemas.openxmlformats.org/drawingml/2006/main">
             <a:pPr algn="l">
+              <a:buNone/>
               <a:defRPr sz="1200" b="0">
                 <a:solidFill>
                   <a:srgbClr val="607587"/>
@@ -27640,7 +28544,7 @@
                 <a:ea typeface="Aptos"/>
                 <a:cs typeface="Aptos"/>
               </a:rPr>
-              <a:t>A concrete transition clarifies what same-strain, stable-profile evidence means.</a:t>
+              <a:t>5 of 9 focused direct pairs are at or below 25 SNPs.</a:t>
             </a:r>
           </a:p>
         </p:txBody>
@@ -27721,6 +28625,7 @@
           <a:lstStyle xmlns:a="http://schemas.openxmlformats.org/drawingml/2006/main"/>
           <a:p xmlns:a="http://schemas.openxmlformats.org/drawingml/2006/main">
             <a:pPr algn="l">
+              <a:buNone/>
               <a:defRPr sz="825" b="1">
                 <a:solidFill>
                   <a:srgbClr val="607587"/>
@@ -27820,6 +28725,7 @@
           <a:lstStyle xmlns:a="http://schemas.openxmlformats.org/drawingml/2006/main"/>
           <a:p xmlns:a="http://schemas.openxmlformats.org/drawingml/2006/main">
             <a:pPr algn="l">
+              <a:buNone/>
               <a:defRPr sz="750" b="0">
                 <a:solidFill>
                   <a:srgbClr val="607587"/>
@@ -27838,7 +28744,7 @@
                 <a:ea typeface="Aptos"/>
                 <a:cs typeface="Aptos"/>
               </a:rPr>
-              <a:t>rUTI clinical-to-genomic review  |  current UTI_Status analysis  |  27 May 2026</a:t>
+              <a:t>rUTI clinical-to-genomic review  |  operational UTI phenotype | Longcycler-only analysis  |  14 July 2026</a:t>
             </a:r>
           </a:p>
         </p:txBody>
@@ -27884,6 +28790,7 @@
           <a:lstStyle xmlns:a="http://schemas.openxmlformats.org/drawingml/2006/main"/>
           <a:p xmlns:a="http://schemas.openxmlformats.org/drawingml/2006/main">
             <a:pPr algn="r">
+              <a:buNone/>
               <a:defRPr sz="900" b="1">
                 <a:solidFill>
                   <a:srgbClr val="607587"/>
@@ -27983,6 +28890,7 @@
           <a:lstStyle xmlns:a="http://schemas.openxmlformats.org/drawingml/2006/main"/>
           <a:p xmlns:a="http://schemas.openxmlformats.org/drawingml/2006/main">
             <a:pPr algn="l">
+              <a:buNone/>
               <a:defRPr sz="825" b="1">
                 <a:solidFill>
                   <a:srgbClr val="2678B8"/>
@@ -28082,6 +28990,7 @@
           <a:lstStyle xmlns:a="http://schemas.openxmlformats.org/drawingml/2006/main"/>
           <a:p xmlns:a="http://schemas.openxmlformats.org/drawingml/2006/main">
             <a:pPr algn="l">
+              <a:buNone/>
               <a:defRPr sz="825" b="1">
                 <a:solidFill>
                   <a:srgbClr val="E7772F"/>
@@ -28146,6 +29055,7 @@
           <a:lstStyle xmlns:a="http://schemas.openxmlformats.org/drawingml/2006/main"/>
           <a:p xmlns:a="http://schemas.openxmlformats.org/drawingml/2006/main">
             <a:pPr algn="l">
+              <a:buNone/>
               <a:defRPr sz="2025" b="1">
                 <a:solidFill>
                   <a:srgbClr val="2678B8"/>
@@ -28164,7 +29074,7 @@
                 <a:ea typeface="Aptos Display"/>
                 <a:cs typeface="Aptos Display"/>
               </a:rPr>
-              <a:t>T3</a:t>
+              <a:t>9 cases</a:t>
             </a:r>
           </a:p>
         </p:txBody>
@@ -28210,6 +29120,7 @@
           <a:lstStyle xmlns:a="http://schemas.openxmlformats.org/drawingml/2006/main"/>
           <a:p xmlns:a="http://schemas.openxmlformats.org/drawingml/2006/main">
             <a:pPr algn="l">
+              <a:buNone/>
               <a:defRPr sz="1200" b="0">
                 <a:solidFill>
                   <a:srgbClr val="152533"/>
@@ -28228,11 +29139,12 @@
                 <a:ea typeface="Aptos"/>
                 <a:cs typeface="Aptos"/>
               </a:rPr>
-              <a:t>culture-supported episode</a:t>
+              <a:t>operational Not_UTI</a:t>
             </a:r>
           </a:p>
           <a:p xmlns:a="http://schemas.openxmlformats.org/drawingml/2006/main">
             <a:pPr algn="l">
+              <a:buNone/>
               <a:defRPr sz="1200" b="0">
                 <a:solidFill>
                   <a:srgbClr val="152533"/>
@@ -28251,7 +29163,7 @@
                 <a:ea typeface="Aptos"/>
                 <a:cs typeface="Aptos"/>
               </a:rPr>
-              <a:t>without UTI classification</a:t>
+              <a:t>starting endpoints</a:t>
             </a:r>
           </a:p>
         </p:txBody>
@@ -28297,6 +29209,7 @@
           <a:lstStyle xmlns:a="http://schemas.openxmlformats.org/drawingml/2006/main"/>
           <a:p xmlns:a="http://schemas.openxmlformats.org/drawingml/2006/main">
             <a:pPr algn="l">
+              <a:buNone/>
               <a:defRPr sz="2025" b="1">
                 <a:solidFill>
                   <a:srgbClr val="E7772F"/>
@@ -28315,7 +29228,7 @@
                 <a:ea typeface="Aptos Display"/>
                 <a:cs typeface="Aptos Display"/>
               </a:rPr>
-              <a:t>UTI-1</a:t>
+              <a:t>9 linked</a:t>
             </a:r>
           </a:p>
         </p:txBody>
@@ -28361,6 +29274,7 @@
           <a:lstStyle xmlns:a="http://schemas.openxmlformats.org/drawingml/2006/main"/>
           <a:p xmlns:a="http://schemas.openxmlformats.org/drawingml/2006/main">
             <a:pPr algn="l">
+              <a:buNone/>
               <a:defRPr sz="1200" b="0">
                 <a:solidFill>
                   <a:srgbClr val="152533"/>
@@ -28379,11 +29293,12 @@
                 <a:ea typeface="Aptos"/>
                 <a:cs typeface="Aptos"/>
               </a:rPr>
-              <a:t>symptom emergence on</a:t>
+              <a:t>operational UTI</a:t>
             </a:r>
           </a:p>
           <a:p xmlns:a="http://schemas.openxmlformats.org/drawingml/2006/main">
             <a:pPr algn="l">
+              <a:buNone/>
               <a:defRPr sz="1200" b="0">
                 <a:solidFill>
                   <a:srgbClr val="152533"/>
@@ -28402,7 +29317,7 @@
                 <a:ea typeface="Aptos"/>
                 <a:cs typeface="Aptos"/>
               </a:rPr>
-              <a:t>culture-supported bacteriuria</a:t>
+              <a:t>ending endpoints</a:t>
             </a:r>
           </a:p>
         </p:txBody>
@@ -28588,6 +29503,7 @@
           <a:lstStyle xmlns:a="http://schemas.openxmlformats.org/drawingml/2006/main"/>
           <a:p xmlns:a="http://schemas.openxmlformats.org/drawingml/2006/main">
             <a:pPr algn="ctr">
+              <a:buNone/>
               <a:defRPr sz="825" b="1">
                 <a:solidFill>
                   <a:srgbClr val="17855B"/>
@@ -28606,7 +29522,7 @@
                 <a:ea typeface="Aptos Mono"/>
                 <a:cs typeface="Aptos Mono"/>
               </a:rPr>
-              <a:t>42 DAYS</a:t>
+              <a:t>25 SNP CUTOFF</a:t>
             </a:r>
           </a:p>
         </p:txBody>
@@ -28652,6 +29568,7 @@
           <a:lstStyle xmlns:a="http://schemas.openxmlformats.org/drawingml/2006/main"/>
           <a:p xmlns:a="http://schemas.openxmlformats.org/drawingml/2006/main">
             <a:pPr algn="ctr">
+              <a:buNone/>
               <a:defRPr sz="2325" b="1">
                 <a:solidFill>
                   <a:srgbClr val="17855B"/>
@@ -28670,7 +29587,7 @@
                 <a:ea typeface="Aptos Display"/>
                 <a:cs typeface="Aptos Display"/>
               </a:rPr>
-              <a:t>5 SNPs</a:t>
+              <a:t>5 of 9</a:t>
             </a:r>
           </a:p>
         </p:txBody>
@@ -28716,6 +29633,7 @@
           <a:lstStyle xmlns:a="http://schemas.openxmlformats.org/drawingml/2006/main"/>
           <a:p xmlns:a="http://schemas.openxmlformats.org/drawingml/2006/main">
             <a:pPr algn="ctr">
+              <a:buNone/>
               <a:defRPr sz="975" b="0">
                 <a:solidFill>
                   <a:srgbClr val="607587"/>
@@ -28734,7 +29652,7 @@
                 <a:ea typeface="Aptos"/>
                 <a:cs typeface="Aptos"/>
               </a:rPr>
-              <a:t>strong same-strain evidence</a:t>
+              <a:t>at or below the operational threshold</a:t>
             </a:r>
           </a:p>
         </p:txBody>
@@ -28780,6 +29698,7 @@
           <a:lstStyle xmlns:a="http://schemas.openxmlformats.org/drawingml/2006/main"/>
           <a:p xmlns:a="http://schemas.openxmlformats.org/drawingml/2006/main">
             <a:pPr algn="l">
+              <a:buNone/>
               <a:defRPr sz="825" b="1">
                 <a:solidFill>
                   <a:srgbClr val="607587"/>
@@ -28914,6 +29833,7 @@
           <a:lstStyle xmlns:a="http://schemas.openxmlformats.org/drawingml/2006/main"/>
           <a:p xmlns:a="http://schemas.openxmlformats.org/drawingml/2006/main">
             <a:pPr algn="l">
+              <a:buNone/>
               <a:defRPr sz="825" b="1">
                 <a:solidFill>
                   <a:srgbClr val="607587"/>
@@ -28978,6 +29898,7 @@
           <a:lstStyle xmlns:a="http://schemas.openxmlformats.org/drawingml/2006/main"/>
           <a:p xmlns:a="http://schemas.openxmlformats.org/drawingml/2006/main">
             <a:pPr algn="l">
+              <a:buNone/>
               <a:defRPr sz="1800" b="1">
                 <a:solidFill>
                   <a:srgbClr val="17855B"/>
@@ -28996,7 +29917,7 @@
                 <a:ea typeface="Aptos Display"/>
                 <a:cs typeface="Aptos Display"/>
               </a:rPr>
-              <a:t>+0 / -0</a:t>
+              <a:t>140/371</a:t>
             </a:r>
           </a:p>
         </p:txBody>
@@ -29042,6 +29963,7 @@
           <a:lstStyle xmlns:a="http://schemas.openxmlformats.org/drawingml/2006/main"/>
           <a:p xmlns:a="http://schemas.openxmlformats.org/drawingml/2006/main">
             <a:pPr algn="l">
+              <a:buNone/>
               <a:defRPr sz="900" b="0">
                 <a:solidFill>
                   <a:srgbClr val="607587"/>
@@ -29060,7 +29982,7 @@
                 <a:ea typeface="Aptos"/>
                 <a:cs typeface="Aptos"/>
               </a:rPr>
-              <a:t>stable</a:t>
+              <a:t>adjacent pairs &lt;= threshold</a:t>
             </a:r>
           </a:p>
         </p:txBody>
@@ -29176,6 +30098,7 @@
           <a:lstStyle xmlns:a="http://schemas.openxmlformats.org/drawingml/2006/main"/>
           <a:p xmlns:a="http://schemas.openxmlformats.org/drawingml/2006/main">
             <a:pPr algn="l">
+              <a:buNone/>
               <a:defRPr sz="825" b="1">
                 <a:solidFill>
                   <a:srgbClr val="607587"/>
@@ -29240,6 +30163,7 @@
           <a:lstStyle xmlns:a="http://schemas.openxmlformats.org/drawingml/2006/main"/>
           <a:p xmlns:a="http://schemas.openxmlformats.org/drawingml/2006/main">
             <a:pPr algn="l">
+              <a:buNone/>
               <a:defRPr sz="1800" b="1">
                 <a:solidFill>
                   <a:srgbClr val="17855B"/>
@@ -29258,7 +30182,7 @@
                 <a:ea typeface="Aptos Display"/>
                 <a:cs typeface="Aptos Display"/>
               </a:rPr>
-              <a:t>5</a:t>
+              <a:t>893</a:t>
             </a:r>
           </a:p>
         </p:txBody>
@@ -29304,6 +30228,7 @@
           <a:lstStyle xmlns:a="http://schemas.openxmlformats.org/drawingml/2006/main"/>
           <a:p xmlns:a="http://schemas.openxmlformats.org/drawingml/2006/main">
             <a:pPr algn="l">
+              <a:buNone/>
               <a:defRPr sz="900" b="0">
                 <a:solidFill>
                   <a:srgbClr val="607587"/>
@@ -29322,7 +30247,7 @@
                 <a:ea typeface="Aptos"/>
                 <a:cs typeface="Aptos"/>
               </a:rPr>
-              <a:t>low</a:t>
+              <a:t>all direct pairs</a:t>
             </a:r>
           </a:p>
         </p:txBody>
@@ -29438,6 +30363,7 @@
           <a:lstStyle xmlns:a="http://schemas.openxmlformats.org/drawingml/2006/main"/>
           <a:p xmlns:a="http://schemas.openxmlformats.org/drawingml/2006/main">
             <a:pPr algn="l">
+              <a:buNone/>
               <a:defRPr sz="825" b="1">
                 <a:solidFill>
                   <a:srgbClr val="607587"/>
@@ -29502,6 +30428,7 @@
           <a:lstStyle xmlns:a="http://schemas.openxmlformats.org/drawingml/2006/main"/>
           <a:p xmlns:a="http://schemas.openxmlformats.org/drawingml/2006/main">
             <a:pPr algn="l">
+              <a:buNone/>
               <a:defRPr sz="1800" b="1">
                 <a:solidFill>
                   <a:srgbClr val="E7772F"/>
@@ -29520,7 +30447,7 @@
                 <a:ea typeface="Aptos Display"/>
                 <a:cs typeface="Aptos Display"/>
               </a:rPr>
-              <a:t>Not_UTI -&gt; UTI</a:t>
+              <a:t>9 -&gt; 9</a:t>
             </a:r>
           </a:p>
         </p:txBody>
@@ -29566,6 +30493,7 @@
           <a:lstStyle xmlns:a="http://schemas.openxmlformats.org/drawingml/2006/main"/>
           <a:p xmlns:a="http://schemas.openxmlformats.org/drawingml/2006/main">
             <a:pPr algn="l">
+              <a:buNone/>
               <a:defRPr sz="900" b="0">
                 <a:solidFill>
                   <a:srgbClr val="607587"/>
@@ -29584,7 +30512,7 @@
                 <a:ea typeface="Aptos"/>
                 <a:cs typeface="Aptos"/>
               </a:rPr>
-              <a:t>changed</a:t>
+              <a:t>cases -&gt; linked</a:t>
             </a:r>
           </a:p>
         </p:txBody>
@@ -29665,6 +30593,7 @@
           <a:lstStyle xmlns:a="http://schemas.openxmlformats.org/drawingml/2006/main"/>
           <a:p xmlns:a="http://schemas.openxmlformats.org/drawingml/2006/main">
             <a:pPr algn="l">
+              <a:buNone/>
               <a:defRPr sz="1350" b="1">
                 <a:solidFill>
                   <a:srgbClr val="152533"/>
@@ -29683,7 +30612,7 @@
                 <a:ea typeface="Aptos"/>
                 <a:cs typeface="Aptos"/>
               </a:rPr>
-              <a:t>Supports a host-state or unmeasured-regulation hypothesis; it does not prove mechanism.</a:t>
+              <a:t>Close direct pairs motivate host-state or regulatory hypotheses; neither close nor distant pairs prove mechanism.</a:t>
             </a:r>
           </a:p>
         </p:txBody>
